--- a/inbox/Application Aware Networking/Book_01_FedAAN_InfoBlox_DDI_Briefing.pptx
+++ b/inbox/Application Aware Networking/Book_01_FedAAN_InfoBlox_DDI_Briefing.pptx
@@ -33,9 +33,10 @@
     <p:sldId id="281" r:id="rId27"/>
     <p:sldId id="282" r:id="rId28"/>
     <p:sldId id="283" r:id="rId29"/>
+    <p:sldId id="284" r:id="rId30"/>
   </p:sldIdLst>
   <p:notesMasterIdLst>
-    <p:notesMasterId r:id="rId30"/>
+    <p:notesMasterId r:id="rId31"/>
   </p:notesMasterIdLst>
   <p:sldSz cx="9144000" cy="5143500"/>
   <p:notesSz cx="5143500" cy="9144000"/>
@@ -2042,8 +2043,8 @@
           <a:p>
             <a:r>
               <a:rPr lang="en-US" dirty="0"/>
-              <a:t>CISA ZTMM v2.0 mapping from Book 01 section 8 — five pillars, three cross-cutting capabilities; InfoBlox lands hardest on Networks plus two cross-cuts. Networks pillar (deepest): DNS-layer policy enforcement means a blocked destination never even gets a TCP connection — the RPZ answer is the control point; DNSSEC covers every zone including the private SDN segments that cloud-native resolvers cannot sign; and traffic steering answers (DNS Traffic Control) inherit the same signing and audit posture. Advanced/Optimal maturity in the Networks pillar requires exactly the certificate-to-IP binding and DNS-layer enforcement shown in the workload identity sequence. Identity pillar: the network's contribution is that every IP host record carries the certificate thumbprint and expiry of the workload behind it — the address layer participates in verification instead of being trusted implicitly. Visibility &amp; analytics: one syslog stream from all four environments into Sentinel/Splunk — DNS queries, DHCP leases, RPZ blocks — is the query-level telemetry Zero Trust analytics need. Automation &amp; orchestration: the atomic IP → DNS → certificate pipeline and the M365 GCC endpoint propagation both remove humans from repetitive enforcement loops. Keep control citations at the FedRAMP Moderate baseline.
-Vendor sources: https://www.cisa.gov/sites/default/files/2023-04/zero_trust_maturity_model_v2_508.pdf</a:t>
+              <a:t>The federal compliance clock — added in the 2026-07-07 timeline pass; the fully-sourced version with the elapsed baseline lives in the Federal AAN / ConMon Gap Roadmap, the series' single source of truth for dates. Walk the rows: August 3 and 31, 2026 — FedRAMP 20x submission windows open, Class A first, then Class B and C, which is the GCC Moderate window (marketplace listings opened July 6; FedRAMP Ready went legacy July 28; temporary Rev5 conversion paths opened August 10). August 7, 2026 — BOD 26-04 (issued June 10, 2026) requires agency vulnerability-management policies to support risk-based remediation under its four-variable model: exposure, KEV listing, exploit automatability, and technical impact, with timelines from 3 days to deferral. September 21, 2026 — every FIPS 140-2 certificate moves to NIST's Historical List, ending new procurement reliance on 140-2-only validated modules; verify cryptographic modules are FIPS 140-3 tracked. December 7, 2026 — BOD 26-04's remediation timelines take force AND FedRAMP's Vulnerability Detection and Response / Vulnerability Evaluation and Reporting rules become mandatory: SBOM plus vendor disclosure. January 1, 2027 — the Consolidated Rules become mandatory for all FedRAMP systems, and CNSA 2.0's acquisition gate opens for National Security Systems (ML-KEM-1024, ML-DSA-87 — NSS-scoped, with the civilian trajectory following via M-23-02). June 11, 2027 — no new Rev5 certifications. Around August 2027 — the next scheduled NIST 800-53 release on the two-year cadence; note Release 5.2.0 (August 27, 2025) already added SA-15(13), SA-24, and SI-2(7), which are not yet mapped in the series' Parts 11/15 closure tables — a tracked action item. 2030/2035 — quantum-vulnerable cryptography is deprecated then prohibited; M-23-02's annual crypto inventories run to that horizon. The bottom bar reminds the audience of the mandates already in force: M-21-31 logging tiers, M-21-07 IPv6 targets, M-22-09 Zero Trust goals (past due but still measured, continued by M-24-14 and M-25-04), and BOD 25-01 SCuBA policies.
+Vendor sources: https://www.fedramp.gov/20x/ | https://www.cisa.gov/news-events/directives/bod-26-04-prioritizing-security-updates-based-risk | https://csrc.nist.gov/News/2025/nist-releases-revision-to-sp-800-53-controls | uiao repo: inbox/Application Aware Networking/federal-aan-conmon-gap-roadmap.md</a:t>
             </a:r>
             <a:endParaRPr lang="en-US" dirty="0"/>
           </a:p>
@@ -2131,8 +2132,8 @@
           <a:p>
             <a:r>
               <a:rPr lang="en-US" dirty="0"/>
-              <a:t>Build sequence 1 of 2 — the first four phases from Book 01 section 14; every phase ships standalone value, no big-bang dependency. Phase 0 (month 1): procure BloxOne DDI Federal via the AWS GovCloud Marketplace against the existing EA — no new IDIQ; reference CSO FR2017257053 (FedRAMP Moderate) in procurement documentation; design the Network View CIDR plan by auditing all existing ranges across on-prem, Azure VNets, AWS VPCs, and OCI VCNs for overlaps; engage InfoBlox Professional Services for the VCF 9.1 integration workshop. Phase 1 (months 1–3), the anchor: deploy the Grid Master HA pair; import all AD DNS zones; enable DNSSEC for agency.gov and submit the DS record to the .gov TLD registrar — that alone closes the SC-20 gap; migrate Windows Server DHCP scopes to Grid DHCP with fingerprinting (the device-identity feed Book 02's NAC inventory builds on); configure syslog to the SIEM and verify AU-12 receipt; deploy the SCEP connector to ADCS and test automated enrollment; generate the first CM-8 inventory export and reconcile against the CMDB. Phase 2 (months 2–4): update VCF to 9.1, point VCF Automation at the InfoBlox WAPI as external IPAM backend, route NSX-T DHCP profiles' DNS to Grid Members, and verify NSX-T VM assignments appear in the On-Premises Network View within 60 seconds. Phase 3 (months 3–5): Grid Member as an Azure VM in the Hub VNet; Azure DNS Private Resolver forwards to it; register all VNet/subnet CIDRs in the Azure-GCC view; enable Key Vault certificate polling; and turn on the M365 GCC endpoint polling with RPZ passthrough/block testing.
-Vendor sources: https://www.fedramp.gov/marketplace/products/FR2017257053/ | https://blogs.vmware.com/cloud-foundation/2026/05/15/vcf-networking-9-1-seamless-ddi-integration-with-infoblox/</a:t>
+              <a:t>CISA ZTMM v2.0 mapping from Book 01 section 8 — five pillars, three cross-cutting capabilities; InfoBlox lands hardest on Networks plus two cross-cuts. Networks pillar (deepest): DNS-layer policy enforcement means a blocked destination never even gets a TCP connection — the RPZ answer is the control point; DNSSEC covers every zone including the private SDN segments that cloud-native resolvers cannot sign; and traffic steering answers (DNS Traffic Control) inherit the same signing and audit posture. Advanced/Optimal maturity in the Networks pillar requires exactly the certificate-to-IP binding and DNS-layer enforcement shown in the workload identity sequence. Identity pillar: the network's contribution is that every IP host record carries the certificate thumbprint and expiry of the workload behind it — the address layer participates in verification instead of being trusted implicitly. Visibility &amp; analytics: one syslog stream from all four environments into Sentinel/Splunk — DNS queries, DHCP leases, RPZ blocks — is the query-level telemetry Zero Trust analytics need. Automation &amp; orchestration: the atomic IP → DNS → certificate pipeline and the M365 GCC endpoint propagation both remove humans from repetitive enforcement loops. Keep control citations at the FedRAMP Moderate baseline.
+Vendor sources: https://www.cisa.gov/sites/default/files/2023-04/zero_trust_maturity_model_v2_508.pdf</a:t>
             </a:r>
             <a:endParaRPr lang="en-US" dirty="0"/>
           </a:p>
@@ -2220,8 +2221,8 @@
           <a:p>
             <a:r>
               <a:rPr lang="en-US" dirty="0"/>
-              <a:t>Build sequence 2 of 2 — phases 4 through 6. Phase 4 (months 5–7), AWS GovCloud: deploy the Grid Member as an EC2 instance in the Transit VPC; update VPC DHCP Options Sets to use the Grid Member as domain-name-server so all EC2 DNS rides the enterprise RPZ/DNSSEC layer; enable the AWS connector and register all VPC CIDR allocations in the AWS-GovCloud Network View; configure ACM DNS-validation CNAME automation and test issuance against an internal ALB; integrate RPZ events with Security Hub findings. Phase 5 (months 7–9), OCI / OPM HRIT: import all known OPM HRIT service endpoint IPs and FQDNs as external host records; configure the conditional forwarder for OPM HRIT FQDNs through the FastConnect path; connect the Certificate Tracker to the HRIT HTTPS endpoints and verify the 90-day expiry alert fires; document the OCI integration in the SSP SA-9 external-services table with OPM as system owner. Phase 6 (months 9–12), FedRAMP continuous monitoring: complete the InfoBlox ATO documentation in the SSP, referencing CSO FR2017257053 for DDI-layer control inheritance at the Moderate baseline; schedule all eight control evidence exports as recurring reports; implement the Terraform pipeline so IP allocation → DNS record → SCEP enrollment runs as a single atomic pipeline; and wire the FedRAMP 20x KSI checks — DNSSEC status, RPZ coverage, cert expiry, CIDR conflict — into CI/CD as pipeline tests, ahead of the January 1, 2027 mandatory date.
-Vendor sources: https://www.fedramp.gov/marketplace/products/FR2017257053/ | https://aws.amazon.com/blogs/publicsector/preventive-controls-for-fedramp-20x-using-scps-and-guardrails-to-enforce-ksis/</a:t>
+              <a:t>Build sequence 1 of 2 — the first four phases from Book 01 section 14; every phase ships standalone value, no big-bang dependency. Phase 0 (month 1): procure BloxOne DDI Federal via the AWS GovCloud Marketplace against the existing EA — no new IDIQ; reference CSO FR2017257053 (FedRAMP Moderate) in procurement documentation; design the Network View CIDR plan by auditing all existing ranges across on-prem, Azure VNets, AWS VPCs, and OCI VCNs for overlaps; engage InfoBlox Professional Services for the VCF 9.1 integration workshop. Phase 1 (months 1–3), the anchor: deploy the Grid Master HA pair; import all AD DNS zones; enable DNSSEC for agency.gov and submit the DS record to the .gov TLD registrar — that alone closes the SC-20 gap; migrate Windows Server DHCP scopes to Grid DHCP with fingerprinting (the device-identity feed Book 02's NAC inventory builds on); configure syslog to the SIEM and verify AU-12 receipt; deploy the SCEP connector to ADCS and test automated enrollment; generate the first CM-8 inventory export and reconcile against the CMDB. Phase 2 (months 2–4): update VCF to 9.1, point VCF Automation at the InfoBlox WAPI as external IPAM backend, route NSX-T DHCP profiles' DNS to Grid Members, and verify NSX-T VM assignments appear in the On-Premises Network View within 60 seconds. Phase 3 (months 3–5): Grid Member as an Azure VM in the Hub VNet; Azure DNS Private Resolver forwards to it; register all VNet/subnet CIDRs in the Azure-GCC view; enable Key Vault certificate polling; and turn on the M365 GCC endpoint polling with RPZ passthrough/block testing.
+Vendor sources: https://www.fedramp.gov/marketplace/products/FR2017257053/ | https://blogs.vmware.com/cloud-foundation/2026/05/15/vcf-networking-9-1-seamless-ddi-integration-with-infoblox/</a:t>
             </a:r>
             <a:endParaRPr lang="en-US" dirty="0"/>
           </a:p>
@@ -2309,8 +2310,8 @@
           <a:p>
             <a:r>
               <a:rPr lang="en-US" dirty="0"/>
-              <a:t>Close on the ask: this is a draft proposal; the technical case is Book 01 (Books 02–03 extend it to NAC and cryptographic identity); the five decisions on the right move it from draft to program. Recommend starting with the Path A/B decision, since procurement path and boundary documentation both hang off it. On the Grid Admin decision, give the delegation model from Book 01 section 3.3 if asked: administrative authority is split into four delegated function areas — DNS zone management to the Network/DNS team (with DNSSEC key custody shared with OIS), DHCP scope management to Network Infrastructure, SCEP/certificate binding to the OIS/PKI team, and per-environment Grid Member management to each cloud infrastructure team — each scoped read/write to its own area only. Component-level zone delegation (aws/azure/oci/onprem/apps sub-zones) lets each CIO component manage its own namespace without touching others. The one full-authority Grid Admin role must be protected with MFA and a privileged access workstation, with the role-holder accountability model defined by OIS and the CIO Office before the Grid is deployed. Everything in this deck is scoped to FedRAMP Moderate — no High-baseline claims — and the InfoBlox authorization level should be re-verified on the Marketplace at procurement time. The Date Code on the title slide identifies this version.
-Vendor sources: https://www.fedramp.gov/marketplace/products/FR2017257053/</a:t>
+              <a:t>Build sequence 2 of 2 — phases 4 through 6. Phase 4 (months 5–7), AWS GovCloud: deploy the Grid Member as an EC2 instance in the Transit VPC; update VPC DHCP Options Sets to use the Grid Member as domain-name-server so all EC2 DNS rides the enterprise RPZ/DNSSEC layer; enable the AWS connector and register all VPC CIDR allocations in the AWS-GovCloud Network View; configure ACM DNS-validation CNAME automation and test issuance against an internal ALB; integrate RPZ events with Security Hub findings. Phase 5 (months 7–9), OCI / OPM HRIT: import all known OPM HRIT service endpoint IPs and FQDNs as external host records; configure the conditional forwarder for OPM HRIT FQDNs through the FastConnect path; connect the Certificate Tracker to the HRIT HTTPS endpoints and verify the 90-day expiry alert fires; document the OCI integration in the SSP SA-9 external-services table with OPM as system owner. Phase 6 (months 9–12), FedRAMP continuous monitoring: complete the InfoBlox ATO documentation in the SSP, referencing CSO FR2017257053 for DDI-layer control inheritance at the Moderate baseline; schedule all eight control evidence exports as recurring reports; implement the Terraform pipeline so IP allocation → DNS record → SCEP enrollment runs as a single atomic pipeline; and wire the FedRAMP 20x KSI checks — DNSSEC status, RPZ coverage, cert expiry, CIDR conflict — into CI/CD as pipeline tests, ahead of the January 1, 2027 mandatory date.
+Vendor sources: https://www.fedramp.gov/marketplace/products/FR2017257053/ | https://aws.amazon.com/blogs/publicsector/preventive-controls-for-fedramp-20x-using-scps-and-guardrails-to-enforce-ksis/</a:t>
             </a:r>
             <a:endParaRPr lang="en-US" dirty="0"/>
           </a:p>
@@ -2334,6 +2335,95 @@
             <a:fld id="{F7021451-1387-4CA6-816F-3879F97B5CBC}" type="slidenum">
               <a:rPr lang="en-US"/>
               <a:t>28</a:t>
+            </a:fld>
+            <a:endParaRPr lang="en-US"/>
+          </a:p>
+        </p:txBody>
+      </p:sp>
+    </p:spTree>
+    <p:extLst>
+      <p:ext uri="{BB962C8B-B14F-4D97-AF65-F5344CB8AC3E}">
+        <p14:creationId xmlns:p14="http://schemas.microsoft.com/office/powerpoint/2010/main" val="1024086991"/>
+      </p:ext>
+    </p:extLst>
+  </p:cSld>
+  <p:clrMapOvr>
+    <a:masterClrMapping/>
+  </p:clrMapOvr>
+</p:notes>
+</file>
+
+<file path=ppt/notesSlides/notesSlide29.xml><?xml version="1.0" encoding="utf-8"?>
+<p:notes xmlns:a="http://schemas.openxmlformats.org/drawingml/2006/main" xmlns:r="http://schemas.openxmlformats.org/officeDocument/2006/relationships" xmlns:p="http://schemas.openxmlformats.org/presentationml/2006/main">
+  <p:cSld>
+    <p:spTree>
+      <p:nvGrpSpPr>
+        <p:cNvPr id="1" name=""/>
+        <p:cNvGrpSpPr/>
+        <p:nvPr/>
+      </p:nvGrpSpPr>
+      <p:grpSpPr>
+        <a:xfrm>
+          <a:off x="0" y="0"/>
+          <a:ext cx="0" cy="0"/>
+          <a:chOff x="0" y="0"/>
+          <a:chExt cx="0" cy="0"/>
+        </a:xfrm>
+      </p:grpSpPr>
+      <p:sp>
+        <p:nvSpPr>
+          <p:cNvPr id="2" name="Slide Image Placeholder 1"/>
+          <p:cNvSpPr>
+            <a:spLocks noGrp="1" noRot="1" noChangeAspect="1"/>
+          </p:cNvSpPr>
+          <p:nvPr>
+            <p:ph type="sldImg"/>
+          </p:nvPr>
+        </p:nvSpPr>
+        <p:spPr/>
+      </p:sp>
+      <p:sp>
+        <p:nvSpPr>
+          <p:cNvPr id="3" name="Notes Placeholder 2"/>
+          <p:cNvSpPr>
+            <a:spLocks noGrp="1"/>
+          </p:cNvSpPr>
+          <p:nvPr>
+            <p:ph type="body" idx="1"/>
+          </p:nvPr>
+        </p:nvSpPr>
+        <p:spPr/>
+        <p:txBody>
+          <a:bodyPr/>
+          <a:lstStyle/>
+          <a:p>
+            <a:r>
+              <a:rPr lang="en-US" dirty="0"/>
+              <a:t>Close on the ask: this is a draft proposal; the technical case is Book 01 (Books 02–03 extend it to NAC and cryptographic identity); the five decisions on the right move it from draft to program. Recommend starting with the Path A/B decision, since procurement path and boundary documentation both hang off it. On the Grid Admin decision, give the delegation model from Book 01 section 3.3 if asked: administrative authority is split into four delegated function areas — DNS zone management to the Network/DNS team (with DNSSEC key custody shared with OIS), DHCP scope management to Network Infrastructure, SCEP/certificate binding to the OIS/PKI team, and per-environment Grid Member management to each cloud infrastructure team — each scoped read/write to its own area only. Component-level zone delegation (aws/azure/oci/onprem/apps sub-zones) lets each CIO component manage its own namespace without touching others. The one full-authority Grid Admin role must be protected with MFA and a privileged access workstation, with the role-holder accountability model defined by OIS and the CIO Office before the Grid is deployed. Everything in this deck is scoped to FedRAMP Moderate — no High-baseline claims — and the InfoBlox authorization level should be re-verified on the Marketplace at procurement time. The Date Code on the title slide identifies this version.
+Vendor sources: https://www.fedramp.gov/marketplace/products/FR2017257053/</a:t>
+            </a:r>
+            <a:endParaRPr lang="en-US" dirty="0"/>
+          </a:p>
+        </p:txBody>
+      </p:sp>
+      <p:sp>
+        <p:nvSpPr>
+          <p:cNvPr id="4" name="Slide Number Placeholder 3"/>
+          <p:cNvSpPr>
+            <a:spLocks noGrp="1"/>
+          </p:cNvSpPr>
+          <p:nvPr>
+            <p:ph type="sldNum" sz="quarter" idx="10"/>
+          </p:nvPr>
+        </p:nvSpPr>
+        <p:spPr/>
+        <p:txBody>
+          <a:bodyPr/>
+          <a:lstStyle/>
+          <a:p>
+            <a:fld id="{F7021451-1387-4CA6-816F-3879F97B5CBC}" type="slidenum">
+              <a:rPr lang="en-US"/>
+              <a:t>29</a:t>
             </a:fld>
             <a:endParaRPr lang="en-US"/>
           </a:p>
@@ -3974,7 +4064,7 @@
                 <a:ea typeface="Arial" pitchFamily="34" charset="-122"/>
                 <a:cs typeface="Arial" pitchFamily="34" charset="-120"/>
               </a:rPr>
-              <a:t>Date Code: 2026-07-07 09:06 ET</a:t>
+              <a:t>Date Code: 2026-07-07 11:57 ET</a:t>
             </a:r>
             <a:endParaRPr lang="en-US" sz="1000" dirty="0"/>
           </a:p>
@@ -17910,7 +18000,7 @@
                 <a:ea typeface="Arial" pitchFamily="34" charset="-122"/>
                 <a:cs typeface="Arial" pitchFamily="34" charset="-120"/>
               </a:rPr>
-              <a:t>CISA ZERO TRUST MATURITY MODEL V2.0</a:t>
+              <a:t>THE FEDERAL COMPLIANCE CLOCK</a:t>
             </a:r>
             <a:endParaRPr lang="en-US" sz="1100" dirty="0"/>
           </a:p>
@@ -17941,7 +18031,7 @@
               <a:buNone/>
             </a:pPr>
             <a:r>
-              <a:rPr lang="en-US" sz="2600" b="1" dirty="0">
+              <a:rPr lang="en-US" sz="2400" b="1" dirty="0">
                 <a:solidFill>
                   <a:srgbClr val="1F3A5F"/>
                 </a:solidFill>
@@ -17949,9 +18039,9 @@
                 <a:ea typeface="Arial" pitchFamily="34" charset="-122"/>
                 <a:cs typeface="Arial" pitchFamily="34" charset="-120"/>
               </a:rPr>
-              <a:t>The naming plane is where Zero Trust touches the network</a:t>
-            </a:r>
-            <a:endParaRPr lang="en-US" sz="2600" dirty="0"/>
+              <a:t>Every deadline running against these controls</a:t>
+            </a:r>
+            <a:endParaRPr lang="en-US" sz="2400" dirty="0"/>
           </a:p>
         </p:txBody>
       </p:sp>
@@ -17963,16 +18053,761 @@
         </p:nvSpPr>
         <p:spPr>
           <a:xfrm>
-            <a:off x="502920" y="1234440"/>
-            <a:ext cx="4041648" cy="1627632"/>
+            <a:off x="658368" y="1271016"/>
+            <a:ext cx="118872" cy="118872"/>
+          </a:xfrm>
+          <a:prstGeom prst="ellipse">
+            <a:avLst/>
+          </a:prstGeom>
+          <a:solidFill>
+            <a:srgbClr val="1A9E8F"/>
+          </a:solidFill>
+          <a:ln/>
+        </p:spPr>
+      </p:sp>
+      <p:sp>
+        <p:nvSpPr>
+          <p:cNvPr id="5" name="Text 3"/>
+          <p:cNvSpPr/>
+          <p:nvPr/>
+        </p:nvSpPr>
+        <p:spPr>
+          <a:xfrm>
+            <a:off x="896112" y="1225296"/>
+            <a:ext cx="7818120" cy="365760"/>
+          </a:xfrm>
+          <a:prstGeom prst="rect">
+            <a:avLst/>
+          </a:prstGeom>
+          <a:noFill/>
+          <a:ln/>
+        </p:spPr>
+        <p:txBody>
+          <a:bodyPr wrap="square" lIns="0" tIns="0" rIns="0" bIns="0" rtlCol="0" anchor="t"/>
+          <a:lstStyle/>
+          <a:p>
+            <a:pPr indent="0" marL="0">
+              <a:buNone/>
+            </a:pPr>
+            <a:r>
+              <a:rPr lang="en-US" sz="1000" b="1" dirty="0">
+                <a:solidFill>
+                  <a:srgbClr val="1A9E8F"/>
+                </a:solidFill>
+                <a:latin typeface="Arial" pitchFamily="34" charset="0"/>
+                <a:ea typeface="Arial" pitchFamily="34" charset="-122"/>
+                <a:cs typeface="Arial" pitchFamily="34" charset="-120"/>
+              </a:rPr>
+              <a:t>Aug 3 / 31, 2026  </a:t>
+            </a:r>
+            <a:pPr indent="0" marL="0">
+              <a:buNone/>
+            </a:pPr>
+            <a:r>
+              <a:rPr lang="en-US" sz="950" dirty="0">
+                <a:solidFill>
+                  <a:srgbClr val="1E293B"/>
+                </a:solidFill>
+                <a:latin typeface="Arial" pitchFamily="34" charset="0"/>
+                <a:ea typeface="Arial" pitchFamily="34" charset="-122"/>
+                <a:cs typeface="Arial" pitchFamily="34" charset="-120"/>
+              </a:rPr>
+              <a:t>FedRAMP 20x opens — Class A, then Class B + C: the GCC Moderate window</a:t>
+            </a:r>
+            <a:endParaRPr lang="en-US" sz="1000" dirty="0"/>
+          </a:p>
+        </p:txBody>
+      </p:sp>
+      <p:sp>
+        <p:nvSpPr>
+          <p:cNvPr id="6" name="Shape 4"/>
+          <p:cNvSpPr/>
+          <p:nvPr/>
+        </p:nvSpPr>
+        <p:spPr>
+          <a:xfrm>
+            <a:off x="713232" y="1408176"/>
+            <a:ext cx="0" cy="256032"/>
+          </a:xfrm>
+          <a:prstGeom prst="line">
+            <a:avLst/>
+          </a:prstGeom>
+          <a:noFill/>
+          <a:ln w="19050">
+            <a:solidFill>
+              <a:srgbClr val="C9D4E0"/>
+            </a:solidFill>
+            <a:prstDash val="solid"/>
+          </a:ln>
+        </p:spPr>
+      </p:sp>
+      <p:sp>
+        <p:nvSpPr>
+          <p:cNvPr id="7" name="Shape 5"/>
+          <p:cNvSpPr/>
+          <p:nvPr/>
+        </p:nvSpPr>
+        <p:spPr>
+          <a:xfrm>
+            <a:off x="658368" y="1673352"/>
+            <a:ext cx="118872" cy="118872"/>
+          </a:xfrm>
+          <a:prstGeom prst="ellipse">
+            <a:avLst/>
+          </a:prstGeom>
+          <a:solidFill>
+            <a:srgbClr val="D4860B"/>
+          </a:solidFill>
+          <a:ln/>
+        </p:spPr>
+      </p:sp>
+      <p:sp>
+        <p:nvSpPr>
+          <p:cNvPr id="8" name="Text 6"/>
+          <p:cNvSpPr/>
+          <p:nvPr/>
+        </p:nvSpPr>
+        <p:spPr>
+          <a:xfrm>
+            <a:off x="896112" y="1627632"/>
+            <a:ext cx="7818120" cy="365760"/>
+          </a:xfrm>
+          <a:prstGeom prst="rect">
+            <a:avLst/>
+          </a:prstGeom>
+          <a:noFill/>
+          <a:ln/>
+        </p:spPr>
+        <p:txBody>
+          <a:bodyPr wrap="square" lIns="0" tIns="0" rIns="0" bIns="0" rtlCol="0" anchor="t"/>
+          <a:lstStyle/>
+          <a:p>
+            <a:pPr indent="0" marL="0">
+              <a:buNone/>
+            </a:pPr>
+            <a:r>
+              <a:rPr lang="en-US" sz="1000" b="1" dirty="0">
+                <a:solidFill>
+                  <a:srgbClr val="D4860B"/>
+                </a:solidFill>
+                <a:latin typeface="Arial" pitchFamily="34" charset="0"/>
+                <a:ea typeface="Arial" pitchFamily="34" charset="-122"/>
+                <a:cs typeface="Arial" pitchFamily="34" charset="-120"/>
+              </a:rPr>
+              <a:t>Aug 7, 2026  </a:t>
+            </a:r>
+            <a:pPr indent="0" marL="0">
+              <a:buNone/>
+            </a:pPr>
+            <a:r>
+              <a:rPr lang="en-US" sz="950" dirty="0">
+                <a:solidFill>
+                  <a:srgbClr val="1E293B"/>
+                </a:solidFill>
+                <a:latin typeface="Arial" pitchFamily="34" charset="0"/>
+                <a:ea typeface="Arial" pitchFamily="34" charset="-122"/>
+                <a:cs typeface="Arial" pitchFamily="34" charset="-120"/>
+              </a:rPr>
+              <a:t>BOD 26-04: agency vulnerability-management policies must support risk-based remediation</a:t>
+            </a:r>
+            <a:endParaRPr lang="en-US" sz="1000" dirty="0"/>
+          </a:p>
+        </p:txBody>
+      </p:sp>
+      <p:sp>
+        <p:nvSpPr>
+          <p:cNvPr id="9" name="Shape 7"/>
+          <p:cNvSpPr/>
+          <p:nvPr/>
+        </p:nvSpPr>
+        <p:spPr>
+          <a:xfrm>
+            <a:off x="713232" y="1810512"/>
+            <a:ext cx="0" cy="256032"/>
+          </a:xfrm>
+          <a:prstGeom prst="line">
+            <a:avLst/>
+          </a:prstGeom>
+          <a:noFill/>
+          <a:ln w="19050">
+            <a:solidFill>
+              <a:srgbClr val="C9D4E0"/>
+            </a:solidFill>
+            <a:prstDash val="solid"/>
+          </a:ln>
+        </p:spPr>
+      </p:sp>
+      <p:sp>
+        <p:nvSpPr>
+          <p:cNvPr id="10" name="Shape 8"/>
+          <p:cNvSpPr/>
+          <p:nvPr/>
+        </p:nvSpPr>
+        <p:spPr>
+          <a:xfrm>
+            <a:off x="658368" y="2075688"/>
+            <a:ext cx="118872" cy="118872"/>
+          </a:xfrm>
+          <a:prstGeom prst="ellipse">
+            <a:avLst/>
+          </a:prstGeom>
+          <a:solidFill>
+            <a:srgbClr val="C0392B"/>
+          </a:solidFill>
+          <a:ln/>
+        </p:spPr>
+      </p:sp>
+      <p:sp>
+        <p:nvSpPr>
+          <p:cNvPr id="11" name="Text 9"/>
+          <p:cNvSpPr/>
+          <p:nvPr/>
+        </p:nvSpPr>
+        <p:spPr>
+          <a:xfrm>
+            <a:off x="896112" y="2029968"/>
+            <a:ext cx="7818120" cy="365760"/>
+          </a:xfrm>
+          <a:prstGeom prst="rect">
+            <a:avLst/>
+          </a:prstGeom>
+          <a:noFill/>
+          <a:ln/>
+        </p:spPr>
+        <p:txBody>
+          <a:bodyPr wrap="square" lIns="0" tIns="0" rIns="0" bIns="0" rtlCol="0" anchor="t"/>
+          <a:lstStyle/>
+          <a:p>
+            <a:pPr indent="0" marL="0">
+              <a:buNone/>
+            </a:pPr>
+            <a:r>
+              <a:rPr lang="en-US" sz="1000" b="1" dirty="0">
+                <a:solidFill>
+                  <a:srgbClr val="C0392B"/>
+                </a:solidFill>
+                <a:latin typeface="Arial" pitchFamily="34" charset="0"/>
+                <a:ea typeface="Arial" pitchFamily="34" charset="-122"/>
+                <a:cs typeface="Arial" pitchFamily="34" charset="-120"/>
+              </a:rPr>
+              <a:t>Sep 21, 2026  </a:t>
+            </a:r>
+            <a:pPr indent="0" marL="0">
+              <a:buNone/>
+            </a:pPr>
+            <a:r>
+              <a:rPr lang="en-US" sz="950" dirty="0">
+                <a:solidFill>
+                  <a:srgbClr val="1E293B"/>
+                </a:solidFill>
+                <a:latin typeface="Arial" pitchFamily="34" charset="0"/>
+                <a:ea typeface="Arial" pitchFamily="34" charset="-122"/>
+                <a:cs typeface="Arial" pitchFamily="34" charset="-120"/>
+              </a:rPr>
+              <a:t>FIPS 140-2 certificates move to NIST's Historical List — verify FIPS 140-3 tracking (SC-13)</a:t>
+            </a:r>
+            <a:endParaRPr lang="en-US" sz="1000" dirty="0"/>
+          </a:p>
+        </p:txBody>
+      </p:sp>
+      <p:sp>
+        <p:nvSpPr>
+          <p:cNvPr id="12" name="Shape 10"/>
+          <p:cNvSpPr/>
+          <p:nvPr/>
+        </p:nvSpPr>
+        <p:spPr>
+          <a:xfrm>
+            <a:off x="713232" y="2212848"/>
+            <a:ext cx="0" cy="256032"/>
+          </a:xfrm>
+          <a:prstGeom prst="line">
+            <a:avLst/>
+          </a:prstGeom>
+          <a:noFill/>
+          <a:ln w="19050">
+            <a:solidFill>
+              <a:srgbClr val="C9D4E0"/>
+            </a:solidFill>
+            <a:prstDash val="solid"/>
+          </a:ln>
+        </p:spPr>
+      </p:sp>
+      <p:sp>
+        <p:nvSpPr>
+          <p:cNvPr id="13" name="Shape 11"/>
+          <p:cNvSpPr/>
+          <p:nvPr/>
+        </p:nvSpPr>
+        <p:spPr>
+          <a:xfrm>
+            <a:off x="658368" y="2478024"/>
+            <a:ext cx="118872" cy="118872"/>
+          </a:xfrm>
+          <a:prstGeom prst="ellipse">
+            <a:avLst/>
+          </a:prstGeom>
+          <a:solidFill>
+            <a:srgbClr val="C0392B"/>
+          </a:solidFill>
+          <a:ln/>
+        </p:spPr>
+      </p:sp>
+      <p:sp>
+        <p:nvSpPr>
+          <p:cNvPr id="14" name="Text 12"/>
+          <p:cNvSpPr/>
+          <p:nvPr/>
+        </p:nvSpPr>
+        <p:spPr>
+          <a:xfrm>
+            <a:off x="896112" y="2432304"/>
+            <a:ext cx="7818120" cy="365760"/>
+          </a:xfrm>
+          <a:prstGeom prst="rect">
+            <a:avLst/>
+          </a:prstGeom>
+          <a:noFill/>
+          <a:ln/>
+        </p:spPr>
+        <p:txBody>
+          <a:bodyPr wrap="square" lIns="0" tIns="0" rIns="0" bIns="0" rtlCol="0" anchor="t"/>
+          <a:lstStyle/>
+          <a:p>
+            <a:pPr indent="0" marL="0">
+              <a:buNone/>
+            </a:pPr>
+            <a:r>
+              <a:rPr lang="en-US" sz="1000" b="1" dirty="0">
+                <a:solidFill>
+                  <a:srgbClr val="C0392B"/>
+                </a:solidFill>
+                <a:latin typeface="Arial" pitchFamily="34" charset="0"/>
+                <a:ea typeface="Arial" pitchFamily="34" charset="-122"/>
+                <a:cs typeface="Arial" pitchFamily="34" charset="-120"/>
+              </a:rPr>
+              <a:t>Dec 7, 2026  </a:t>
+            </a:r>
+            <a:pPr indent="0" marL="0">
+              <a:buNone/>
+            </a:pPr>
+            <a:r>
+              <a:rPr lang="en-US" sz="950" dirty="0">
+                <a:solidFill>
+                  <a:srgbClr val="1E293B"/>
+                </a:solidFill>
+                <a:latin typeface="Arial" pitchFamily="34" charset="0"/>
+                <a:ea typeface="Arial" pitchFamily="34" charset="-122"/>
+                <a:cs typeface="Arial" pitchFamily="34" charset="-120"/>
+              </a:rPr>
+              <a:t>BOD 26-04 remediation timelines in force + FedRAMP VDR/VER mandatory (SBOM + vendor disclosure)</a:t>
+            </a:r>
+            <a:endParaRPr lang="en-US" sz="1000" dirty="0"/>
+          </a:p>
+        </p:txBody>
+      </p:sp>
+      <p:sp>
+        <p:nvSpPr>
+          <p:cNvPr id="15" name="Shape 13"/>
+          <p:cNvSpPr/>
+          <p:nvPr/>
+        </p:nvSpPr>
+        <p:spPr>
+          <a:xfrm>
+            <a:off x="713232" y="2615184"/>
+            <a:ext cx="0" cy="256032"/>
+          </a:xfrm>
+          <a:prstGeom prst="line">
+            <a:avLst/>
+          </a:prstGeom>
+          <a:noFill/>
+          <a:ln w="19050">
+            <a:solidFill>
+              <a:srgbClr val="C9D4E0"/>
+            </a:solidFill>
+            <a:prstDash val="solid"/>
+          </a:ln>
+        </p:spPr>
+      </p:sp>
+      <p:sp>
+        <p:nvSpPr>
+          <p:cNvPr id="16" name="Shape 14"/>
+          <p:cNvSpPr/>
+          <p:nvPr/>
+        </p:nvSpPr>
+        <p:spPr>
+          <a:xfrm>
+            <a:off x="658368" y="2880360"/>
+            <a:ext cx="118872" cy="118872"/>
+          </a:xfrm>
+          <a:prstGeom prst="ellipse">
+            <a:avLst/>
+          </a:prstGeom>
+          <a:solidFill>
+            <a:srgbClr val="1F3A5F"/>
+          </a:solidFill>
+          <a:ln/>
+        </p:spPr>
+      </p:sp>
+      <p:sp>
+        <p:nvSpPr>
+          <p:cNvPr id="17" name="Text 15"/>
+          <p:cNvSpPr/>
+          <p:nvPr/>
+        </p:nvSpPr>
+        <p:spPr>
+          <a:xfrm>
+            <a:off x="896112" y="2834640"/>
+            <a:ext cx="7818120" cy="365760"/>
+          </a:xfrm>
+          <a:prstGeom prst="rect">
+            <a:avLst/>
+          </a:prstGeom>
+          <a:noFill/>
+          <a:ln/>
+        </p:spPr>
+        <p:txBody>
+          <a:bodyPr wrap="square" lIns="0" tIns="0" rIns="0" bIns="0" rtlCol="0" anchor="t"/>
+          <a:lstStyle/>
+          <a:p>
+            <a:pPr indent="0" marL="0">
+              <a:buNone/>
+            </a:pPr>
+            <a:r>
+              <a:rPr lang="en-US" sz="1000" b="1" dirty="0">
+                <a:solidFill>
+                  <a:srgbClr val="1F3A5F"/>
+                </a:solidFill>
+                <a:latin typeface="Arial" pitchFamily="34" charset="0"/>
+                <a:ea typeface="Arial" pitchFamily="34" charset="-122"/>
+                <a:cs typeface="Arial" pitchFamily="34" charset="-120"/>
+              </a:rPr>
+              <a:t>Jan 1, 2027  </a:t>
+            </a:r>
+            <a:pPr indent="0" marL="0">
+              <a:buNone/>
+            </a:pPr>
+            <a:r>
+              <a:rPr lang="en-US" sz="950" dirty="0">
+                <a:solidFill>
+                  <a:srgbClr val="1E293B"/>
+                </a:solidFill>
+                <a:latin typeface="Arial" pitchFamily="34" charset="0"/>
+                <a:ea typeface="Arial" pitchFamily="34" charset="-122"/>
+                <a:cs typeface="Arial" pitchFamily="34" charset="-120"/>
+              </a:rPr>
+              <a:t>FedRAMP CR26 mandatory for all · CNSA 2.0 acquisition gate (NSS-scoped; civilian PQC follows)</a:t>
+            </a:r>
+            <a:endParaRPr lang="en-US" sz="1000" dirty="0"/>
+          </a:p>
+        </p:txBody>
+      </p:sp>
+      <p:sp>
+        <p:nvSpPr>
+          <p:cNvPr id="18" name="Shape 16"/>
+          <p:cNvSpPr/>
+          <p:nvPr/>
+        </p:nvSpPr>
+        <p:spPr>
+          <a:xfrm>
+            <a:off x="713232" y="3017520"/>
+            <a:ext cx="0" cy="256032"/>
+          </a:xfrm>
+          <a:prstGeom prst="line">
+            <a:avLst/>
+          </a:prstGeom>
+          <a:noFill/>
+          <a:ln w="19050">
+            <a:solidFill>
+              <a:srgbClr val="C9D4E0"/>
+            </a:solidFill>
+            <a:prstDash val="solid"/>
+          </a:ln>
+        </p:spPr>
+      </p:sp>
+      <p:sp>
+        <p:nvSpPr>
+          <p:cNvPr id="19" name="Shape 17"/>
+          <p:cNvSpPr/>
+          <p:nvPr/>
+        </p:nvSpPr>
+        <p:spPr>
+          <a:xfrm>
+            <a:off x="658368" y="3282696"/>
+            <a:ext cx="118872" cy="118872"/>
+          </a:xfrm>
+          <a:prstGeom prst="ellipse">
+            <a:avLst/>
+          </a:prstGeom>
+          <a:solidFill>
+            <a:srgbClr val="1F3A5F"/>
+          </a:solidFill>
+          <a:ln/>
+        </p:spPr>
+      </p:sp>
+      <p:sp>
+        <p:nvSpPr>
+          <p:cNvPr id="20" name="Text 18"/>
+          <p:cNvSpPr/>
+          <p:nvPr/>
+        </p:nvSpPr>
+        <p:spPr>
+          <a:xfrm>
+            <a:off x="896112" y="3236976"/>
+            <a:ext cx="7818120" cy="365760"/>
+          </a:xfrm>
+          <a:prstGeom prst="rect">
+            <a:avLst/>
+          </a:prstGeom>
+          <a:noFill/>
+          <a:ln/>
+        </p:spPr>
+        <p:txBody>
+          <a:bodyPr wrap="square" lIns="0" tIns="0" rIns="0" bIns="0" rtlCol="0" anchor="t"/>
+          <a:lstStyle/>
+          <a:p>
+            <a:pPr indent="0" marL="0">
+              <a:buNone/>
+            </a:pPr>
+            <a:r>
+              <a:rPr lang="en-US" sz="1000" b="1" dirty="0">
+                <a:solidFill>
+                  <a:srgbClr val="1F3A5F"/>
+                </a:solidFill>
+                <a:latin typeface="Arial" pitchFamily="34" charset="0"/>
+                <a:ea typeface="Arial" pitchFamily="34" charset="-122"/>
+                <a:cs typeface="Arial" pitchFamily="34" charset="-120"/>
+              </a:rPr>
+              <a:t>Jun 11, 2027  </a:t>
+            </a:r>
+            <a:pPr indent="0" marL="0">
+              <a:buNone/>
+            </a:pPr>
+            <a:r>
+              <a:rPr lang="en-US" sz="950" dirty="0">
+                <a:solidFill>
+                  <a:srgbClr val="1E293B"/>
+                </a:solidFill>
+                <a:latin typeface="Arial" pitchFamily="34" charset="0"/>
+                <a:ea typeface="Arial" pitchFamily="34" charset="-122"/>
+                <a:cs typeface="Arial" pitchFamily="34" charset="-120"/>
+              </a:rPr>
+              <a:t>No new Rev5 certifications accepted</a:t>
+            </a:r>
+            <a:endParaRPr lang="en-US" sz="1000" dirty="0"/>
+          </a:p>
+        </p:txBody>
+      </p:sp>
+      <p:sp>
+        <p:nvSpPr>
+          <p:cNvPr id="21" name="Shape 19"/>
+          <p:cNvSpPr/>
+          <p:nvPr/>
+        </p:nvSpPr>
+        <p:spPr>
+          <a:xfrm>
+            <a:off x="713232" y="3419856"/>
+            <a:ext cx="0" cy="256032"/>
+          </a:xfrm>
+          <a:prstGeom prst="line">
+            <a:avLst/>
+          </a:prstGeom>
+          <a:noFill/>
+          <a:ln w="19050">
+            <a:solidFill>
+              <a:srgbClr val="C9D4E0"/>
+            </a:solidFill>
+            <a:prstDash val="solid"/>
+          </a:ln>
+        </p:spPr>
+      </p:sp>
+      <p:sp>
+        <p:nvSpPr>
+          <p:cNvPr id="22" name="Shape 20"/>
+          <p:cNvSpPr/>
+          <p:nvPr/>
+        </p:nvSpPr>
+        <p:spPr>
+          <a:xfrm>
+            <a:off x="658368" y="3685032"/>
+            <a:ext cx="118872" cy="118872"/>
+          </a:xfrm>
+          <a:prstGeom prst="ellipse">
+            <a:avLst/>
+          </a:prstGeom>
+          <a:solidFill>
+            <a:srgbClr val="D4860B"/>
+          </a:solidFill>
+          <a:ln/>
+        </p:spPr>
+      </p:sp>
+      <p:sp>
+        <p:nvSpPr>
+          <p:cNvPr id="23" name="Text 21"/>
+          <p:cNvSpPr/>
+          <p:nvPr/>
+        </p:nvSpPr>
+        <p:spPr>
+          <a:xfrm>
+            <a:off x="896112" y="3639312"/>
+            <a:ext cx="7818120" cy="365760"/>
+          </a:xfrm>
+          <a:prstGeom prst="rect">
+            <a:avLst/>
+          </a:prstGeom>
+          <a:noFill/>
+          <a:ln/>
+        </p:spPr>
+        <p:txBody>
+          <a:bodyPr wrap="square" lIns="0" tIns="0" rIns="0" bIns="0" rtlCol="0" anchor="t"/>
+          <a:lstStyle/>
+          <a:p>
+            <a:pPr indent="0" marL="0">
+              <a:buNone/>
+            </a:pPr>
+            <a:r>
+              <a:rPr lang="en-US" sz="1000" b="1" dirty="0">
+                <a:solidFill>
+                  <a:srgbClr val="D4860B"/>
+                </a:solidFill>
+                <a:latin typeface="Arial" pitchFamily="34" charset="0"/>
+                <a:ea typeface="Arial" pitchFamily="34" charset="-122"/>
+                <a:cs typeface="Arial" pitchFamily="34" charset="-120"/>
+              </a:rPr>
+              <a:t>~Aug 2027  </a:t>
+            </a:r>
+            <a:pPr indent="0" marL="0">
+              <a:buNone/>
+            </a:pPr>
+            <a:r>
+              <a:rPr lang="en-US" sz="950" dirty="0">
+                <a:solidFill>
+                  <a:srgbClr val="1E293B"/>
+                </a:solidFill>
+                <a:latin typeface="Arial" pitchFamily="34" charset="0"/>
+                <a:ea typeface="Arial" pitchFamily="34" charset="-122"/>
+                <a:cs typeface="Arial" pitchFamily="34" charset="-120"/>
+              </a:rPr>
+              <a:t>Next scheduled NIST 800-53 release — 5.2.0 (Aug 2025) already added SA-15(13), SA-24, SI-2(7)</a:t>
+            </a:r>
+            <a:endParaRPr lang="en-US" sz="1000" dirty="0"/>
+          </a:p>
+        </p:txBody>
+      </p:sp>
+      <p:sp>
+        <p:nvSpPr>
+          <p:cNvPr id="24" name="Shape 22"/>
+          <p:cNvSpPr/>
+          <p:nvPr/>
+        </p:nvSpPr>
+        <p:spPr>
+          <a:xfrm>
+            <a:off x="713232" y="3822192"/>
+            <a:ext cx="0" cy="256032"/>
+          </a:xfrm>
+          <a:prstGeom prst="line">
+            <a:avLst/>
+          </a:prstGeom>
+          <a:noFill/>
+          <a:ln w="19050">
+            <a:solidFill>
+              <a:srgbClr val="C9D4E0"/>
+            </a:solidFill>
+            <a:prstDash val="solid"/>
+          </a:ln>
+        </p:spPr>
+      </p:sp>
+      <p:sp>
+        <p:nvSpPr>
+          <p:cNvPr id="25" name="Shape 23"/>
+          <p:cNvSpPr/>
+          <p:nvPr/>
+        </p:nvSpPr>
+        <p:spPr>
+          <a:xfrm>
+            <a:off x="658368" y="4087368"/>
+            <a:ext cx="118872" cy="118872"/>
+          </a:xfrm>
+          <a:prstGeom prst="ellipse">
+            <a:avLst/>
+          </a:prstGeom>
+          <a:solidFill>
+            <a:srgbClr val="5B6B7C"/>
+          </a:solidFill>
+          <a:ln/>
+        </p:spPr>
+      </p:sp>
+      <p:sp>
+        <p:nvSpPr>
+          <p:cNvPr id="26" name="Text 24"/>
+          <p:cNvSpPr/>
+          <p:nvPr/>
+        </p:nvSpPr>
+        <p:spPr>
+          <a:xfrm>
+            <a:off x="896112" y="4041648"/>
+            <a:ext cx="7818120" cy="365760"/>
+          </a:xfrm>
+          <a:prstGeom prst="rect">
+            <a:avLst/>
+          </a:prstGeom>
+          <a:noFill/>
+          <a:ln/>
+        </p:spPr>
+        <p:txBody>
+          <a:bodyPr wrap="square" lIns="0" tIns="0" rIns="0" bIns="0" rtlCol="0" anchor="t"/>
+          <a:lstStyle/>
+          <a:p>
+            <a:pPr indent="0" marL="0">
+              <a:buNone/>
+            </a:pPr>
+            <a:r>
+              <a:rPr lang="en-US" sz="1000" b="1" dirty="0">
+                <a:solidFill>
+                  <a:srgbClr val="5B6B7C"/>
+                </a:solidFill>
+                <a:latin typeface="Arial" pitchFamily="34" charset="0"/>
+                <a:ea typeface="Arial" pitchFamily="34" charset="-122"/>
+                <a:cs typeface="Arial" pitchFamily="34" charset="-120"/>
+              </a:rPr>
+              <a:t>2030 / 2035  </a:t>
+            </a:r>
+            <a:pPr indent="0" marL="0">
+              <a:buNone/>
+            </a:pPr>
+            <a:r>
+              <a:rPr lang="en-US" sz="950" dirty="0">
+                <a:solidFill>
+                  <a:srgbClr val="1E293B"/>
+                </a:solidFill>
+                <a:latin typeface="Arial" pitchFamily="34" charset="0"/>
+                <a:ea typeface="Arial" pitchFamily="34" charset="-122"/>
+                <a:cs typeface="Arial" pitchFamily="34" charset="-120"/>
+              </a:rPr>
+              <a:t>Quantum-vulnerable cryptography deprecated, then prohibited — M-23-02 inventories run to the horizon</a:t>
+            </a:r>
+            <a:endParaRPr lang="en-US" sz="1000" dirty="0"/>
+          </a:p>
+        </p:txBody>
+      </p:sp>
+      <p:sp>
+        <p:nvSpPr>
+          <p:cNvPr id="27" name="Shape 25"/>
+          <p:cNvSpPr/>
+          <p:nvPr/>
+        </p:nvSpPr>
+        <p:spPr>
+          <a:xfrm>
+            <a:off x="502920" y="4462272"/>
+            <a:ext cx="8229600" cy="365760"/>
           </a:xfrm>
           <a:prstGeom prst="roundRect">
             <a:avLst>
-              <a:gd name="adj" fmla="val 3933"/>
+              <a:gd name="adj" fmla="val 17500"/>
             </a:avLst>
           </a:prstGeom>
           <a:solidFill>
-            <a:srgbClr val="FFFFFF"/>
+            <a:srgbClr val="EDF3F9"/>
           </a:solidFill>
           <a:ln w="9525">
             <a:solidFill>
@@ -17980,63 +18815,34 @@
             </a:solidFill>
             <a:prstDash val="solid"/>
           </a:ln>
-          <a:effectLst>
-            <a:outerShdw sx="100000" sy="100000" kx="0" ky="0" algn="bl" rotWithShape="0" blurRad="88900" dist="25400" dir="2700000">
-              <a:srgbClr val="000000">
-                <a:alpha val="14000"/>
-              </a:srgbClr>
-            </a:outerShdw>
-          </a:effectLst>
-        </p:spPr>
-      </p:sp>
-      <p:sp>
-        <p:nvSpPr>
-          <p:cNvPr id="5" name="Shape 3"/>
-          <p:cNvSpPr/>
-          <p:nvPr/>
-        </p:nvSpPr>
-        <p:spPr>
-          <a:xfrm>
-            <a:off x="630936" y="1362456"/>
-            <a:ext cx="3785616" cy="402336"/>
-          </a:xfrm>
-          <a:prstGeom prst="roundRect">
-            <a:avLst>
-              <a:gd name="adj" fmla="val 11364"/>
-            </a:avLst>
-          </a:prstGeom>
-          <a:solidFill>
-            <a:srgbClr val="EDF3F9"/>
-          </a:solidFill>
-          <a:ln/>
-        </p:spPr>
-      </p:sp>
-      <p:sp>
-        <p:nvSpPr>
-          <p:cNvPr id="6" name="Text 4"/>
-          <p:cNvSpPr/>
-          <p:nvPr/>
-        </p:nvSpPr>
-        <p:spPr>
-          <a:xfrm>
-            <a:off x="758952" y="1362456"/>
-            <a:ext cx="3584448" cy="402336"/>
-          </a:xfrm>
-          <a:prstGeom prst="rect">
-            <a:avLst/>
-          </a:prstGeom>
-          <a:noFill/>
-          <a:ln/>
-        </p:spPr>
-        <p:txBody>
-          <a:bodyPr wrap="square" lIns="0" tIns="0" rIns="0" bIns="0" rtlCol="0" anchor="ctr"/>
-          <a:lstStyle/>
-          <a:p>
-            <a:pPr indent="0" marL="0">
-              <a:buNone/>
-            </a:pPr>
-            <a:r>
-              <a:rPr lang="en-US" sz="1200" b="1" dirty="0">
+        </p:spPr>
+      </p:sp>
+      <p:sp>
+        <p:nvSpPr>
+          <p:cNvPr id="28" name="Text 26"/>
+          <p:cNvSpPr/>
+          <p:nvPr/>
+        </p:nvSpPr>
+        <p:spPr>
+          <a:xfrm>
+            <a:off x="731520" y="4462272"/>
+            <a:ext cx="7772400" cy="365760"/>
+          </a:xfrm>
+          <a:prstGeom prst="rect">
+            <a:avLst/>
+          </a:prstGeom>
+          <a:noFill/>
+          <a:ln/>
+        </p:spPr>
+        <p:txBody>
+          <a:bodyPr wrap="square" lIns="0" tIns="0" rIns="0" bIns="0" rtlCol="0" anchor="ctr"/>
+          <a:lstStyle/>
+          <a:p>
+            <a:pPr indent="0" marL="0">
+              <a:buNone/>
+            </a:pPr>
+            <a:r>
+              <a:rPr lang="en-US" sz="850" b="1" dirty="0">
                 <a:solidFill>
                   <a:srgbClr val="1F3A5F"/>
                 </a:solidFill>
@@ -18044,506 +18850,9 @@
                 <a:ea typeface="Arial" pitchFamily="34" charset="-122"/>
                 <a:cs typeface="Arial" pitchFamily="34" charset="-120"/>
               </a:rPr>
-              <a:t>Networks pillar   </a:t>
-            </a:r>
-            <a:pPr indent="0" marL="0">
-              <a:buNone/>
-            </a:pPr>
-            <a:r>
-              <a:rPr lang="en-US" sz="800" b="1" spc="150" kern="0" dirty="0">
-                <a:solidFill>
-                  <a:srgbClr val="5B6B7C"/>
-                </a:solidFill>
-                <a:latin typeface="Arial" pitchFamily="34" charset="0"/>
-                <a:ea typeface="Arial" pitchFamily="34" charset="-122"/>
-                <a:cs typeface="Arial" pitchFamily="34" charset="-120"/>
-              </a:rPr>
-              <a:t>DEEPEST ALIGNMENT</a:t>
-            </a:r>
-            <a:endParaRPr lang="en-US" sz="1200" dirty="0"/>
-          </a:p>
-        </p:txBody>
-      </p:sp>
-      <p:sp>
-        <p:nvSpPr>
-          <p:cNvPr id="7" name="Text 5"/>
-          <p:cNvSpPr/>
-          <p:nvPr/>
-        </p:nvSpPr>
-        <p:spPr>
-          <a:xfrm>
-            <a:off x="685800" y="1856232"/>
-            <a:ext cx="3675888" cy="896112"/>
-          </a:xfrm>
-          <a:prstGeom prst="rect">
-            <a:avLst/>
-          </a:prstGeom>
-          <a:noFill/>
-          <a:ln/>
-        </p:spPr>
-        <p:txBody>
-          <a:bodyPr wrap="square" lIns="0" tIns="0" rIns="0" bIns="0" rtlCol="0" anchor="ctr"/>
-          <a:lstStyle/>
-          <a:p>
-            <a:pPr indent="0" marL="0">
-              <a:buNone/>
-            </a:pPr>
-            <a:r>
-              <a:rPr lang="en-US" sz="1050" dirty="0">
-                <a:solidFill>
-                  <a:srgbClr val="1E293B"/>
-                </a:solidFill>
-                <a:latin typeface="Arial" pitchFamily="34" charset="0"/>
-                <a:ea typeface="Arial" pitchFamily="34" charset="-122"/>
-                <a:cs typeface="Arial" pitchFamily="34" charset="-120"/>
-              </a:rPr>
-              <a:t>Unified DNS policy, RPZ enforcement before any TCP connection, DNSSEC everywhere — including private SDN segments no cloud-native resolver can sign.</a:t>
-            </a:r>
-            <a:endParaRPr lang="en-US" sz="1050" dirty="0"/>
-          </a:p>
-        </p:txBody>
-      </p:sp>
-      <p:sp>
-        <p:nvSpPr>
-          <p:cNvPr id="8" name="Shape 6"/>
-          <p:cNvSpPr/>
-          <p:nvPr/>
-        </p:nvSpPr>
-        <p:spPr>
-          <a:xfrm>
-            <a:off x="4690872" y="1234440"/>
-            <a:ext cx="4041648" cy="1627632"/>
-          </a:xfrm>
-          <a:prstGeom prst="roundRect">
-            <a:avLst>
-              <a:gd name="adj" fmla="val 3933"/>
-            </a:avLst>
-          </a:prstGeom>
-          <a:solidFill>
-            <a:srgbClr val="FFFFFF"/>
-          </a:solidFill>
-          <a:ln w="9525">
-            <a:solidFill>
-              <a:srgbClr val="C9D4E0"/>
-            </a:solidFill>
-            <a:prstDash val="solid"/>
-          </a:ln>
-          <a:effectLst>
-            <a:outerShdw sx="100000" sy="100000" kx="0" ky="0" algn="bl" rotWithShape="0" blurRad="88900" dist="25400" dir="2700000">
-              <a:srgbClr val="000000">
-                <a:alpha val="14000"/>
-              </a:srgbClr>
-            </a:outerShdw>
-          </a:effectLst>
-        </p:spPr>
-      </p:sp>
-      <p:sp>
-        <p:nvSpPr>
-          <p:cNvPr id="9" name="Shape 7"/>
-          <p:cNvSpPr/>
-          <p:nvPr/>
-        </p:nvSpPr>
-        <p:spPr>
-          <a:xfrm>
-            <a:off x="4818888" y="1362456"/>
-            <a:ext cx="3785616" cy="402336"/>
-          </a:xfrm>
-          <a:prstGeom prst="roundRect">
-            <a:avLst>
-              <a:gd name="adj" fmla="val 11364"/>
-            </a:avLst>
-          </a:prstGeom>
-          <a:solidFill>
-            <a:srgbClr val="E6F5F2"/>
-          </a:solidFill>
-          <a:ln/>
-        </p:spPr>
-      </p:sp>
-      <p:sp>
-        <p:nvSpPr>
-          <p:cNvPr id="10" name="Text 8"/>
-          <p:cNvSpPr/>
-          <p:nvPr/>
-        </p:nvSpPr>
-        <p:spPr>
-          <a:xfrm>
-            <a:off x="4946904" y="1362456"/>
-            <a:ext cx="3584448" cy="402336"/>
-          </a:xfrm>
-          <a:prstGeom prst="rect">
-            <a:avLst/>
-          </a:prstGeom>
-          <a:noFill/>
-          <a:ln/>
-        </p:spPr>
-        <p:txBody>
-          <a:bodyPr wrap="square" lIns="0" tIns="0" rIns="0" bIns="0" rtlCol="0" anchor="ctr"/>
-          <a:lstStyle/>
-          <a:p>
-            <a:pPr indent="0" marL="0">
-              <a:buNone/>
-            </a:pPr>
-            <a:r>
-              <a:rPr lang="en-US" sz="1200" b="1" dirty="0">
-                <a:solidFill>
-                  <a:srgbClr val="1A9E8F"/>
-                </a:solidFill>
-                <a:latin typeface="Arial" pitchFamily="34" charset="0"/>
-                <a:ea typeface="Arial" pitchFamily="34" charset="-122"/>
-                <a:cs typeface="Arial" pitchFamily="34" charset="-120"/>
-              </a:rPr>
-              <a:t>Identity pillar   </a:t>
-            </a:r>
-            <a:pPr indent="0" marL="0">
-              <a:buNone/>
-            </a:pPr>
-            <a:r>
-              <a:rPr lang="en-US" sz="800" b="1" spc="150" kern="0" dirty="0">
-                <a:solidFill>
-                  <a:srgbClr val="5B6B7C"/>
-                </a:solidFill>
-                <a:latin typeface="Arial" pitchFamily="34" charset="0"/>
-                <a:ea typeface="Arial" pitchFamily="34" charset="-122"/>
-                <a:cs typeface="Arial" pitchFamily="34" charset="-120"/>
-              </a:rPr>
-              <a:t>NETWORK-LAYER SUPPORT</a:t>
-            </a:r>
-            <a:endParaRPr lang="en-US" sz="1200" dirty="0"/>
-          </a:p>
-        </p:txBody>
-      </p:sp>
-      <p:sp>
-        <p:nvSpPr>
-          <p:cNvPr id="11" name="Text 9"/>
-          <p:cNvSpPr/>
-          <p:nvPr/>
-        </p:nvSpPr>
-        <p:spPr>
-          <a:xfrm>
-            <a:off x="4873752" y="1856232"/>
-            <a:ext cx="3675888" cy="896112"/>
-          </a:xfrm>
-          <a:prstGeom prst="rect">
-            <a:avLst/>
-          </a:prstGeom>
-          <a:noFill/>
-          <a:ln/>
-        </p:spPr>
-        <p:txBody>
-          <a:bodyPr wrap="square" lIns="0" tIns="0" rIns="0" bIns="0" rtlCol="0" anchor="ctr"/>
-          <a:lstStyle/>
-          <a:p>
-            <a:pPr indent="0" marL="0">
-              <a:buNone/>
-            </a:pPr>
-            <a:r>
-              <a:rPr lang="en-US" sz="1050" dirty="0">
-                <a:solidFill>
-                  <a:srgbClr val="1E293B"/>
-                </a:solidFill>
-                <a:latin typeface="Arial" pitchFamily="34" charset="0"/>
-                <a:ea typeface="Arial" pitchFamily="34" charset="-122"/>
-                <a:cs typeface="Arial" pitchFamily="34" charset="-120"/>
-              </a:rPr>
-              <a:t>Certificate-to-IP binding makes the infrastructure identity-aware: every host record carries a cert thumbprint and expiry — “never trust, always verify” at the address layer.</a:t>
-            </a:r>
-            <a:endParaRPr lang="en-US" sz="1050" dirty="0"/>
-          </a:p>
-        </p:txBody>
-      </p:sp>
-      <p:sp>
-        <p:nvSpPr>
-          <p:cNvPr id="12" name="Shape 10"/>
-          <p:cNvSpPr/>
-          <p:nvPr/>
-        </p:nvSpPr>
-        <p:spPr>
-          <a:xfrm>
-            <a:off x="502920" y="3008376"/>
-            <a:ext cx="4041648" cy="1627632"/>
-          </a:xfrm>
-          <a:prstGeom prst="roundRect">
-            <a:avLst>
-              <a:gd name="adj" fmla="val 3933"/>
-            </a:avLst>
-          </a:prstGeom>
-          <a:solidFill>
-            <a:srgbClr val="FFFFFF"/>
-          </a:solidFill>
-          <a:ln w="9525">
-            <a:solidFill>
-              <a:srgbClr val="C9D4E0"/>
-            </a:solidFill>
-            <a:prstDash val="solid"/>
-          </a:ln>
-          <a:effectLst>
-            <a:outerShdw sx="100000" sy="100000" kx="0" ky="0" algn="bl" rotWithShape="0" blurRad="88900" dist="25400" dir="2700000">
-              <a:srgbClr val="000000">
-                <a:alpha val="14000"/>
-              </a:srgbClr>
-            </a:outerShdw>
-          </a:effectLst>
-        </p:spPr>
-      </p:sp>
-      <p:sp>
-        <p:nvSpPr>
-          <p:cNvPr id="13" name="Shape 11"/>
-          <p:cNvSpPr/>
-          <p:nvPr/>
-        </p:nvSpPr>
-        <p:spPr>
-          <a:xfrm>
-            <a:off x="630936" y="3136392"/>
-            <a:ext cx="3785616" cy="402336"/>
-          </a:xfrm>
-          <a:prstGeom prst="roundRect">
-            <a:avLst>
-              <a:gd name="adj" fmla="val 11364"/>
-            </a:avLst>
-          </a:prstGeom>
-          <a:solidFill>
-            <a:srgbClr val="FBF3E4"/>
-          </a:solidFill>
-          <a:ln/>
-        </p:spPr>
-      </p:sp>
-      <p:sp>
-        <p:nvSpPr>
-          <p:cNvPr id="14" name="Text 12"/>
-          <p:cNvSpPr/>
-          <p:nvPr/>
-        </p:nvSpPr>
-        <p:spPr>
-          <a:xfrm>
-            <a:off x="758952" y="3136392"/>
-            <a:ext cx="3584448" cy="402336"/>
-          </a:xfrm>
-          <a:prstGeom prst="rect">
-            <a:avLst/>
-          </a:prstGeom>
-          <a:noFill/>
-          <a:ln/>
-        </p:spPr>
-        <p:txBody>
-          <a:bodyPr wrap="square" lIns="0" tIns="0" rIns="0" bIns="0" rtlCol="0" anchor="ctr"/>
-          <a:lstStyle/>
-          <a:p>
-            <a:pPr indent="0" marL="0">
-              <a:buNone/>
-            </a:pPr>
-            <a:r>
-              <a:rPr lang="en-US" sz="1200" b="1" dirty="0">
-                <a:solidFill>
-                  <a:srgbClr val="D4860B"/>
-                </a:solidFill>
-                <a:latin typeface="Arial" pitchFamily="34" charset="0"/>
-                <a:ea typeface="Arial" pitchFamily="34" charset="-122"/>
-                <a:cs typeface="Arial" pitchFamily="34" charset="-120"/>
-              </a:rPr>
-              <a:t>Visibility &amp; analytics   </a:t>
-            </a:r>
-            <a:pPr indent="0" marL="0">
-              <a:buNone/>
-            </a:pPr>
-            <a:r>
-              <a:rPr lang="en-US" sz="800" b="1" spc="150" kern="0" dirty="0">
-                <a:solidFill>
-                  <a:srgbClr val="5B6B7C"/>
-                </a:solidFill>
-                <a:latin typeface="Arial" pitchFamily="34" charset="0"/>
-                <a:ea typeface="Arial" pitchFamily="34" charset="-122"/>
-                <a:cs typeface="Arial" pitchFamily="34" charset="-120"/>
-              </a:rPr>
-              <a:t>CROSS-CUTTING</a:t>
-            </a:r>
-            <a:endParaRPr lang="en-US" sz="1200" dirty="0"/>
-          </a:p>
-        </p:txBody>
-      </p:sp>
-      <p:sp>
-        <p:nvSpPr>
-          <p:cNvPr id="15" name="Text 13"/>
-          <p:cNvSpPr/>
-          <p:nvPr/>
-        </p:nvSpPr>
-        <p:spPr>
-          <a:xfrm>
-            <a:off x="685800" y="3630168"/>
-            <a:ext cx="3675888" cy="896112"/>
-          </a:xfrm>
-          <a:prstGeom prst="rect">
-            <a:avLst/>
-          </a:prstGeom>
-          <a:noFill/>
-          <a:ln/>
-        </p:spPr>
-        <p:txBody>
-          <a:bodyPr wrap="square" lIns="0" tIns="0" rIns="0" bIns="0" rtlCol="0" anchor="ctr"/>
-          <a:lstStyle/>
-          <a:p>
-            <a:pPr indent="0" marL="0">
-              <a:buNone/>
-            </a:pPr>
-            <a:r>
-              <a:rPr lang="en-US" sz="1050" dirty="0">
-                <a:solidFill>
-                  <a:srgbClr val="1E293B"/>
-                </a:solidFill>
-                <a:latin typeface="Arial" pitchFamily="34" charset="0"/>
-                <a:ea typeface="Arial" pitchFamily="34" charset="-122"/>
-                <a:cs typeface="Arial" pitchFamily="34" charset="-120"/>
-              </a:rPr>
-              <a:t>Every DNS query, DHCP lease, and RPZ block from all four environments in one syslog stream to Sentinel/Splunk.</a:t>
-            </a:r>
-            <a:endParaRPr lang="en-US" sz="1050" dirty="0"/>
-          </a:p>
-        </p:txBody>
-      </p:sp>
-      <p:sp>
-        <p:nvSpPr>
-          <p:cNvPr id="16" name="Shape 14"/>
-          <p:cNvSpPr/>
-          <p:nvPr/>
-        </p:nvSpPr>
-        <p:spPr>
-          <a:xfrm>
-            <a:off x="4690872" y="3008376"/>
-            <a:ext cx="4041648" cy="1627632"/>
-          </a:xfrm>
-          <a:prstGeom prst="roundRect">
-            <a:avLst>
-              <a:gd name="adj" fmla="val 3933"/>
-            </a:avLst>
-          </a:prstGeom>
-          <a:solidFill>
-            <a:srgbClr val="FFFFFF"/>
-          </a:solidFill>
-          <a:ln w="9525">
-            <a:solidFill>
-              <a:srgbClr val="C9D4E0"/>
-            </a:solidFill>
-            <a:prstDash val="solid"/>
-          </a:ln>
-          <a:effectLst>
-            <a:outerShdw sx="100000" sy="100000" kx="0" ky="0" algn="bl" rotWithShape="0" blurRad="88900" dist="25400" dir="2700000">
-              <a:srgbClr val="000000">
-                <a:alpha val="14000"/>
-              </a:srgbClr>
-            </a:outerShdw>
-          </a:effectLst>
-        </p:spPr>
-      </p:sp>
-      <p:sp>
-        <p:nvSpPr>
-          <p:cNvPr id="17" name="Shape 15"/>
-          <p:cNvSpPr/>
-          <p:nvPr/>
-        </p:nvSpPr>
-        <p:spPr>
-          <a:xfrm>
-            <a:off x="4818888" y="3136392"/>
-            <a:ext cx="3785616" cy="402336"/>
-          </a:xfrm>
-          <a:prstGeom prst="roundRect">
-            <a:avLst>
-              <a:gd name="adj" fmla="val 11364"/>
-            </a:avLst>
-          </a:prstGeom>
-          <a:solidFill>
-            <a:srgbClr val="F9EAE8"/>
-          </a:solidFill>
-          <a:ln/>
-        </p:spPr>
-      </p:sp>
-      <p:sp>
-        <p:nvSpPr>
-          <p:cNvPr id="18" name="Text 16"/>
-          <p:cNvSpPr/>
-          <p:nvPr/>
-        </p:nvSpPr>
-        <p:spPr>
-          <a:xfrm>
-            <a:off x="4946904" y="3136392"/>
-            <a:ext cx="3584448" cy="402336"/>
-          </a:xfrm>
-          <a:prstGeom prst="rect">
-            <a:avLst/>
-          </a:prstGeom>
-          <a:noFill/>
-          <a:ln/>
-        </p:spPr>
-        <p:txBody>
-          <a:bodyPr wrap="square" lIns="0" tIns="0" rIns="0" bIns="0" rtlCol="0" anchor="ctr"/>
-          <a:lstStyle/>
-          <a:p>
-            <a:pPr indent="0" marL="0">
-              <a:buNone/>
-            </a:pPr>
-            <a:r>
-              <a:rPr lang="en-US" sz="1200" b="1" dirty="0">
-                <a:solidFill>
-                  <a:srgbClr val="C0392B"/>
-                </a:solidFill>
-                <a:latin typeface="Arial" pitchFamily="34" charset="0"/>
-                <a:ea typeface="Arial" pitchFamily="34" charset="-122"/>
-                <a:cs typeface="Arial" pitchFamily="34" charset="-120"/>
-              </a:rPr>
-              <a:t>Automation &amp; orchestration   </a:t>
-            </a:r>
-            <a:pPr indent="0" marL="0">
-              <a:buNone/>
-            </a:pPr>
-            <a:r>
-              <a:rPr lang="en-US" sz="800" b="1" spc="150" kern="0" dirty="0">
-                <a:solidFill>
-                  <a:srgbClr val="5B6B7C"/>
-                </a:solidFill>
-                <a:latin typeface="Arial" pitchFamily="34" charset="0"/>
-                <a:ea typeface="Arial" pitchFamily="34" charset="-122"/>
-                <a:cs typeface="Arial" pitchFamily="34" charset="-120"/>
-              </a:rPr>
-              <a:t>CROSS-CUTTING</a:t>
-            </a:r>
-            <a:endParaRPr lang="en-US" sz="1200" dirty="0"/>
-          </a:p>
-        </p:txBody>
-      </p:sp>
-      <p:sp>
-        <p:nvSpPr>
-          <p:cNvPr id="19" name="Text 17"/>
-          <p:cNvSpPr/>
-          <p:nvPr/>
-        </p:nvSpPr>
-        <p:spPr>
-          <a:xfrm>
-            <a:off x="4873752" y="3630168"/>
-            <a:ext cx="3675888" cy="896112"/>
-          </a:xfrm>
-          <a:prstGeom prst="rect">
-            <a:avLst/>
-          </a:prstGeom>
-          <a:noFill/>
-          <a:ln/>
-        </p:spPr>
-        <p:txBody>
-          <a:bodyPr wrap="square" lIns="0" tIns="0" rIns="0" bIns="0" rtlCol="0" anchor="ctr"/>
-          <a:lstStyle/>
-          <a:p>
-            <a:pPr indent="0" marL="0">
-              <a:buNone/>
-            </a:pPr>
-            <a:r>
-              <a:rPr lang="en-US" sz="1050" dirty="0">
-                <a:solidFill>
-                  <a:srgbClr val="1E293B"/>
-                </a:solidFill>
-                <a:latin typeface="Arial" pitchFamily="34" charset="0"/>
-                <a:ea typeface="Arial" pitchFamily="34" charset="-122"/>
-                <a:cs typeface="Arial" pitchFamily="34" charset="-120"/>
-              </a:rPr>
-              <a:t>IP → DNS → certificate as one atomic IaC pipeline; M365 GCC endpoint changes propagate to four enforcement layers without a human.</a:t>
-            </a:r>
-            <a:endParaRPr lang="en-US" sz="1050" dirty="0"/>
+              <a:t>SSOT for federal dates: the Federal AAN / ConMon Gap Roadmap (verified 2026-07-07). Already in force: M-21-31 logging, M-21-07 IPv6, M-22-09 Zero Trust (continued by M-24-14 / M-25-04), BOD 25-01 SCuBA.</a:t>
+            </a:r>
+            <a:endParaRPr lang="en-US" sz="850" dirty="0"/>
           </a:p>
         </p:txBody>
       </p:sp>
@@ -18612,7 +18921,7 @@
                 <a:ea typeface="Arial" pitchFamily="34" charset="-122"/>
                 <a:cs typeface="Arial" pitchFamily="34" charset="-120"/>
               </a:rPr>
-              <a:t>RECOMMENDED BUILDOUT — STEP 1 OF 2</a:t>
+              <a:t>CISA ZERO TRUST MATURITY MODEL V2.0</a:t>
             </a:r>
             <a:endParaRPr lang="en-US" sz="1100" dirty="0"/>
           </a:p>
@@ -18651,7 +18960,7 @@
                 <a:ea typeface="Arial" pitchFamily="34" charset="-122"/>
                 <a:cs typeface="Arial" pitchFamily="34" charset="-120"/>
               </a:rPr>
-              <a:t>Foundation first: on-prem, VMware, Azure (months 1–5)</a:t>
+              <a:t>The naming plane is where Zero Trust touches the network</a:t>
             </a:r>
             <a:endParaRPr lang="en-US" sz="2600" dirty="0"/>
           </a:p>
@@ -18665,12 +18974,12 @@
         </p:nvSpPr>
         <p:spPr>
           <a:xfrm>
-            <a:off x="237744" y="1234440"/>
-            <a:ext cx="2084832" cy="1207008"/>
+            <a:off x="502920" y="1234440"/>
+            <a:ext cx="4041648" cy="1627632"/>
           </a:xfrm>
           <a:prstGeom prst="roundRect">
             <a:avLst>
-              <a:gd name="adj" fmla="val 5303"/>
+              <a:gd name="adj" fmla="val 3933"/>
             </a:avLst>
           </a:prstGeom>
           <a:solidFill>
@@ -18699,212 +19008,126 @@
         </p:nvSpPr>
         <p:spPr>
           <a:xfrm>
-            <a:off x="347472" y="1344168"/>
-            <a:ext cx="329184" cy="329184"/>
-          </a:xfrm>
-          <a:prstGeom prst="ellipse">
-            <a:avLst/>
-          </a:prstGeom>
-          <a:solidFill>
-            <a:srgbClr val="5B6B7C"/>
-          </a:solidFill>
-          <a:ln/>
-        </p:spPr>
-      </p:sp>
-      <p:sp>
-        <p:nvSpPr>
-          <p:cNvPr id="6" name="Text 4"/>
-          <p:cNvSpPr/>
-          <p:nvPr/>
-        </p:nvSpPr>
-        <p:spPr>
-          <a:xfrm>
-            <a:off x="347472" y="1330452"/>
-            <a:ext cx="329184" cy="329184"/>
-          </a:xfrm>
-          <a:prstGeom prst="rect">
-            <a:avLst/>
-          </a:prstGeom>
-          <a:noFill/>
-          <a:ln/>
-        </p:spPr>
-        <p:txBody>
-          <a:bodyPr wrap="square" lIns="0" tIns="0" rIns="0" bIns="0" rtlCol="0" anchor="ctr"/>
-          <a:lstStyle/>
-          <a:p>
-            <a:pPr algn="ctr" indent="0" marL="0">
-              <a:buNone/>
-            </a:pPr>
-            <a:r>
-              <a:rPr lang="en-US" sz="1300" b="1" dirty="0">
-                <a:solidFill>
-                  <a:srgbClr val="FFFFFF"/>
-                </a:solidFill>
-                <a:latin typeface="Arial" pitchFamily="34" charset="0"/>
-                <a:ea typeface="Arial" pitchFamily="34" charset="-122"/>
-                <a:cs typeface="Arial" pitchFamily="34" charset="-120"/>
-              </a:rPr>
-              <a:t>0</a:t>
-            </a:r>
-            <a:endParaRPr lang="en-US" sz="1300" dirty="0"/>
-          </a:p>
-        </p:txBody>
-      </p:sp>
-      <p:sp>
-        <p:nvSpPr>
-          <p:cNvPr id="7" name="Text 5"/>
-          <p:cNvSpPr/>
-          <p:nvPr/>
-        </p:nvSpPr>
-        <p:spPr>
-          <a:xfrm>
-            <a:off x="749808" y="1325880"/>
-            <a:ext cx="1490472" cy="237744"/>
-          </a:xfrm>
-          <a:prstGeom prst="rect">
-            <a:avLst/>
-          </a:prstGeom>
-          <a:noFill/>
-          <a:ln/>
-        </p:spPr>
-        <p:txBody>
-          <a:bodyPr wrap="square" lIns="0" tIns="0" rIns="0" bIns="0" rtlCol="0" anchor="ctr"/>
-          <a:lstStyle/>
-          <a:p>
-            <a:pPr indent="0" marL="0">
-              <a:buNone/>
-            </a:pPr>
-            <a:r>
-              <a:rPr lang="en-US" sz="1100" b="1" dirty="0">
-                <a:solidFill>
-                  <a:srgbClr val="1E293B"/>
-                </a:solidFill>
-                <a:latin typeface="Arial" pitchFamily="34" charset="0"/>
-                <a:ea typeface="Arial" pitchFamily="34" charset="-122"/>
-                <a:cs typeface="Arial" pitchFamily="34" charset="-120"/>
-              </a:rPr>
-              <a:t>Procure &amp; architect</a:t>
-            </a:r>
-            <a:endParaRPr lang="en-US" sz="1100" dirty="0"/>
-          </a:p>
-        </p:txBody>
-      </p:sp>
-      <p:sp>
-        <p:nvSpPr>
-          <p:cNvPr id="8" name="Text 6"/>
-          <p:cNvSpPr/>
-          <p:nvPr/>
-        </p:nvSpPr>
-        <p:spPr>
-          <a:xfrm>
-            <a:off x="749808" y="1554480"/>
-            <a:ext cx="1490472" cy="182880"/>
-          </a:xfrm>
-          <a:prstGeom prst="rect">
-            <a:avLst/>
-          </a:prstGeom>
-          <a:noFill/>
-          <a:ln/>
-        </p:spPr>
-        <p:txBody>
-          <a:bodyPr wrap="square" lIns="0" tIns="0" rIns="0" bIns="0" rtlCol="0" anchor="ctr"/>
-          <a:lstStyle/>
-          <a:p>
-            <a:pPr indent="0" marL="0">
-              <a:buNone/>
-            </a:pPr>
-            <a:r>
-              <a:rPr lang="en-US" sz="850" b="1" dirty="0">
-                <a:solidFill>
-                  <a:srgbClr val="5B6B7C"/>
-                </a:solidFill>
-                <a:latin typeface="Arial" pitchFamily="34" charset="0"/>
-                <a:ea typeface="Arial" pitchFamily="34" charset="-122"/>
-                <a:cs typeface="Arial" pitchFamily="34" charset="-120"/>
-              </a:rPr>
-              <a:t>Month 1</a:t>
-            </a:r>
-            <a:endParaRPr lang="en-US" sz="850" dirty="0"/>
-          </a:p>
-        </p:txBody>
-      </p:sp>
-      <p:sp>
-        <p:nvSpPr>
-          <p:cNvPr id="9" name="Text 7"/>
-          <p:cNvSpPr/>
-          <p:nvPr/>
-        </p:nvSpPr>
-        <p:spPr>
-          <a:xfrm>
-            <a:off x="347472" y="1764792"/>
-            <a:ext cx="1865376" cy="603504"/>
-          </a:xfrm>
-          <a:prstGeom prst="rect">
-            <a:avLst/>
-          </a:prstGeom>
-          <a:noFill/>
-          <a:ln/>
-        </p:spPr>
-        <p:txBody>
-          <a:bodyPr wrap="square" lIns="0" tIns="0" rIns="0" bIns="0" rtlCol="0" anchor="ctr"/>
-          <a:lstStyle/>
-          <a:p>
-            <a:pPr indent="0" marL="0">
-              <a:buNone/>
-            </a:pPr>
-            <a:r>
-              <a:rPr lang="en-US" sz="850" dirty="0">
-                <a:solidFill>
-                  <a:srgbClr val="5B6B7C"/>
-                </a:solidFill>
-                <a:latin typeface="Arial" pitchFamily="34" charset="0"/>
-                <a:ea typeface="Arial" pitchFamily="34" charset="-122"/>
-                <a:cs typeface="Arial" pitchFamily="34" charset="-120"/>
-              </a:rPr>
-              <a:t>Marketplace procurement; CIDR overlap audit across all four environments</a:t>
-            </a:r>
-            <a:endParaRPr lang="en-US" sz="850" dirty="0"/>
-          </a:p>
-        </p:txBody>
-      </p:sp>
-      <p:sp>
-        <p:nvSpPr>
-          <p:cNvPr id="10" name="Shape 8"/>
-          <p:cNvSpPr/>
-          <p:nvPr/>
-        </p:nvSpPr>
-        <p:spPr>
-          <a:xfrm>
-            <a:off x="2340864" y="1837944"/>
-            <a:ext cx="73152" cy="0"/>
-          </a:xfrm>
-          <a:prstGeom prst="line">
-            <a:avLst/>
-          </a:prstGeom>
-          <a:noFill/>
-          <a:ln w="25400">
-            <a:solidFill>
-              <a:srgbClr val="C9D4E0"/>
-            </a:solidFill>
-            <a:prstDash val="solid"/>
-            <a:tailEnd type="triangle"/>
-          </a:ln>
-        </p:spPr>
-      </p:sp>
-      <p:sp>
-        <p:nvSpPr>
-          <p:cNvPr id="11" name="Shape 9"/>
-          <p:cNvSpPr/>
-          <p:nvPr/>
-        </p:nvSpPr>
-        <p:spPr>
-          <a:xfrm>
-            <a:off x="2432304" y="1234440"/>
-            <a:ext cx="2084832" cy="1207008"/>
+            <a:off x="630936" y="1362456"/>
+            <a:ext cx="3785616" cy="402336"/>
           </a:xfrm>
           <a:prstGeom prst="roundRect">
             <a:avLst>
-              <a:gd name="adj" fmla="val 5303"/>
+              <a:gd name="adj" fmla="val 11364"/>
+            </a:avLst>
+          </a:prstGeom>
+          <a:solidFill>
+            <a:srgbClr val="EDF3F9"/>
+          </a:solidFill>
+          <a:ln/>
+        </p:spPr>
+      </p:sp>
+      <p:sp>
+        <p:nvSpPr>
+          <p:cNvPr id="6" name="Text 4"/>
+          <p:cNvSpPr/>
+          <p:nvPr/>
+        </p:nvSpPr>
+        <p:spPr>
+          <a:xfrm>
+            <a:off x="758952" y="1362456"/>
+            <a:ext cx="3584448" cy="402336"/>
+          </a:xfrm>
+          <a:prstGeom prst="rect">
+            <a:avLst/>
+          </a:prstGeom>
+          <a:noFill/>
+          <a:ln/>
+        </p:spPr>
+        <p:txBody>
+          <a:bodyPr wrap="square" lIns="0" tIns="0" rIns="0" bIns="0" rtlCol="0" anchor="ctr"/>
+          <a:lstStyle/>
+          <a:p>
+            <a:pPr indent="0" marL="0">
+              <a:buNone/>
+            </a:pPr>
+            <a:r>
+              <a:rPr lang="en-US" sz="1200" b="1" dirty="0">
+                <a:solidFill>
+                  <a:srgbClr val="1F3A5F"/>
+                </a:solidFill>
+                <a:latin typeface="Arial" pitchFamily="34" charset="0"/>
+                <a:ea typeface="Arial" pitchFamily="34" charset="-122"/>
+                <a:cs typeface="Arial" pitchFamily="34" charset="-120"/>
+              </a:rPr>
+              <a:t>Networks pillar   </a:t>
+            </a:r>
+            <a:pPr indent="0" marL="0">
+              <a:buNone/>
+            </a:pPr>
+            <a:r>
+              <a:rPr lang="en-US" sz="800" b="1" spc="150" kern="0" dirty="0">
+                <a:solidFill>
+                  <a:srgbClr val="5B6B7C"/>
+                </a:solidFill>
+                <a:latin typeface="Arial" pitchFamily="34" charset="0"/>
+                <a:ea typeface="Arial" pitchFamily="34" charset="-122"/>
+                <a:cs typeface="Arial" pitchFamily="34" charset="-120"/>
+              </a:rPr>
+              <a:t>DEEPEST ALIGNMENT</a:t>
+            </a:r>
+            <a:endParaRPr lang="en-US" sz="1200" dirty="0"/>
+          </a:p>
+        </p:txBody>
+      </p:sp>
+      <p:sp>
+        <p:nvSpPr>
+          <p:cNvPr id="7" name="Text 5"/>
+          <p:cNvSpPr/>
+          <p:nvPr/>
+        </p:nvSpPr>
+        <p:spPr>
+          <a:xfrm>
+            <a:off x="685800" y="1856232"/>
+            <a:ext cx="3675888" cy="896112"/>
+          </a:xfrm>
+          <a:prstGeom prst="rect">
+            <a:avLst/>
+          </a:prstGeom>
+          <a:noFill/>
+          <a:ln/>
+        </p:spPr>
+        <p:txBody>
+          <a:bodyPr wrap="square" lIns="0" tIns="0" rIns="0" bIns="0" rtlCol="0" anchor="ctr"/>
+          <a:lstStyle/>
+          <a:p>
+            <a:pPr indent="0" marL="0">
+              <a:buNone/>
+            </a:pPr>
+            <a:r>
+              <a:rPr lang="en-US" sz="1050" dirty="0">
+                <a:solidFill>
+                  <a:srgbClr val="1E293B"/>
+                </a:solidFill>
+                <a:latin typeface="Arial" pitchFamily="34" charset="0"/>
+                <a:ea typeface="Arial" pitchFamily="34" charset="-122"/>
+                <a:cs typeface="Arial" pitchFamily="34" charset="-120"/>
+              </a:rPr>
+              <a:t>Unified DNS policy, RPZ enforcement before any TCP connection, DNSSEC everywhere — including private SDN segments no cloud-native resolver can sign.</a:t>
+            </a:r>
+            <a:endParaRPr lang="en-US" sz="1050" dirty="0"/>
+          </a:p>
+        </p:txBody>
+      </p:sp>
+      <p:sp>
+        <p:nvSpPr>
+          <p:cNvPr id="8" name="Shape 6"/>
+          <p:cNvSpPr/>
+          <p:nvPr/>
+        </p:nvSpPr>
+        <p:spPr>
+          <a:xfrm>
+            <a:off x="4690872" y="1234440"/>
+            <a:ext cx="4041648" cy="1627632"/>
+          </a:xfrm>
+          <a:prstGeom prst="roundRect">
+            <a:avLst>
+              <a:gd name="adj" fmla="val 3933"/>
             </a:avLst>
           </a:prstGeom>
           <a:solidFill>
@@ -18927,218 +19150,132 @@
       </p:sp>
       <p:sp>
         <p:nvSpPr>
-          <p:cNvPr id="12" name="Shape 10"/>
-          <p:cNvSpPr/>
-          <p:nvPr/>
-        </p:nvSpPr>
-        <p:spPr>
-          <a:xfrm>
-            <a:off x="2542032" y="1344168"/>
-            <a:ext cx="329184" cy="329184"/>
-          </a:xfrm>
-          <a:prstGeom prst="ellipse">
-            <a:avLst/>
-          </a:prstGeom>
-          <a:solidFill>
-            <a:srgbClr val="1F3A5F"/>
-          </a:solidFill>
-          <a:ln/>
-        </p:spPr>
-      </p:sp>
-      <p:sp>
-        <p:nvSpPr>
-          <p:cNvPr id="13" name="Text 11"/>
-          <p:cNvSpPr/>
-          <p:nvPr/>
-        </p:nvSpPr>
-        <p:spPr>
-          <a:xfrm>
-            <a:off x="2542032" y="1330452"/>
-            <a:ext cx="329184" cy="329184"/>
-          </a:xfrm>
-          <a:prstGeom prst="rect">
-            <a:avLst/>
-          </a:prstGeom>
-          <a:noFill/>
-          <a:ln/>
-        </p:spPr>
-        <p:txBody>
-          <a:bodyPr wrap="square" lIns="0" tIns="0" rIns="0" bIns="0" rtlCol="0" anchor="ctr"/>
-          <a:lstStyle/>
-          <a:p>
-            <a:pPr algn="ctr" indent="0" marL="0">
-              <a:buNone/>
-            </a:pPr>
-            <a:r>
-              <a:rPr lang="en-US" sz="1300" b="1" dirty="0">
-                <a:solidFill>
-                  <a:srgbClr val="FFFFFF"/>
-                </a:solidFill>
-                <a:latin typeface="Arial" pitchFamily="34" charset="0"/>
-                <a:ea typeface="Arial" pitchFamily="34" charset="-122"/>
-                <a:cs typeface="Arial" pitchFamily="34" charset="-120"/>
-              </a:rPr>
-              <a:t>1</a:t>
-            </a:r>
-            <a:endParaRPr lang="en-US" sz="1300" dirty="0"/>
-          </a:p>
-        </p:txBody>
-      </p:sp>
-      <p:sp>
-        <p:nvSpPr>
-          <p:cNvPr id="14" name="Text 12"/>
-          <p:cNvSpPr/>
-          <p:nvPr/>
-        </p:nvSpPr>
-        <p:spPr>
-          <a:xfrm>
-            <a:off x="2944368" y="1325880"/>
-            <a:ext cx="1490472" cy="237744"/>
-          </a:xfrm>
-          <a:prstGeom prst="rect">
-            <a:avLst/>
-          </a:prstGeom>
-          <a:noFill/>
-          <a:ln/>
-        </p:spPr>
-        <p:txBody>
-          <a:bodyPr wrap="square" lIns="0" tIns="0" rIns="0" bIns="0" rtlCol="0" anchor="ctr"/>
-          <a:lstStyle/>
-          <a:p>
-            <a:pPr indent="0" marL="0">
-              <a:buNone/>
-            </a:pPr>
-            <a:r>
-              <a:rPr lang="en-US" sz="1100" b="1" dirty="0">
-                <a:solidFill>
-                  <a:srgbClr val="1E293B"/>
-                </a:solidFill>
-                <a:latin typeface="Arial" pitchFamily="34" charset="0"/>
-                <a:ea typeface="Arial" pitchFamily="34" charset="-122"/>
-                <a:cs typeface="Arial" pitchFamily="34" charset="-120"/>
-              </a:rPr>
-              <a:t>On-prem foundation</a:t>
-            </a:r>
-            <a:endParaRPr lang="en-US" sz="1100" dirty="0"/>
-          </a:p>
-        </p:txBody>
-      </p:sp>
-      <p:sp>
-        <p:nvSpPr>
-          <p:cNvPr id="15" name="Text 13"/>
-          <p:cNvSpPr/>
-          <p:nvPr/>
-        </p:nvSpPr>
-        <p:spPr>
-          <a:xfrm>
-            <a:off x="2944368" y="1554480"/>
-            <a:ext cx="1490472" cy="182880"/>
-          </a:xfrm>
-          <a:prstGeom prst="rect">
-            <a:avLst/>
-          </a:prstGeom>
-          <a:noFill/>
-          <a:ln/>
-        </p:spPr>
-        <p:txBody>
-          <a:bodyPr wrap="square" lIns="0" tIns="0" rIns="0" bIns="0" rtlCol="0" anchor="ctr"/>
-          <a:lstStyle/>
-          <a:p>
-            <a:pPr indent="0" marL="0">
-              <a:buNone/>
-            </a:pPr>
-            <a:r>
-              <a:rPr lang="en-US" sz="850" b="1" dirty="0">
-                <a:solidFill>
-                  <a:srgbClr val="1F3A5F"/>
-                </a:solidFill>
-                <a:latin typeface="Arial" pitchFamily="34" charset="0"/>
-                <a:ea typeface="Arial" pitchFamily="34" charset="-122"/>
-                <a:cs typeface="Arial" pitchFamily="34" charset="-120"/>
-              </a:rPr>
-              <a:t>Months 1–3</a:t>
-            </a:r>
-            <a:endParaRPr lang="en-US" sz="850" dirty="0"/>
-          </a:p>
-        </p:txBody>
-      </p:sp>
-      <p:sp>
-        <p:nvSpPr>
-          <p:cNvPr id="16" name="Text 14"/>
-          <p:cNvSpPr/>
-          <p:nvPr/>
-        </p:nvSpPr>
-        <p:spPr>
-          <a:xfrm>
-            <a:off x="2542032" y="1764792"/>
-            <a:ext cx="1865376" cy="603504"/>
-          </a:xfrm>
-          <a:prstGeom prst="rect">
-            <a:avLst/>
-          </a:prstGeom>
-          <a:noFill/>
-          <a:ln/>
-        </p:spPr>
-        <p:txBody>
-          <a:bodyPr wrap="square" lIns="0" tIns="0" rIns="0" bIns="0" rtlCol="0" anchor="ctr"/>
-          <a:lstStyle/>
-          <a:p>
-            <a:pPr indent="0" marL="0">
-              <a:buNone/>
-            </a:pPr>
-            <a:r>
-              <a:rPr lang="en-US" sz="850" dirty="0">
-                <a:solidFill>
-                  <a:srgbClr val="5B6B7C"/>
-                </a:solidFill>
-                <a:latin typeface="Arial" pitchFamily="34" charset="0"/>
-                <a:ea typeface="Arial" pitchFamily="34" charset="-122"/>
-                <a:cs typeface="Arial" pitchFamily="34" charset="-120"/>
-              </a:rPr>
-              <a:t>Grid Master HA; AD zones in; DNSSEC + DS record; DHCP migration; SIEM syslog; CM-8 export</a:t>
-            </a:r>
-            <a:endParaRPr lang="en-US" sz="850" dirty="0"/>
-          </a:p>
-        </p:txBody>
-      </p:sp>
-      <p:sp>
-        <p:nvSpPr>
-          <p:cNvPr id="17" name="Shape 15"/>
-          <p:cNvSpPr/>
-          <p:nvPr/>
-        </p:nvSpPr>
-        <p:spPr>
-          <a:xfrm>
-            <a:off x="4535424" y="1837944"/>
-            <a:ext cx="73152" cy="0"/>
-          </a:xfrm>
-          <a:prstGeom prst="line">
-            <a:avLst/>
-          </a:prstGeom>
-          <a:noFill/>
-          <a:ln w="25400">
-            <a:solidFill>
-              <a:srgbClr val="C9D4E0"/>
-            </a:solidFill>
-            <a:prstDash val="solid"/>
-            <a:tailEnd type="triangle"/>
-          </a:ln>
-        </p:spPr>
-      </p:sp>
-      <p:sp>
-        <p:nvSpPr>
-          <p:cNvPr id="18" name="Shape 16"/>
-          <p:cNvSpPr/>
-          <p:nvPr/>
-        </p:nvSpPr>
-        <p:spPr>
-          <a:xfrm>
-            <a:off x="4626864" y="1234440"/>
-            <a:ext cx="2084832" cy="1207008"/>
+          <p:cNvPr id="9" name="Shape 7"/>
+          <p:cNvSpPr/>
+          <p:nvPr/>
+        </p:nvSpPr>
+        <p:spPr>
+          <a:xfrm>
+            <a:off x="4818888" y="1362456"/>
+            <a:ext cx="3785616" cy="402336"/>
           </a:xfrm>
           <a:prstGeom prst="roundRect">
             <a:avLst>
-              <a:gd name="adj" fmla="val 5303"/>
+              <a:gd name="adj" fmla="val 11364"/>
+            </a:avLst>
+          </a:prstGeom>
+          <a:solidFill>
+            <a:srgbClr val="E6F5F2"/>
+          </a:solidFill>
+          <a:ln/>
+        </p:spPr>
+      </p:sp>
+      <p:sp>
+        <p:nvSpPr>
+          <p:cNvPr id="10" name="Text 8"/>
+          <p:cNvSpPr/>
+          <p:nvPr/>
+        </p:nvSpPr>
+        <p:spPr>
+          <a:xfrm>
+            <a:off x="4946904" y="1362456"/>
+            <a:ext cx="3584448" cy="402336"/>
+          </a:xfrm>
+          <a:prstGeom prst="rect">
+            <a:avLst/>
+          </a:prstGeom>
+          <a:noFill/>
+          <a:ln/>
+        </p:spPr>
+        <p:txBody>
+          <a:bodyPr wrap="square" lIns="0" tIns="0" rIns="0" bIns="0" rtlCol="0" anchor="ctr"/>
+          <a:lstStyle/>
+          <a:p>
+            <a:pPr indent="0" marL="0">
+              <a:buNone/>
+            </a:pPr>
+            <a:r>
+              <a:rPr lang="en-US" sz="1200" b="1" dirty="0">
+                <a:solidFill>
+                  <a:srgbClr val="1A9E8F"/>
+                </a:solidFill>
+                <a:latin typeface="Arial" pitchFamily="34" charset="0"/>
+                <a:ea typeface="Arial" pitchFamily="34" charset="-122"/>
+                <a:cs typeface="Arial" pitchFamily="34" charset="-120"/>
+              </a:rPr>
+              <a:t>Identity pillar   </a:t>
+            </a:r>
+            <a:pPr indent="0" marL="0">
+              <a:buNone/>
+            </a:pPr>
+            <a:r>
+              <a:rPr lang="en-US" sz="800" b="1" spc="150" kern="0" dirty="0">
+                <a:solidFill>
+                  <a:srgbClr val="5B6B7C"/>
+                </a:solidFill>
+                <a:latin typeface="Arial" pitchFamily="34" charset="0"/>
+                <a:ea typeface="Arial" pitchFamily="34" charset="-122"/>
+                <a:cs typeface="Arial" pitchFamily="34" charset="-120"/>
+              </a:rPr>
+              <a:t>NETWORK-LAYER SUPPORT</a:t>
+            </a:r>
+            <a:endParaRPr lang="en-US" sz="1200" dirty="0"/>
+          </a:p>
+        </p:txBody>
+      </p:sp>
+      <p:sp>
+        <p:nvSpPr>
+          <p:cNvPr id="11" name="Text 9"/>
+          <p:cNvSpPr/>
+          <p:nvPr/>
+        </p:nvSpPr>
+        <p:spPr>
+          <a:xfrm>
+            <a:off x="4873752" y="1856232"/>
+            <a:ext cx="3675888" cy="896112"/>
+          </a:xfrm>
+          <a:prstGeom prst="rect">
+            <a:avLst/>
+          </a:prstGeom>
+          <a:noFill/>
+          <a:ln/>
+        </p:spPr>
+        <p:txBody>
+          <a:bodyPr wrap="square" lIns="0" tIns="0" rIns="0" bIns="0" rtlCol="0" anchor="ctr"/>
+          <a:lstStyle/>
+          <a:p>
+            <a:pPr indent="0" marL="0">
+              <a:buNone/>
+            </a:pPr>
+            <a:r>
+              <a:rPr lang="en-US" sz="1050" dirty="0">
+                <a:solidFill>
+                  <a:srgbClr val="1E293B"/>
+                </a:solidFill>
+                <a:latin typeface="Arial" pitchFamily="34" charset="0"/>
+                <a:ea typeface="Arial" pitchFamily="34" charset="-122"/>
+                <a:cs typeface="Arial" pitchFamily="34" charset="-120"/>
+              </a:rPr>
+              <a:t>Certificate-to-IP binding makes the infrastructure identity-aware: every host record carries a cert thumbprint and expiry — “never trust, always verify” at the address layer.</a:t>
+            </a:r>
+            <a:endParaRPr lang="en-US" sz="1050" dirty="0"/>
+          </a:p>
+        </p:txBody>
+      </p:sp>
+      <p:sp>
+        <p:nvSpPr>
+          <p:cNvPr id="12" name="Shape 10"/>
+          <p:cNvSpPr/>
+          <p:nvPr/>
+        </p:nvSpPr>
+        <p:spPr>
+          <a:xfrm>
+            <a:off x="502920" y="3008376"/>
+            <a:ext cx="4041648" cy="1627632"/>
+          </a:xfrm>
+          <a:prstGeom prst="roundRect">
+            <a:avLst>
+              <a:gd name="adj" fmla="val 3933"/>
             </a:avLst>
           </a:prstGeom>
           <a:solidFill>
@@ -19161,218 +19298,132 @@
       </p:sp>
       <p:sp>
         <p:nvSpPr>
-          <p:cNvPr id="19" name="Shape 17"/>
-          <p:cNvSpPr/>
-          <p:nvPr/>
-        </p:nvSpPr>
-        <p:spPr>
-          <a:xfrm>
-            <a:off x="4736592" y="1344168"/>
-            <a:ext cx="329184" cy="329184"/>
-          </a:xfrm>
-          <a:prstGeom prst="ellipse">
-            <a:avLst/>
-          </a:prstGeom>
-          <a:solidFill>
-            <a:srgbClr val="1F3A5F"/>
-          </a:solidFill>
-          <a:ln/>
-        </p:spPr>
-      </p:sp>
-      <p:sp>
-        <p:nvSpPr>
-          <p:cNvPr id="20" name="Text 18"/>
-          <p:cNvSpPr/>
-          <p:nvPr/>
-        </p:nvSpPr>
-        <p:spPr>
-          <a:xfrm>
-            <a:off x="4736592" y="1330452"/>
-            <a:ext cx="329184" cy="329184"/>
-          </a:xfrm>
-          <a:prstGeom prst="rect">
-            <a:avLst/>
-          </a:prstGeom>
-          <a:noFill/>
-          <a:ln/>
-        </p:spPr>
-        <p:txBody>
-          <a:bodyPr wrap="square" lIns="0" tIns="0" rIns="0" bIns="0" rtlCol="0" anchor="ctr"/>
-          <a:lstStyle/>
-          <a:p>
-            <a:pPr algn="ctr" indent="0" marL="0">
-              <a:buNone/>
-            </a:pPr>
-            <a:r>
-              <a:rPr lang="en-US" sz="1300" b="1" dirty="0">
-                <a:solidFill>
-                  <a:srgbClr val="FFFFFF"/>
-                </a:solidFill>
-                <a:latin typeface="Arial" pitchFamily="34" charset="0"/>
-                <a:ea typeface="Arial" pitchFamily="34" charset="-122"/>
-                <a:cs typeface="Arial" pitchFamily="34" charset="-120"/>
-              </a:rPr>
-              <a:t>2</a:t>
-            </a:r>
-            <a:endParaRPr lang="en-US" sz="1300" dirty="0"/>
-          </a:p>
-        </p:txBody>
-      </p:sp>
-      <p:sp>
-        <p:nvSpPr>
-          <p:cNvPr id="21" name="Text 19"/>
-          <p:cNvSpPr/>
-          <p:nvPr/>
-        </p:nvSpPr>
-        <p:spPr>
-          <a:xfrm>
-            <a:off x="5138928" y="1325880"/>
-            <a:ext cx="1490472" cy="237744"/>
-          </a:xfrm>
-          <a:prstGeom prst="rect">
-            <a:avLst/>
-          </a:prstGeom>
-          <a:noFill/>
-          <a:ln/>
-        </p:spPr>
-        <p:txBody>
-          <a:bodyPr wrap="square" lIns="0" tIns="0" rIns="0" bIns="0" rtlCol="0" anchor="ctr"/>
-          <a:lstStyle/>
-          <a:p>
-            <a:pPr indent="0" marL="0">
-              <a:buNone/>
-            </a:pPr>
-            <a:r>
-              <a:rPr lang="en-US" sz="1100" b="1" dirty="0">
-                <a:solidFill>
-                  <a:srgbClr val="1E293B"/>
-                </a:solidFill>
-                <a:latin typeface="Arial" pitchFamily="34" charset="0"/>
-                <a:ea typeface="Arial" pitchFamily="34" charset="-122"/>
-                <a:cs typeface="Arial" pitchFamily="34" charset="-120"/>
-              </a:rPr>
-              <a:t>VMware VCF 9.1</a:t>
-            </a:r>
-            <a:endParaRPr lang="en-US" sz="1100" dirty="0"/>
-          </a:p>
-        </p:txBody>
-      </p:sp>
-      <p:sp>
-        <p:nvSpPr>
-          <p:cNvPr id="22" name="Text 20"/>
-          <p:cNvSpPr/>
-          <p:nvPr/>
-        </p:nvSpPr>
-        <p:spPr>
-          <a:xfrm>
-            <a:off x="5138928" y="1554480"/>
-            <a:ext cx="1490472" cy="182880"/>
-          </a:xfrm>
-          <a:prstGeom prst="rect">
-            <a:avLst/>
-          </a:prstGeom>
-          <a:noFill/>
-          <a:ln/>
-        </p:spPr>
-        <p:txBody>
-          <a:bodyPr wrap="square" lIns="0" tIns="0" rIns="0" bIns="0" rtlCol="0" anchor="ctr"/>
-          <a:lstStyle/>
-          <a:p>
-            <a:pPr indent="0" marL="0">
-              <a:buNone/>
-            </a:pPr>
-            <a:r>
-              <a:rPr lang="en-US" sz="850" b="1" dirty="0">
-                <a:solidFill>
-                  <a:srgbClr val="1F3A5F"/>
-                </a:solidFill>
-                <a:latin typeface="Arial" pitchFamily="34" charset="0"/>
-                <a:ea typeface="Arial" pitchFamily="34" charset="-122"/>
-                <a:cs typeface="Arial" pitchFamily="34" charset="-120"/>
-              </a:rPr>
-              <a:t>Months 2–4</a:t>
-            </a:r>
-            <a:endParaRPr lang="en-US" sz="850" dirty="0"/>
-          </a:p>
-        </p:txBody>
-      </p:sp>
-      <p:sp>
-        <p:nvSpPr>
-          <p:cNvPr id="23" name="Text 21"/>
-          <p:cNvSpPr/>
-          <p:nvPr/>
-        </p:nvSpPr>
-        <p:spPr>
-          <a:xfrm>
-            <a:off x="4736592" y="1764792"/>
-            <a:ext cx="1865376" cy="603504"/>
-          </a:xfrm>
-          <a:prstGeom prst="rect">
-            <a:avLst/>
-          </a:prstGeom>
-          <a:noFill/>
-          <a:ln/>
-        </p:spPr>
-        <p:txBody>
-          <a:bodyPr wrap="square" lIns="0" tIns="0" rIns="0" bIns="0" rtlCol="0" anchor="ctr"/>
-          <a:lstStyle/>
-          <a:p>
-            <a:pPr indent="0" marL="0">
-              <a:buNone/>
-            </a:pPr>
-            <a:r>
-              <a:rPr lang="en-US" sz="850" dirty="0">
-                <a:solidFill>
-                  <a:srgbClr val="5B6B7C"/>
-                </a:solidFill>
-                <a:latin typeface="Arial" pitchFamily="34" charset="0"/>
-                <a:ea typeface="Arial" pitchFamily="34" charset="-122"/>
-                <a:cs typeface="Arial" pitchFamily="34" charset="-120"/>
-              </a:rPr>
-              <a:t>InfoBlox as native VCF IPAM backend; NSX-T DNS to Grid Members</a:t>
-            </a:r>
-            <a:endParaRPr lang="en-US" sz="850" dirty="0"/>
-          </a:p>
-        </p:txBody>
-      </p:sp>
-      <p:sp>
-        <p:nvSpPr>
-          <p:cNvPr id="24" name="Shape 22"/>
-          <p:cNvSpPr/>
-          <p:nvPr/>
-        </p:nvSpPr>
-        <p:spPr>
-          <a:xfrm>
-            <a:off x="6729984" y="1837944"/>
-            <a:ext cx="73152" cy="0"/>
-          </a:xfrm>
-          <a:prstGeom prst="line">
-            <a:avLst/>
-          </a:prstGeom>
-          <a:noFill/>
-          <a:ln w="25400">
-            <a:solidFill>
-              <a:srgbClr val="C9D4E0"/>
-            </a:solidFill>
-            <a:prstDash val="solid"/>
-            <a:tailEnd type="triangle"/>
-          </a:ln>
-        </p:spPr>
-      </p:sp>
-      <p:sp>
-        <p:nvSpPr>
-          <p:cNvPr id="25" name="Shape 23"/>
-          <p:cNvSpPr/>
-          <p:nvPr/>
-        </p:nvSpPr>
-        <p:spPr>
-          <a:xfrm>
-            <a:off x="6821424" y="1234440"/>
-            <a:ext cx="2084832" cy="1207008"/>
+          <p:cNvPr id="13" name="Shape 11"/>
+          <p:cNvSpPr/>
+          <p:nvPr/>
+        </p:nvSpPr>
+        <p:spPr>
+          <a:xfrm>
+            <a:off x="630936" y="3136392"/>
+            <a:ext cx="3785616" cy="402336"/>
           </a:xfrm>
           <a:prstGeom prst="roundRect">
             <a:avLst>
-              <a:gd name="adj" fmla="val 5303"/>
+              <a:gd name="adj" fmla="val 11364"/>
+            </a:avLst>
+          </a:prstGeom>
+          <a:solidFill>
+            <a:srgbClr val="FBF3E4"/>
+          </a:solidFill>
+          <a:ln/>
+        </p:spPr>
+      </p:sp>
+      <p:sp>
+        <p:nvSpPr>
+          <p:cNvPr id="14" name="Text 12"/>
+          <p:cNvSpPr/>
+          <p:nvPr/>
+        </p:nvSpPr>
+        <p:spPr>
+          <a:xfrm>
+            <a:off x="758952" y="3136392"/>
+            <a:ext cx="3584448" cy="402336"/>
+          </a:xfrm>
+          <a:prstGeom prst="rect">
+            <a:avLst/>
+          </a:prstGeom>
+          <a:noFill/>
+          <a:ln/>
+        </p:spPr>
+        <p:txBody>
+          <a:bodyPr wrap="square" lIns="0" tIns="0" rIns="0" bIns="0" rtlCol="0" anchor="ctr"/>
+          <a:lstStyle/>
+          <a:p>
+            <a:pPr indent="0" marL="0">
+              <a:buNone/>
+            </a:pPr>
+            <a:r>
+              <a:rPr lang="en-US" sz="1200" b="1" dirty="0">
+                <a:solidFill>
+                  <a:srgbClr val="D4860B"/>
+                </a:solidFill>
+                <a:latin typeface="Arial" pitchFamily="34" charset="0"/>
+                <a:ea typeface="Arial" pitchFamily="34" charset="-122"/>
+                <a:cs typeface="Arial" pitchFamily="34" charset="-120"/>
+              </a:rPr>
+              <a:t>Visibility &amp; analytics   </a:t>
+            </a:r>
+            <a:pPr indent="0" marL="0">
+              <a:buNone/>
+            </a:pPr>
+            <a:r>
+              <a:rPr lang="en-US" sz="800" b="1" spc="150" kern="0" dirty="0">
+                <a:solidFill>
+                  <a:srgbClr val="5B6B7C"/>
+                </a:solidFill>
+                <a:latin typeface="Arial" pitchFamily="34" charset="0"/>
+                <a:ea typeface="Arial" pitchFamily="34" charset="-122"/>
+                <a:cs typeface="Arial" pitchFamily="34" charset="-120"/>
+              </a:rPr>
+              <a:t>CROSS-CUTTING</a:t>
+            </a:r>
+            <a:endParaRPr lang="en-US" sz="1200" dirty="0"/>
+          </a:p>
+        </p:txBody>
+      </p:sp>
+      <p:sp>
+        <p:nvSpPr>
+          <p:cNvPr id="15" name="Text 13"/>
+          <p:cNvSpPr/>
+          <p:nvPr/>
+        </p:nvSpPr>
+        <p:spPr>
+          <a:xfrm>
+            <a:off x="685800" y="3630168"/>
+            <a:ext cx="3675888" cy="896112"/>
+          </a:xfrm>
+          <a:prstGeom prst="rect">
+            <a:avLst/>
+          </a:prstGeom>
+          <a:noFill/>
+          <a:ln/>
+        </p:spPr>
+        <p:txBody>
+          <a:bodyPr wrap="square" lIns="0" tIns="0" rIns="0" bIns="0" rtlCol="0" anchor="ctr"/>
+          <a:lstStyle/>
+          <a:p>
+            <a:pPr indent="0" marL="0">
+              <a:buNone/>
+            </a:pPr>
+            <a:r>
+              <a:rPr lang="en-US" sz="1050" dirty="0">
+                <a:solidFill>
+                  <a:srgbClr val="1E293B"/>
+                </a:solidFill>
+                <a:latin typeface="Arial" pitchFamily="34" charset="0"/>
+                <a:ea typeface="Arial" pitchFamily="34" charset="-122"/>
+                <a:cs typeface="Arial" pitchFamily="34" charset="-120"/>
+              </a:rPr>
+              <a:t>Every DNS query, DHCP lease, and RPZ block from all four environments in one syslog stream to Sentinel/Splunk.</a:t>
+            </a:r>
+            <a:endParaRPr lang="en-US" sz="1050" dirty="0"/>
+          </a:p>
+        </p:txBody>
+      </p:sp>
+      <p:sp>
+        <p:nvSpPr>
+          <p:cNvPr id="16" name="Shape 14"/>
+          <p:cNvSpPr/>
+          <p:nvPr/>
+        </p:nvSpPr>
+        <p:spPr>
+          <a:xfrm>
+            <a:off x="4690872" y="3008376"/>
+            <a:ext cx="4041648" cy="1627632"/>
+          </a:xfrm>
+          <a:prstGeom prst="roundRect">
+            <a:avLst>
+              <a:gd name="adj" fmla="val 3933"/>
             </a:avLst>
           </a:prstGeom>
           <a:solidFill>
@@ -19395,253 +19446,66 @@
       </p:sp>
       <p:sp>
         <p:nvSpPr>
-          <p:cNvPr id="26" name="Shape 24"/>
-          <p:cNvSpPr/>
-          <p:nvPr/>
-        </p:nvSpPr>
-        <p:spPr>
-          <a:xfrm>
-            <a:off x="6931152" y="1344168"/>
-            <a:ext cx="329184" cy="329184"/>
-          </a:xfrm>
-          <a:prstGeom prst="ellipse">
-            <a:avLst/>
-          </a:prstGeom>
-          <a:solidFill>
-            <a:srgbClr val="1A9E8F"/>
-          </a:solidFill>
-          <a:ln/>
-        </p:spPr>
-      </p:sp>
-      <p:sp>
-        <p:nvSpPr>
-          <p:cNvPr id="27" name="Text 25"/>
-          <p:cNvSpPr/>
-          <p:nvPr/>
-        </p:nvSpPr>
-        <p:spPr>
-          <a:xfrm>
-            <a:off x="6931152" y="1330452"/>
-            <a:ext cx="329184" cy="329184"/>
-          </a:xfrm>
-          <a:prstGeom prst="rect">
-            <a:avLst/>
-          </a:prstGeom>
-          <a:noFill/>
-          <a:ln/>
-        </p:spPr>
-        <p:txBody>
-          <a:bodyPr wrap="square" lIns="0" tIns="0" rIns="0" bIns="0" rtlCol="0" anchor="ctr"/>
-          <a:lstStyle/>
-          <a:p>
-            <a:pPr algn="ctr" indent="0" marL="0">
-              <a:buNone/>
-            </a:pPr>
-            <a:r>
-              <a:rPr lang="en-US" sz="1300" b="1" dirty="0">
-                <a:solidFill>
-                  <a:srgbClr val="FFFFFF"/>
-                </a:solidFill>
-                <a:latin typeface="Arial" pitchFamily="34" charset="0"/>
-                <a:ea typeface="Arial" pitchFamily="34" charset="-122"/>
-                <a:cs typeface="Arial" pitchFamily="34" charset="-120"/>
-              </a:rPr>
-              <a:t>3</a:t>
-            </a:r>
-            <a:endParaRPr lang="en-US" sz="1300" dirty="0"/>
-          </a:p>
-        </p:txBody>
-      </p:sp>
-      <p:sp>
-        <p:nvSpPr>
-          <p:cNvPr id="28" name="Text 26"/>
-          <p:cNvSpPr/>
-          <p:nvPr/>
-        </p:nvSpPr>
-        <p:spPr>
-          <a:xfrm>
-            <a:off x="7333488" y="1325880"/>
-            <a:ext cx="1490472" cy="237744"/>
-          </a:xfrm>
-          <a:prstGeom prst="rect">
-            <a:avLst/>
-          </a:prstGeom>
-          <a:noFill/>
-          <a:ln/>
-        </p:spPr>
-        <p:txBody>
-          <a:bodyPr wrap="square" lIns="0" tIns="0" rIns="0" bIns="0" rtlCol="0" anchor="ctr"/>
-          <a:lstStyle/>
-          <a:p>
-            <a:pPr indent="0" marL="0">
-              <a:buNone/>
-            </a:pPr>
-            <a:r>
-              <a:rPr lang="en-US" sz="1100" b="1" dirty="0">
-                <a:solidFill>
-                  <a:srgbClr val="1E293B"/>
-                </a:solidFill>
-                <a:latin typeface="Arial" pitchFamily="34" charset="0"/>
-                <a:ea typeface="Arial" pitchFamily="34" charset="-122"/>
-                <a:cs typeface="Arial" pitchFamily="34" charset="-120"/>
-              </a:rPr>
-              <a:t>Azure Government</a:t>
-            </a:r>
-            <a:endParaRPr lang="en-US" sz="1100" dirty="0"/>
-          </a:p>
-        </p:txBody>
-      </p:sp>
-      <p:sp>
-        <p:nvSpPr>
-          <p:cNvPr id="29" name="Text 27"/>
-          <p:cNvSpPr/>
-          <p:nvPr/>
-        </p:nvSpPr>
-        <p:spPr>
-          <a:xfrm>
-            <a:off x="7333488" y="1554480"/>
-            <a:ext cx="1490472" cy="182880"/>
-          </a:xfrm>
-          <a:prstGeom prst="rect">
-            <a:avLst/>
-          </a:prstGeom>
-          <a:noFill/>
-          <a:ln/>
-        </p:spPr>
-        <p:txBody>
-          <a:bodyPr wrap="square" lIns="0" tIns="0" rIns="0" bIns="0" rtlCol="0" anchor="ctr"/>
-          <a:lstStyle/>
-          <a:p>
-            <a:pPr indent="0" marL="0">
-              <a:buNone/>
-            </a:pPr>
-            <a:r>
-              <a:rPr lang="en-US" sz="850" b="1" dirty="0">
-                <a:solidFill>
-                  <a:srgbClr val="1A9E8F"/>
-                </a:solidFill>
-                <a:latin typeface="Arial" pitchFamily="34" charset="0"/>
-                <a:ea typeface="Arial" pitchFamily="34" charset="-122"/>
-                <a:cs typeface="Arial" pitchFamily="34" charset="-120"/>
-              </a:rPr>
-              <a:t>Months 3–5</a:t>
-            </a:r>
-            <a:endParaRPr lang="en-US" sz="850" dirty="0"/>
-          </a:p>
-        </p:txBody>
-      </p:sp>
-      <p:sp>
-        <p:nvSpPr>
-          <p:cNvPr id="30" name="Text 28"/>
-          <p:cNvSpPr/>
-          <p:nvPr/>
-        </p:nvSpPr>
-        <p:spPr>
-          <a:xfrm>
-            <a:off x="6931152" y="1764792"/>
-            <a:ext cx="1865376" cy="603504"/>
-          </a:xfrm>
-          <a:prstGeom prst="rect">
-            <a:avLst/>
-          </a:prstGeom>
-          <a:noFill/>
-          <a:ln/>
-        </p:spPr>
-        <p:txBody>
-          <a:bodyPr wrap="square" lIns="0" tIns="0" rIns="0" bIns="0" rtlCol="0" anchor="ctr"/>
-          <a:lstStyle/>
-          <a:p>
-            <a:pPr indent="0" marL="0">
-              <a:buNone/>
-            </a:pPr>
-            <a:r>
-              <a:rPr lang="en-US" sz="850" dirty="0">
-                <a:solidFill>
-                  <a:srgbClr val="5B6B7C"/>
-                </a:solidFill>
-                <a:latin typeface="Arial" pitchFamily="34" charset="0"/>
-                <a:ea typeface="Arial" pitchFamily="34" charset="-122"/>
-                <a:cs typeface="Arial" pitchFamily="34" charset="-120"/>
-              </a:rPr>
-              <a:t>Grid Member in Hub VNet; Azure connector; Key Vault cert polling; M365 GCC polling live</a:t>
-            </a:r>
-            <a:endParaRPr lang="en-US" sz="850" dirty="0"/>
-          </a:p>
-        </p:txBody>
-      </p:sp>
-      <p:sp>
-        <p:nvSpPr>
-          <p:cNvPr id="31" name="Shape 29"/>
-          <p:cNvSpPr/>
-          <p:nvPr/>
-        </p:nvSpPr>
-        <p:spPr>
-          <a:xfrm>
-            <a:off x="1335024" y="2898648"/>
-            <a:ext cx="2084832" cy="1207008"/>
+          <p:cNvPr id="17" name="Shape 15"/>
+          <p:cNvSpPr/>
+          <p:nvPr/>
+        </p:nvSpPr>
+        <p:spPr>
+          <a:xfrm>
+            <a:off x="4818888" y="3136392"/>
+            <a:ext cx="3785616" cy="402336"/>
           </a:xfrm>
           <a:prstGeom prst="roundRect">
             <a:avLst>
-              <a:gd name="adj" fmla="val 5303"/>
+              <a:gd name="adj" fmla="val 11364"/>
             </a:avLst>
           </a:prstGeom>
           <a:solidFill>
-            <a:srgbClr val="F3F5F8"/>
+            <a:srgbClr val="F9EAE8"/>
           </a:solidFill>
-          <a:ln w="9525">
-            <a:solidFill>
-              <a:srgbClr val="C9D4E0"/>
-            </a:solidFill>
-            <a:prstDash val="solid"/>
-          </a:ln>
-        </p:spPr>
-      </p:sp>
-      <p:sp>
-        <p:nvSpPr>
-          <p:cNvPr id="32" name="Shape 30"/>
-          <p:cNvSpPr/>
-          <p:nvPr/>
-        </p:nvSpPr>
-        <p:spPr>
-          <a:xfrm>
-            <a:off x="1444752" y="3008376"/>
-            <a:ext cx="329184" cy="329184"/>
-          </a:xfrm>
-          <a:prstGeom prst="ellipse">
-            <a:avLst/>
-          </a:prstGeom>
-          <a:solidFill>
-            <a:srgbClr val="C9D4E0"/>
-          </a:solidFill>
-          <a:ln/>
-        </p:spPr>
-      </p:sp>
-      <p:sp>
-        <p:nvSpPr>
-          <p:cNvPr id="33" name="Text 31"/>
-          <p:cNvSpPr/>
-          <p:nvPr/>
-        </p:nvSpPr>
-        <p:spPr>
-          <a:xfrm>
-            <a:off x="1444752" y="2994660"/>
-            <a:ext cx="329184" cy="329184"/>
-          </a:xfrm>
-          <a:prstGeom prst="rect">
-            <a:avLst/>
-          </a:prstGeom>
-          <a:noFill/>
-          <a:ln/>
-        </p:spPr>
-        <p:txBody>
-          <a:bodyPr wrap="square" lIns="0" tIns="0" rIns="0" bIns="0" rtlCol="0" anchor="ctr"/>
-          <a:lstStyle/>
-          <a:p>
-            <a:pPr algn="ctr" indent="0" marL="0">
-              <a:buNone/>
-            </a:pPr>
-            <a:r>
-              <a:rPr lang="en-US" sz="1300" b="1" dirty="0">
+          <a:ln/>
+        </p:spPr>
+      </p:sp>
+      <p:sp>
+        <p:nvSpPr>
+          <p:cNvPr id="18" name="Text 16"/>
+          <p:cNvSpPr/>
+          <p:nvPr/>
+        </p:nvSpPr>
+        <p:spPr>
+          <a:xfrm>
+            <a:off x="4946904" y="3136392"/>
+            <a:ext cx="3584448" cy="402336"/>
+          </a:xfrm>
+          <a:prstGeom prst="rect">
+            <a:avLst/>
+          </a:prstGeom>
+          <a:noFill/>
+          <a:ln/>
+        </p:spPr>
+        <p:txBody>
+          <a:bodyPr wrap="square" lIns="0" tIns="0" rIns="0" bIns="0" rtlCol="0" anchor="ctr"/>
+          <a:lstStyle/>
+          <a:p>
+            <a:pPr indent="0" marL="0">
+              <a:buNone/>
+            </a:pPr>
+            <a:r>
+              <a:rPr lang="en-US" sz="1200" b="1" dirty="0">
+                <a:solidFill>
+                  <a:srgbClr val="C0392B"/>
+                </a:solidFill>
+                <a:latin typeface="Arial" pitchFamily="34" charset="0"/>
+                <a:ea typeface="Arial" pitchFamily="34" charset="-122"/>
+                <a:cs typeface="Arial" pitchFamily="34" charset="-120"/>
+              </a:rPr>
+              <a:t>Automation &amp; orchestration   </a:t>
+            </a:r>
+            <a:pPr indent="0" marL="0">
+              <a:buNone/>
+            </a:pPr>
+            <a:r>
+              <a:rPr lang="en-US" sz="800" b="1" spc="150" kern="0" dirty="0">
                 <a:solidFill>
                   <a:srgbClr val="5B6B7C"/>
                 </a:solidFill>
@@ -19649,617 +19513,46 @@
                 <a:ea typeface="Arial" pitchFamily="34" charset="-122"/>
                 <a:cs typeface="Arial" pitchFamily="34" charset="-120"/>
               </a:rPr>
-              <a:t>4</a:t>
-            </a:r>
-            <a:endParaRPr lang="en-US" sz="1300" dirty="0"/>
-          </a:p>
-        </p:txBody>
-      </p:sp>
-      <p:sp>
-        <p:nvSpPr>
-          <p:cNvPr id="34" name="Text 32"/>
-          <p:cNvSpPr/>
-          <p:nvPr/>
-        </p:nvSpPr>
-        <p:spPr>
-          <a:xfrm>
-            <a:off x="1847088" y="2990088"/>
-            <a:ext cx="1490472" cy="237744"/>
-          </a:xfrm>
-          <a:prstGeom prst="rect">
-            <a:avLst/>
-          </a:prstGeom>
-          <a:noFill/>
-          <a:ln/>
-        </p:spPr>
-        <p:txBody>
-          <a:bodyPr wrap="square" lIns="0" tIns="0" rIns="0" bIns="0" rtlCol="0" anchor="ctr"/>
-          <a:lstStyle/>
-          <a:p>
-            <a:pPr indent="0" marL="0">
-              <a:buNone/>
-            </a:pPr>
-            <a:r>
-              <a:rPr lang="en-US" sz="1100" b="1" dirty="0">
-                <a:solidFill>
-                  <a:srgbClr val="5B6B7C"/>
-                </a:solidFill>
-                <a:latin typeface="Arial" pitchFamily="34" charset="0"/>
-                <a:ea typeface="Arial" pitchFamily="34" charset="-122"/>
-                <a:cs typeface="Arial" pitchFamily="34" charset="-120"/>
-              </a:rPr>
-              <a:t>AWS GovCloud</a:t>
-            </a:r>
-            <a:endParaRPr lang="en-US" sz="1100" dirty="0"/>
-          </a:p>
-        </p:txBody>
-      </p:sp>
-      <p:sp>
-        <p:nvSpPr>
-          <p:cNvPr id="35" name="Text 33"/>
-          <p:cNvSpPr/>
-          <p:nvPr/>
-        </p:nvSpPr>
-        <p:spPr>
-          <a:xfrm>
-            <a:off x="1847088" y="3218688"/>
-            <a:ext cx="1490472" cy="182880"/>
-          </a:xfrm>
-          <a:prstGeom prst="rect">
-            <a:avLst/>
-          </a:prstGeom>
-          <a:noFill/>
-          <a:ln/>
-        </p:spPr>
-        <p:txBody>
-          <a:bodyPr wrap="square" lIns="0" tIns="0" rIns="0" bIns="0" rtlCol="0" anchor="ctr"/>
-          <a:lstStyle/>
-          <a:p>
-            <a:pPr indent="0" marL="0">
-              <a:buNone/>
-            </a:pPr>
-            <a:r>
-              <a:rPr lang="en-US" sz="850" b="1" dirty="0">
-                <a:solidFill>
-                  <a:srgbClr val="5B6B7C"/>
-                </a:solidFill>
-                <a:latin typeface="Arial" pitchFamily="34" charset="0"/>
-                <a:ea typeface="Arial" pitchFamily="34" charset="-122"/>
-                <a:cs typeface="Arial" pitchFamily="34" charset="-120"/>
-              </a:rPr>
-              <a:t>Months 5–7</a:t>
-            </a:r>
-            <a:endParaRPr lang="en-US" sz="850" dirty="0"/>
-          </a:p>
-        </p:txBody>
-      </p:sp>
-      <p:sp>
-        <p:nvSpPr>
-          <p:cNvPr id="36" name="Text 34"/>
-          <p:cNvSpPr/>
-          <p:nvPr/>
-        </p:nvSpPr>
-        <p:spPr>
-          <a:xfrm>
-            <a:off x="1444752" y="3429000"/>
-            <a:ext cx="1865376" cy="603504"/>
-          </a:xfrm>
-          <a:prstGeom prst="rect">
-            <a:avLst/>
-          </a:prstGeom>
-          <a:noFill/>
-          <a:ln/>
-        </p:spPr>
-        <p:txBody>
-          <a:bodyPr wrap="square" lIns="0" tIns="0" rIns="0" bIns="0" rtlCol="0" anchor="ctr"/>
-          <a:lstStyle/>
-          <a:p>
-            <a:pPr indent="0" marL="0">
-              <a:buNone/>
-            </a:pPr>
-            <a:r>
-              <a:rPr lang="en-US" sz="850" dirty="0">
-                <a:solidFill>
-                  <a:srgbClr val="5B6B7C"/>
-                </a:solidFill>
-                <a:latin typeface="Arial" pitchFamily="34" charset="0"/>
-                <a:ea typeface="Arial" pitchFamily="34" charset="-122"/>
-                <a:cs typeface="Arial" pitchFamily="34" charset="-120"/>
-              </a:rPr>
-              <a:t>…</a:t>
-            </a:r>
-            <a:endParaRPr lang="en-US" sz="850" dirty="0"/>
-          </a:p>
-        </p:txBody>
-      </p:sp>
-      <p:sp>
-        <p:nvSpPr>
-          <p:cNvPr id="37" name="Shape 35"/>
-          <p:cNvSpPr/>
-          <p:nvPr/>
-        </p:nvSpPr>
-        <p:spPr>
-          <a:xfrm>
-            <a:off x="3438144" y="3502152"/>
-            <a:ext cx="73152" cy="0"/>
-          </a:xfrm>
-          <a:prstGeom prst="line">
-            <a:avLst/>
-          </a:prstGeom>
-          <a:noFill/>
-          <a:ln w="25400">
-            <a:solidFill>
-              <a:srgbClr val="C9D4E0"/>
-            </a:solidFill>
-            <a:prstDash val="solid"/>
-            <a:tailEnd type="triangle"/>
-          </a:ln>
-        </p:spPr>
-      </p:sp>
-      <p:sp>
-        <p:nvSpPr>
-          <p:cNvPr id="38" name="Shape 36"/>
-          <p:cNvSpPr/>
-          <p:nvPr/>
-        </p:nvSpPr>
-        <p:spPr>
-          <a:xfrm>
-            <a:off x="3529584" y="2898648"/>
-            <a:ext cx="2084832" cy="1207008"/>
-          </a:xfrm>
-          <a:prstGeom prst="roundRect">
-            <a:avLst>
-              <a:gd name="adj" fmla="val 5303"/>
-            </a:avLst>
-          </a:prstGeom>
-          <a:solidFill>
-            <a:srgbClr val="F3F5F8"/>
-          </a:solidFill>
-          <a:ln w="9525">
-            <a:solidFill>
-              <a:srgbClr val="C9D4E0"/>
-            </a:solidFill>
-            <a:prstDash val="solid"/>
-          </a:ln>
-        </p:spPr>
-      </p:sp>
-      <p:sp>
-        <p:nvSpPr>
-          <p:cNvPr id="39" name="Shape 37"/>
-          <p:cNvSpPr/>
-          <p:nvPr/>
-        </p:nvSpPr>
-        <p:spPr>
-          <a:xfrm>
-            <a:off x="3639312" y="3008376"/>
-            <a:ext cx="329184" cy="329184"/>
-          </a:xfrm>
-          <a:prstGeom prst="ellipse">
-            <a:avLst/>
-          </a:prstGeom>
-          <a:solidFill>
-            <a:srgbClr val="C9D4E0"/>
-          </a:solidFill>
-          <a:ln/>
-        </p:spPr>
-      </p:sp>
-      <p:sp>
-        <p:nvSpPr>
-          <p:cNvPr id="40" name="Text 38"/>
-          <p:cNvSpPr/>
-          <p:nvPr/>
-        </p:nvSpPr>
-        <p:spPr>
-          <a:xfrm>
-            <a:off x="3639312" y="2994660"/>
-            <a:ext cx="329184" cy="329184"/>
-          </a:xfrm>
-          <a:prstGeom prst="rect">
-            <a:avLst/>
-          </a:prstGeom>
-          <a:noFill/>
-          <a:ln/>
-        </p:spPr>
-        <p:txBody>
-          <a:bodyPr wrap="square" lIns="0" tIns="0" rIns="0" bIns="0" rtlCol="0" anchor="ctr"/>
-          <a:lstStyle/>
-          <a:p>
-            <a:pPr algn="ctr" indent="0" marL="0">
-              <a:buNone/>
-            </a:pPr>
-            <a:r>
-              <a:rPr lang="en-US" sz="1300" b="1" dirty="0">
-                <a:solidFill>
-                  <a:srgbClr val="5B6B7C"/>
-                </a:solidFill>
-                <a:latin typeface="Arial" pitchFamily="34" charset="0"/>
-                <a:ea typeface="Arial" pitchFamily="34" charset="-122"/>
-                <a:cs typeface="Arial" pitchFamily="34" charset="-120"/>
-              </a:rPr>
-              <a:t>5</a:t>
-            </a:r>
-            <a:endParaRPr lang="en-US" sz="1300" dirty="0"/>
-          </a:p>
-        </p:txBody>
-      </p:sp>
-      <p:sp>
-        <p:nvSpPr>
-          <p:cNvPr id="41" name="Text 39"/>
-          <p:cNvSpPr/>
-          <p:nvPr/>
-        </p:nvSpPr>
-        <p:spPr>
-          <a:xfrm>
-            <a:off x="4041648" y="2990088"/>
-            <a:ext cx="1490472" cy="237744"/>
-          </a:xfrm>
-          <a:prstGeom prst="rect">
-            <a:avLst/>
-          </a:prstGeom>
-          <a:noFill/>
-          <a:ln/>
-        </p:spPr>
-        <p:txBody>
-          <a:bodyPr wrap="square" lIns="0" tIns="0" rIns="0" bIns="0" rtlCol="0" anchor="ctr"/>
-          <a:lstStyle/>
-          <a:p>
-            <a:pPr indent="0" marL="0">
-              <a:buNone/>
-            </a:pPr>
-            <a:r>
-              <a:rPr lang="en-US" sz="1100" b="1" dirty="0">
-                <a:solidFill>
-                  <a:srgbClr val="5B6B7C"/>
-                </a:solidFill>
-                <a:latin typeface="Arial" pitchFamily="34" charset="0"/>
-                <a:ea typeface="Arial" pitchFamily="34" charset="-122"/>
-                <a:cs typeface="Arial" pitchFamily="34" charset="-120"/>
-              </a:rPr>
-              <a:t>OCI / OPM HRIT</a:t>
-            </a:r>
-            <a:endParaRPr lang="en-US" sz="1100" dirty="0"/>
-          </a:p>
-        </p:txBody>
-      </p:sp>
-      <p:sp>
-        <p:nvSpPr>
-          <p:cNvPr id="42" name="Text 40"/>
-          <p:cNvSpPr/>
-          <p:nvPr/>
-        </p:nvSpPr>
-        <p:spPr>
-          <a:xfrm>
-            <a:off x="4041648" y="3218688"/>
-            <a:ext cx="1490472" cy="182880"/>
-          </a:xfrm>
-          <a:prstGeom prst="rect">
-            <a:avLst/>
-          </a:prstGeom>
-          <a:noFill/>
-          <a:ln/>
-        </p:spPr>
-        <p:txBody>
-          <a:bodyPr wrap="square" lIns="0" tIns="0" rIns="0" bIns="0" rtlCol="0" anchor="ctr"/>
-          <a:lstStyle/>
-          <a:p>
-            <a:pPr indent="0" marL="0">
-              <a:buNone/>
-            </a:pPr>
-            <a:r>
-              <a:rPr lang="en-US" sz="850" b="1" dirty="0">
-                <a:solidFill>
-                  <a:srgbClr val="5B6B7C"/>
-                </a:solidFill>
-                <a:latin typeface="Arial" pitchFamily="34" charset="0"/>
-                <a:ea typeface="Arial" pitchFamily="34" charset="-122"/>
-                <a:cs typeface="Arial" pitchFamily="34" charset="-120"/>
-              </a:rPr>
-              <a:t>Months 7–9</a:t>
-            </a:r>
-            <a:endParaRPr lang="en-US" sz="850" dirty="0"/>
-          </a:p>
-        </p:txBody>
-      </p:sp>
-      <p:sp>
-        <p:nvSpPr>
-          <p:cNvPr id="43" name="Text 41"/>
-          <p:cNvSpPr/>
-          <p:nvPr/>
-        </p:nvSpPr>
-        <p:spPr>
-          <a:xfrm>
-            <a:off x="3639312" y="3429000"/>
-            <a:ext cx="1865376" cy="603504"/>
-          </a:xfrm>
-          <a:prstGeom prst="rect">
-            <a:avLst/>
-          </a:prstGeom>
-          <a:noFill/>
-          <a:ln/>
-        </p:spPr>
-        <p:txBody>
-          <a:bodyPr wrap="square" lIns="0" tIns="0" rIns="0" bIns="0" rtlCol="0" anchor="ctr"/>
-          <a:lstStyle/>
-          <a:p>
-            <a:pPr indent="0" marL="0">
-              <a:buNone/>
-            </a:pPr>
-            <a:r>
-              <a:rPr lang="en-US" sz="850" dirty="0">
-                <a:solidFill>
-                  <a:srgbClr val="5B6B7C"/>
-                </a:solidFill>
-                <a:latin typeface="Arial" pitchFamily="34" charset="0"/>
-                <a:ea typeface="Arial" pitchFamily="34" charset="-122"/>
-                <a:cs typeface="Arial" pitchFamily="34" charset="-120"/>
-              </a:rPr>
-              <a:t>…</a:t>
-            </a:r>
-            <a:endParaRPr lang="en-US" sz="850" dirty="0"/>
-          </a:p>
-        </p:txBody>
-      </p:sp>
-      <p:sp>
-        <p:nvSpPr>
-          <p:cNvPr id="44" name="Shape 42"/>
-          <p:cNvSpPr/>
-          <p:nvPr/>
-        </p:nvSpPr>
-        <p:spPr>
-          <a:xfrm>
-            <a:off x="5632704" y="3502152"/>
-            <a:ext cx="73152" cy="0"/>
-          </a:xfrm>
-          <a:prstGeom prst="line">
-            <a:avLst/>
-          </a:prstGeom>
-          <a:noFill/>
-          <a:ln w="25400">
-            <a:solidFill>
-              <a:srgbClr val="C9D4E0"/>
-            </a:solidFill>
-            <a:prstDash val="solid"/>
-            <a:tailEnd type="triangle"/>
-          </a:ln>
-        </p:spPr>
-      </p:sp>
-      <p:sp>
-        <p:nvSpPr>
-          <p:cNvPr id="45" name="Shape 43"/>
-          <p:cNvSpPr/>
-          <p:nvPr/>
-        </p:nvSpPr>
-        <p:spPr>
-          <a:xfrm>
-            <a:off x="5724144" y="2898648"/>
-            <a:ext cx="2084832" cy="1207008"/>
-          </a:xfrm>
-          <a:prstGeom prst="roundRect">
-            <a:avLst>
-              <a:gd name="adj" fmla="val 5303"/>
-            </a:avLst>
-          </a:prstGeom>
-          <a:solidFill>
-            <a:srgbClr val="F3F5F8"/>
-          </a:solidFill>
-          <a:ln w="9525">
-            <a:solidFill>
-              <a:srgbClr val="C9D4E0"/>
-            </a:solidFill>
-            <a:prstDash val="solid"/>
-          </a:ln>
-        </p:spPr>
-      </p:sp>
-      <p:sp>
-        <p:nvSpPr>
-          <p:cNvPr id="46" name="Shape 44"/>
-          <p:cNvSpPr/>
-          <p:nvPr/>
-        </p:nvSpPr>
-        <p:spPr>
-          <a:xfrm>
-            <a:off x="5833872" y="3008376"/>
-            <a:ext cx="329184" cy="329184"/>
-          </a:xfrm>
-          <a:prstGeom prst="ellipse">
-            <a:avLst/>
-          </a:prstGeom>
-          <a:solidFill>
-            <a:srgbClr val="C9D4E0"/>
-          </a:solidFill>
-          <a:ln/>
-        </p:spPr>
-      </p:sp>
-      <p:sp>
-        <p:nvSpPr>
-          <p:cNvPr id="47" name="Text 45"/>
-          <p:cNvSpPr/>
-          <p:nvPr/>
-        </p:nvSpPr>
-        <p:spPr>
-          <a:xfrm>
-            <a:off x="5833872" y="2994660"/>
-            <a:ext cx="329184" cy="329184"/>
-          </a:xfrm>
-          <a:prstGeom prst="rect">
-            <a:avLst/>
-          </a:prstGeom>
-          <a:noFill/>
-          <a:ln/>
-        </p:spPr>
-        <p:txBody>
-          <a:bodyPr wrap="square" lIns="0" tIns="0" rIns="0" bIns="0" rtlCol="0" anchor="ctr"/>
-          <a:lstStyle/>
-          <a:p>
-            <a:pPr algn="ctr" indent="0" marL="0">
-              <a:buNone/>
-            </a:pPr>
-            <a:r>
-              <a:rPr lang="en-US" sz="1300" b="1" dirty="0">
-                <a:solidFill>
-                  <a:srgbClr val="5B6B7C"/>
-                </a:solidFill>
-                <a:latin typeface="Arial" pitchFamily="34" charset="0"/>
-                <a:ea typeface="Arial" pitchFamily="34" charset="-122"/>
-                <a:cs typeface="Arial" pitchFamily="34" charset="-120"/>
-              </a:rPr>
-              <a:t>6</a:t>
-            </a:r>
-            <a:endParaRPr lang="en-US" sz="1300" dirty="0"/>
-          </a:p>
-        </p:txBody>
-      </p:sp>
-      <p:sp>
-        <p:nvSpPr>
-          <p:cNvPr id="48" name="Text 46"/>
-          <p:cNvSpPr/>
-          <p:nvPr/>
-        </p:nvSpPr>
-        <p:spPr>
-          <a:xfrm>
-            <a:off x="6236208" y="2990088"/>
-            <a:ext cx="1490472" cy="237744"/>
-          </a:xfrm>
-          <a:prstGeom prst="rect">
-            <a:avLst/>
-          </a:prstGeom>
-          <a:noFill/>
-          <a:ln/>
-        </p:spPr>
-        <p:txBody>
-          <a:bodyPr wrap="square" lIns="0" tIns="0" rIns="0" bIns="0" rtlCol="0" anchor="ctr"/>
-          <a:lstStyle/>
-          <a:p>
-            <a:pPr indent="0" marL="0">
-              <a:buNone/>
-            </a:pPr>
-            <a:r>
-              <a:rPr lang="en-US" sz="1100" b="1" dirty="0">
-                <a:solidFill>
-                  <a:srgbClr val="5B6B7C"/>
-                </a:solidFill>
-                <a:latin typeface="Arial" pitchFamily="34" charset="0"/>
-                <a:ea typeface="Arial" pitchFamily="34" charset="-122"/>
-                <a:cs typeface="Arial" pitchFamily="34" charset="-120"/>
-              </a:rPr>
-              <a:t>FedRAMP ConMon</a:t>
-            </a:r>
-            <a:endParaRPr lang="en-US" sz="1100" dirty="0"/>
-          </a:p>
-        </p:txBody>
-      </p:sp>
-      <p:sp>
-        <p:nvSpPr>
-          <p:cNvPr id="49" name="Text 47"/>
-          <p:cNvSpPr/>
-          <p:nvPr/>
-        </p:nvSpPr>
-        <p:spPr>
-          <a:xfrm>
-            <a:off x="6236208" y="3218688"/>
-            <a:ext cx="1490472" cy="182880"/>
-          </a:xfrm>
-          <a:prstGeom prst="rect">
-            <a:avLst/>
-          </a:prstGeom>
-          <a:noFill/>
-          <a:ln/>
-        </p:spPr>
-        <p:txBody>
-          <a:bodyPr wrap="square" lIns="0" tIns="0" rIns="0" bIns="0" rtlCol="0" anchor="ctr"/>
-          <a:lstStyle/>
-          <a:p>
-            <a:pPr indent="0" marL="0">
-              <a:buNone/>
-            </a:pPr>
-            <a:r>
-              <a:rPr lang="en-US" sz="850" b="1" dirty="0">
-                <a:solidFill>
-                  <a:srgbClr val="5B6B7C"/>
-                </a:solidFill>
-                <a:latin typeface="Arial" pitchFamily="34" charset="0"/>
-                <a:ea typeface="Arial" pitchFamily="34" charset="-122"/>
-                <a:cs typeface="Arial" pitchFamily="34" charset="-120"/>
-              </a:rPr>
-              <a:t>Months 9–12</a:t>
-            </a:r>
-            <a:endParaRPr lang="en-US" sz="850" dirty="0"/>
-          </a:p>
-        </p:txBody>
-      </p:sp>
-      <p:sp>
-        <p:nvSpPr>
-          <p:cNvPr id="50" name="Text 48"/>
-          <p:cNvSpPr/>
-          <p:nvPr/>
-        </p:nvSpPr>
-        <p:spPr>
-          <a:xfrm>
-            <a:off x="5833872" y="3429000"/>
-            <a:ext cx="1865376" cy="603504"/>
-          </a:xfrm>
-          <a:prstGeom prst="rect">
-            <a:avLst/>
-          </a:prstGeom>
-          <a:noFill/>
-          <a:ln/>
-        </p:spPr>
-        <p:txBody>
-          <a:bodyPr wrap="square" lIns="0" tIns="0" rIns="0" bIns="0" rtlCol="0" anchor="ctr"/>
-          <a:lstStyle/>
-          <a:p>
-            <a:pPr indent="0" marL="0">
-              <a:buNone/>
-            </a:pPr>
-            <a:r>
-              <a:rPr lang="en-US" sz="850" dirty="0">
-                <a:solidFill>
-                  <a:srgbClr val="5B6B7C"/>
-                </a:solidFill>
-                <a:latin typeface="Arial" pitchFamily="34" charset="0"/>
-                <a:ea typeface="Arial" pitchFamily="34" charset="-122"/>
-                <a:cs typeface="Arial" pitchFamily="34" charset="-120"/>
-              </a:rPr>
-              <a:t>…</a:t>
-            </a:r>
-            <a:endParaRPr lang="en-US" sz="850" dirty="0"/>
-          </a:p>
-        </p:txBody>
-      </p:sp>
-      <p:sp>
-        <p:nvSpPr>
-          <p:cNvPr id="51" name="Text 49"/>
-          <p:cNvSpPr/>
-          <p:nvPr/>
-        </p:nvSpPr>
-        <p:spPr>
-          <a:xfrm>
-            <a:off x="502920" y="4526280"/>
-            <a:ext cx="8229600" cy="320040"/>
-          </a:xfrm>
-          <a:prstGeom prst="rect">
-            <a:avLst/>
-          </a:prstGeom>
-          <a:noFill/>
-          <a:ln/>
-        </p:spPr>
-        <p:txBody>
-          <a:bodyPr wrap="square" lIns="0" tIns="0" rIns="0" bIns="0" rtlCol="0" anchor="ctr"/>
-          <a:lstStyle/>
-          <a:p>
-            <a:pPr algn="ctr" indent="0" marL="0">
-              <a:buNone/>
-            </a:pPr>
-            <a:r>
-              <a:rPr lang="en-US" sz="1050" i="1" dirty="0">
-                <a:solidFill>
-                  <a:srgbClr val="5B6B7C"/>
-                </a:solidFill>
-                <a:latin typeface="Arial" pitchFamily="34" charset="0"/>
-                <a:ea typeface="Arial" pitchFamily="34" charset="-122"/>
-                <a:cs typeface="Arial" pitchFamily="34" charset="-120"/>
-              </a:rPr>
-              <a:t>Phase 1 alone closes the SC-20 DNSSEC gap and produces the first unified CM-8 inventory.</a:t>
+              <a:t>CROSS-CUTTING</a:t>
+            </a:r>
+            <a:endParaRPr lang="en-US" sz="1200" dirty="0"/>
+          </a:p>
+        </p:txBody>
+      </p:sp>
+      <p:sp>
+        <p:nvSpPr>
+          <p:cNvPr id="19" name="Text 17"/>
+          <p:cNvSpPr/>
+          <p:nvPr/>
+        </p:nvSpPr>
+        <p:spPr>
+          <a:xfrm>
+            <a:off x="4873752" y="3630168"/>
+            <a:ext cx="3675888" cy="896112"/>
+          </a:xfrm>
+          <a:prstGeom prst="rect">
+            <a:avLst/>
+          </a:prstGeom>
+          <a:noFill/>
+          <a:ln/>
+        </p:spPr>
+        <p:txBody>
+          <a:bodyPr wrap="square" lIns="0" tIns="0" rIns="0" bIns="0" rtlCol="0" anchor="ctr"/>
+          <a:lstStyle/>
+          <a:p>
+            <a:pPr indent="0" marL="0">
+              <a:buNone/>
+            </a:pPr>
+            <a:r>
+              <a:rPr lang="en-US" sz="1050" dirty="0">
+                <a:solidFill>
+                  <a:srgbClr val="1E293B"/>
+                </a:solidFill>
+                <a:latin typeface="Arial" pitchFamily="34" charset="0"/>
+                <a:ea typeface="Arial" pitchFamily="34" charset="-122"/>
+                <a:cs typeface="Arial" pitchFamily="34" charset="-120"/>
+              </a:rPr>
+              <a:t>IP → DNS → certificate as one atomic IaC pipeline; M365 GCC endpoint changes propagate to four enforcement layers without a human.</a:t>
             </a:r>
             <a:endParaRPr lang="en-US" sz="1050" dirty="0"/>
           </a:p>
@@ -20330,7 +19623,7 @@
                 <a:ea typeface="Arial" pitchFamily="34" charset="-122"/>
                 <a:cs typeface="Arial" pitchFamily="34" charset="-120"/>
               </a:rPr>
-              <a:t>RECOMMENDED BUILDOUT — STEP 2 OF 2</a:t>
+              <a:t>RECOMMENDED BUILDOUT — STEP 1 OF 2</a:t>
             </a:r>
             <a:endParaRPr lang="en-US" sz="1100" dirty="0"/>
           </a:p>
@@ -20369,7 +19662,7 @@
                 <a:ea typeface="Arial" pitchFamily="34" charset="-122"/>
                 <a:cs typeface="Arial" pitchFamily="34" charset="-120"/>
               </a:rPr>
-              <a:t>Extend to AWS, OCI, and continuous monitoring (months 5–12)</a:t>
+              <a:t>Foundation first: on-prem, VMware, Azure (months 1–5)</a:t>
             </a:r>
             <a:endParaRPr lang="en-US" sz="2600" dirty="0"/>
           </a:p>
@@ -21304,7 +20597,7 @@
             </a:avLst>
           </a:prstGeom>
           <a:solidFill>
-            <a:srgbClr val="FFFFFF"/>
+            <a:srgbClr val="F3F5F8"/>
           </a:solidFill>
           <a:ln w="9525">
             <a:solidFill>
@@ -21312,13 +20605,6 @@
             </a:solidFill>
             <a:prstDash val="solid"/>
           </a:ln>
-          <a:effectLst>
-            <a:outerShdw sx="100000" sy="100000" kx="0" ky="0" algn="bl" rotWithShape="0" blurRad="88900" dist="25400" dir="2700000">
-              <a:srgbClr val="000000">
-                <a:alpha val="14000"/>
-              </a:srgbClr>
-            </a:outerShdw>
-          </a:effectLst>
         </p:spPr>
       </p:sp>
       <p:sp>
@@ -21336,7 +20622,7 @@
             <a:avLst/>
           </a:prstGeom>
           <a:solidFill>
-            <a:srgbClr val="D4860B"/>
+            <a:srgbClr val="C9D4E0"/>
           </a:solidFill>
           <a:ln/>
         </p:spPr>
@@ -21368,7 +20654,7 @@
             <a:r>
               <a:rPr lang="en-US" sz="1300" b="1" dirty="0">
                 <a:solidFill>
-                  <a:srgbClr val="FFFFFF"/>
+                  <a:srgbClr val="5B6B7C"/>
                 </a:solidFill>
                 <a:latin typeface="Arial" pitchFamily="34" charset="0"/>
                 <a:ea typeface="Arial" pitchFamily="34" charset="-122"/>
@@ -21407,7 +20693,7 @@
             <a:r>
               <a:rPr lang="en-US" sz="1100" b="1" dirty="0">
                 <a:solidFill>
-                  <a:srgbClr val="1E293B"/>
+                  <a:srgbClr val="5B6B7C"/>
                 </a:solidFill>
                 <a:latin typeface="Arial" pitchFamily="34" charset="0"/>
                 <a:ea typeface="Arial" pitchFamily="34" charset="-122"/>
@@ -21446,7 +20732,7 @@
             <a:r>
               <a:rPr lang="en-US" sz="850" b="1" dirty="0">
                 <a:solidFill>
-                  <a:srgbClr val="D4860B"/>
+                  <a:srgbClr val="5B6B7C"/>
                 </a:solidFill>
                 <a:latin typeface="Arial" pitchFamily="34" charset="0"/>
                 <a:ea typeface="Arial" pitchFamily="34" charset="-122"/>
@@ -21491,7 +20777,7 @@
                 <a:ea typeface="Arial" pitchFamily="34" charset="-122"/>
                 <a:cs typeface="Arial" pitchFamily="34" charset="-120"/>
               </a:rPr>
-              <a:t>Grid Member in Transit VPC; DHCP Options Sets; ACM CNAME automation; Security Hub</a:t>
+              <a:t>…</a:t>
             </a:r>
             <a:endParaRPr lang="en-US" sz="850" dirty="0"/>
           </a:p>
@@ -21530,6 +20816,585 @@
         <p:spPr>
           <a:xfrm>
             <a:off x="3529584" y="2898648"/>
+            <a:ext cx="2084832" cy="1207008"/>
+          </a:xfrm>
+          <a:prstGeom prst="roundRect">
+            <a:avLst>
+              <a:gd name="adj" fmla="val 5303"/>
+            </a:avLst>
+          </a:prstGeom>
+          <a:solidFill>
+            <a:srgbClr val="F3F5F8"/>
+          </a:solidFill>
+          <a:ln w="9525">
+            <a:solidFill>
+              <a:srgbClr val="C9D4E0"/>
+            </a:solidFill>
+            <a:prstDash val="solid"/>
+          </a:ln>
+        </p:spPr>
+      </p:sp>
+      <p:sp>
+        <p:nvSpPr>
+          <p:cNvPr id="39" name="Shape 37"/>
+          <p:cNvSpPr/>
+          <p:nvPr/>
+        </p:nvSpPr>
+        <p:spPr>
+          <a:xfrm>
+            <a:off x="3639312" y="3008376"/>
+            <a:ext cx="329184" cy="329184"/>
+          </a:xfrm>
+          <a:prstGeom prst="ellipse">
+            <a:avLst/>
+          </a:prstGeom>
+          <a:solidFill>
+            <a:srgbClr val="C9D4E0"/>
+          </a:solidFill>
+          <a:ln/>
+        </p:spPr>
+      </p:sp>
+      <p:sp>
+        <p:nvSpPr>
+          <p:cNvPr id="40" name="Text 38"/>
+          <p:cNvSpPr/>
+          <p:nvPr/>
+        </p:nvSpPr>
+        <p:spPr>
+          <a:xfrm>
+            <a:off x="3639312" y="2994660"/>
+            <a:ext cx="329184" cy="329184"/>
+          </a:xfrm>
+          <a:prstGeom prst="rect">
+            <a:avLst/>
+          </a:prstGeom>
+          <a:noFill/>
+          <a:ln/>
+        </p:spPr>
+        <p:txBody>
+          <a:bodyPr wrap="square" lIns="0" tIns="0" rIns="0" bIns="0" rtlCol="0" anchor="ctr"/>
+          <a:lstStyle/>
+          <a:p>
+            <a:pPr algn="ctr" indent="0" marL="0">
+              <a:buNone/>
+            </a:pPr>
+            <a:r>
+              <a:rPr lang="en-US" sz="1300" b="1" dirty="0">
+                <a:solidFill>
+                  <a:srgbClr val="5B6B7C"/>
+                </a:solidFill>
+                <a:latin typeface="Arial" pitchFamily="34" charset="0"/>
+                <a:ea typeface="Arial" pitchFamily="34" charset="-122"/>
+                <a:cs typeface="Arial" pitchFamily="34" charset="-120"/>
+              </a:rPr>
+              <a:t>5</a:t>
+            </a:r>
+            <a:endParaRPr lang="en-US" sz="1300" dirty="0"/>
+          </a:p>
+        </p:txBody>
+      </p:sp>
+      <p:sp>
+        <p:nvSpPr>
+          <p:cNvPr id="41" name="Text 39"/>
+          <p:cNvSpPr/>
+          <p:nvPr/>
+        </p:nvSpPr>
+        <p:spPr>
+          <a:xfrm>
+            <a:off x="4041648" y="2990088"/>
+            <a:ext cx="1490472" cy="237744"/>
+          </a:xfrm>
+          <a:prstGeom prst="rect">
+            <a:avLst/>
+          </a:prstGeom>
+          <a:noFill/>
+          <a:ln/>
+        </p:spPr>
+        <p:txBody>
+          <a:bodyPr wrap="square" lIns="0" tIns="0" rIns="0" bIns="0" rtlCol="0" anchor="ctr"/>
+          <a:lstStyle/>
+          <a:p>
+            <a:pPr indent="0" marL="0">
+              <a:buNone/>
+            </a:pPr>
+            <a:r>
+              <a:rPr lang="en-US" sz="1100" b="1" dirty="0">
+                <a:solidFill>
+                  <a:srgbClr val="5B6B7C"/>
+                </a:solidFill>
+                <a:latin typeface="Arial" pitchFamily="34" charset="0"/>
+                <a:ea typeface="Arial" pitchFamily="34" charset="-122"/>
+                <a:cs typeface="Arial" pitchFamily="34" charset="-120"/>
+              </a:rPr>
+              <a:t>OCI / OPM HRIT</a:t>
+            </a:r>
+            <a:endParaRPr lang="en-US" sz="1100" dirty="0"/>
+          </a:p>
+        </p:txBody>
+      </p:sp>
+      <p:sp>
+        <p:nvSpPr>
+          <p:cNvPr id="42" name="Text 40"/>
+          <p:cNvSpPr/>
+          <p:nvPr/>
+        </p:nvSpPr>
+        <p:spPr>
+          <a:xfrm>
+            <a:off x="4041648" y="3218688"/>
+            <a:ext cx="1490472" cy="182880"/>
+          </a:xfrm>
+          <a:prstGeom prst="rect">
+            <a:avLst/>
+          </a:prstGeom>
+          <a:noFill/>
+          <a:ln/>
+        </p:spPr>
+        <p:txBody>
+          <a:bodyPr wrap="square" lIns="0" tIns="0" rIns="0" bIns="0" rtlCol="0" anchor="ctr"/>
+          <a:lstStyle/>
+          <a:p>
+            <a:pPr indent="0" marL="0">
+              <a:buNone/>
+            </a:pPr>
+            <a:r>
+              <a:rPr lang="en-US" sz="850" b="1" dirty="0">
+                <a:solidFill>
+                  <a:srgbClr val="5B6B7C"/>
+                </a:solidFill>
+                <a:latin typeface="Arial" pitchFamily="34" charset="0"/>
+                <a:ea typeface="Arial" pitchFamily="34" charset="-122"/>
+                <a:cs typeface="Arial" pitchFamily="34" charset="-120"/>
+              </a:rPr>
+              <a:t>Months 7–9</a:t>
+            </a:r>
+            <a:endParaRPr lang="en-US" sz="850" dirty="0"/>
+          </a:p>
+        </p:txBody>
+      </p:sp>
+      <p:sp>
+        <p:nvSpPr>
+          <p:cNvPr id="43" name="Text 41"/>
+          <p:cNvSpPr/>
+          <p:nvPr/>
+        </p:nvSpPr>
+        <p:spPr>
+          <a:xfrm>
+            <a:off x="3639312" y="3429000"/>
+            <a:ext cx="1865376" cy="603504"/>
+          </a:xfrm>
+          <a:prstGeom prst="rect">
+            <a:avLst/>
+          </a:prstGeom>
+          <a:noFill/>
+          <a:ln/>
+        </p:spPr>
+        <p:txBody>
+          <a:bodyPr wrap="square" lIns="0" tIns="0" rIns="0" bIns="0" rtlCol="0" anchor="ctr"/>
+          <a:lstStyle/>
+          <a:p>
+            <a:pPr indent="0" marL="0">
+              <a:buNone/>
+            </a:pPr>
+            <a:r>
+              <a:rPr lang="en-US" sz="850" dirty="0">
+                <a:solidFill>
+                  <a:srgbClr val="5B6B7C"/>
+                </a:solidFill>
+                <a:latin typeface="Arial" pitchFamily="34" charset="0"/>
+                <a:ea typeface="Arial" pitchFamily="34" charset="-122"/>
+                <a:cs typeface="Arial" pitchFamily="34" charset="-120"/>
+              </a:rPr>
+              <a:t>…</a:t>
+            </a:r>
+            <a:endParaRPr lang="en-US" sz="850" dirty="0"/>
+          </a:p>
+        </p:txBody>
+      </p:sp>
+      <p:sp>
+        <p:nvSpPr>
+          <p:cNvPr id="44" name="Shape 42"/>
+          <p:cNvSpPr/>
+          <p:nvPr/>
+        </p:nvSpPr>
+        <p:spPr>
+          <a:xfrm>
+            <a:off x="5632704" y="3502152"/>
+            <a:ext cx="73152" cy="0"/>
+          </a:xfrm>
+          <a:prstGeom prst="line">
+            <a:avLst/>
+          </a:prstGeom>
+          <a:noFill/>
+          <a:ln w="25400">
+            <a:solidFill>
+              <a:srgbClr val="C9D4E0"/>
+            </a:solidFill>
+            <a:prstDash val="solid"/>
+            <a:tailEnd type="triangle"/>
+          </a:ln>
+        </p:spPr>
+      </p:sp>
+      <p:sp>
+        <p:nvSpPr>
+          <p:cNvPr id="45" name="Shape 43"/>
+          <p:cNvSpPr/>
+          <p:nvPr/>
+        </p:nvSpPr>
+        <p:spPr>
+          <a:xfrm>
+            <a:off x="5724144" y="2898648"/>
+            <a:ext cx="2084832" cy="1207008"/>
+          </a:xfrm>
+          <a:prstGeom prst="roundRect">
+            <a:avLst>
+              <a:gd name="adj" fmla="val 5303"/>
+            </a:avLst>
+          </a:prstGeom>
+          <a:solidFill>
+            <a:srgbClr val="F3F5F8"/>
+          </a:solidFill>
+          <a:ln w="9525">
+            <a:solidFill>
+              <a:srgbClr val="C9D4E0"/>
+            </a:solidFill>
+            <a:prstDash val="solid"/>
+          </a:ln>
+        </p:spPr>
+      </p:sp>
+      <p:sp>
+        <p:nvSpPr>
+          <p:cNvPr id="46" name="Shape 44"/>
+          <p:cNvSpPr/>
+          <p:nvPr/>
+        </p:nvSpPr>
+        <p:spPr>
+          <a:xfrm>
+            <a:off x="5833872" y="3008376"/>
+            <a:ext cx="329184" cy="329184"/>
+          </a:xfrm>
+          <a:prstGeom prst="ellipse">
+            <a:avLst/>
+          </a:prstGeom>
+          <a:solidFill>
+            <a:srgbClr val="C9D4E0"/>
+          </a:solidFill>
+          <a:ln/>
+        </p:spPr>
+      </p:sp>
+      <p:sp>
+        <p:nvSpPr>
+          <p:cNvPr id="47" name="Text 45"/>
+          <p:cNvSpPr/>
+          <p:nvPr/>
+        </p:nvSpPr>
+        <p:spPr>
+          <a:xfrm>
+            <a:off x="5833872" y="2994660"/>
+            <a:ext cx="329184" cy="329184"/>
+          </a:xfrm>
+          <a:prstGeom prst="rect">
+            <a:avLst/>
+          </a:prstGeom>
+          <a:noFill/>
+          <a:ln/>
+        </p:spPr>
+        <p:txBody>
+          <a:bodyPr wrap="square" lIns="0" tIns="0" rIns="0" bIns="0" rtlCol="0" anchor="ctr"/>
+          <a:lstStyle/>
+          <a:p>
+            <a:pPr algn="ctr" indent="0" marL="0">
+              <a:buNone/>
+            </a:pPr>
+            <a:r>
+              <a:rPr lang="en-US" sz="1300" b="1" dirty="0">
+                <a:solidFill>
+                  <a:srgbClr val="5B6B7C"/>
+                </a:solidFill>
+                <a:latin typeface="Arial" pitchFamily="34" charset="0"/>
+                <a:ea typeface="Arial" pitchFamily="34" charset="-122"/>
+                <a:cs typeface="Arial" pitchFamily="34" charset="-120"/>
+              </a:rPr>
+              <a:t>6</a:t>
+            </a:r>
+            <a:endParaRPr lang="en-US" sz="1300" dirty="0"/>
+          </a:p>
+        </p:txBody>
+      </p:sp>
+      <p:sp>
+        <p:nvSpPr>
+          <p:cNvPr id="48" name="Text 46"/>
+          <p:cNvSpPr/>
+          <p:nvPr/>
+        </p:nvSpPr>
+        <p:spPr>
+          <a:xfrm>
+            <a:off x="6236208" y="2990088"/>
+            <a:ext cx="1490472" cy="237744"/>
+          </a:xfrm>
+          <a:prstGeom prst="rect">
+            <a:avLst/>
+          </a:prstGeom>
+          <a:noFill/>
+          <a:ln/>
+        </p:spPr>
+        <p:txBody>
+          <a:bodyPr wrap="square" lIns="0" tIns="0" rIns="0" bIns="0" rtlCol="0" anchor="ctr"/>
+          <a:lstStyle/>
+          <a:p>
+            <a:pPr indent="0" marL="0">
+              <a:buNone/>
+            </a:pPr>
+            <a:r>
+              <a:rPr lang="en-US" sz="1100" b="1" dirty="0">
+                <a:solidFill>
+                  <a:srgbClr val="5B6B7C"/>
+                </a:solidFill>
+                <a:latin typeface="Arial" pitchFamily="34" charset="0"/>
+                <a:ea typeface="Arial" pitchFamily="34" charset="-122"/>
+                <a:cs typeface="Arial" pitchFamily="34" charset="-120"/>
+              </a:rPr>
+              <a:t>FedRAMP ConMon</a:t>
+            </a:r>
+            <a:endParaRPr lang="en-US" sz="1100" dirty="0"/>
+          </a:p>
+        </p:txBody>
+      </p:sp>
+      <p:sp>
+        <p:nvSpPr>
+          <p:cNvPr id="49" name="Text 47"/>
+          <p:cNvSpPr/>
+          <p:nvPr/>
+        </p:nvSpPr>
+        <p:spPr>
+          <a:xfrm>
+            <a:off x="6236208" y="3218688"/>
+            <a:ext cx="1490472" cy="182880"/>
+          </a:xfrm>
+          <a:prstGeom prst="rect">
+            <a:avLst/>
+          </a:prstGeom>
+          <a:noFill/>
+          <a:ln/>
+        </p:spPr>
+        <p:txBody>
+          <a:bodyPr wrap="square" lIns="0" tIns="0" rIns="0" bIns="0" rtlCol="0" anchor="ctr"/>
+          <a:lstStyle/>
+          <a:p>
+            <a:pPr indent="0" marL="0">
+              <a:buNone/>
+            </a:pPr>
+            <a:r>
+              <a:rPr lang="en-US" sz="850" b="1" dirty="0">
+                <a:solidFill>
+                  <a:srgbClr val="5B6B7C"/>
+                </a:solidFill>
+                <a:latin typeface="Arial" pitchFamily="34" charset="0"/>
+                <a:ea typeface="Arial" pitchFamily="34" charset="-122"/>
+                <a:cs typeface="Arial" pitchFamily="34" charset="-120"/>
+              </a:rPr>
+              <a:t>Months 9–12</a:t>
+            </a:r>
+            <a:endParaRPr lang="en-US" sz="850" dirty="0"/>
+          </a:p>
+        </p:txBody>
+      </p:sp>
+      <p:sp>
+        <p:nvSpPr>
+          <p:cNvPr id="50" name="Text 48"/>
+          <p:cNvSpPr/>
+          <p:nvPr/>
+        </p:nvSpPr>
+        <p:spPr>
+          <a:xfrm>
+            <a:off x="5833872" y="3429000"/>
+            <a:ext cx="1865376" cy="603504"/>
+          </a:xfrm>
+          <a:prstGeom prst="rect">
+            <a:avLst/>
+          </a:prstGeom>
+          <a:noFill/>
+          <a:ln/>
+        </p:spPr>
+        <p:txBody>
+          <a:bodyPr wrap="square" lIns="0" tIns="0" rIns="0" bIns="0" rtlCol="0" anchor="ctr"/>
+          <a:lstStyle/>
+          <a:p>
+            <a:pPr indent="0" marL="0">
+              <a:buNone/>
+            </a:pPr>
+            <a:r>
+              <a:rPr lang="en-US" sz="850" dirty="0">
+                <a:solidFill>
+                  <a:srgbClr val="5B6B7C"/>
+                </a:solidFill>
+                <a:latin typeface="Arial" pitchFamily="34" charset="0"/>
+                <a:ea typeface="Arial" pitchFamily="34" charset="-122"/>
+                <a:cs typeface="Arial" pitchFamily="34" charset="-120"/>
+              </a:rPr>
+              <a:t>…</a:t>
+            </a:r>
+            <a:endParaRPr lang="en-US" sz="850" dirty="0"/>
+          </a:p>
+        </p:txBody>
+      </p:sp>
+      <p:sp>
+        <p:nvSpPr>
+          <p:cNvPr id="51" name="Text 49"/>
+          <p:cNvSpPr/>
+          <p:nvPr/>
+        </p:nvSpPr>
+        <p:spPr>
+          <a:xfrm>
+            <a:off x="502920" y="4526280"/>
+            <a:ext cx="8229600" cy="320040"/>
+          </a:xfrm>
+          <a:prstGeom prst="rect">
+            <a:avLst/>
+          </a:prstGeom>
+          <a:noFill/>
+          <a:ln/>
+        </p:spPr>
+        <p:txBody>
+          <a:bodyPr wrap="square" lIns="0" tIns="0" rIns="0" bIns="0" rtlCol="0" anchor="ctr"/>
+          <a:lstStyle/>
+          <a:p>
+            <a:pPr algn="ctr" indent="0" marL="0">
+              <a:buNone/>
+            </a:pPr>
+            <a:r>
+              <a:rPr lang="en-US" sz="1050" i="1" dirty="0">
+                <a:solidFill>
+                  <a:srgbClr val="5B6B7C"/>
+                </a:solidFill>
+                <a:latin typeface="Arial" pitchFamily="34" charset="0"/>
+                <a:ea typeface="Arial" pitchFamily="34" charset="-122"/>
+                <a:cs typeface="Arial" pitchFamily="34" charset="-120"/>
+              </a:rPr>
+              <a:t>Phase 1 alone closes the SC-20 DNSSEC gap and produces the first unified CM-8 inventory.</a:t>
+            </a:r>
+            <a:endParaRPr lang="en-US" sz="1050" dirty="0"/>
+          </a:p>
+        </p:txBody>
+      </p:sp>
+    </p:spTree>
+  </p:cSld>
+  <p:clrMapOvr>
+    <a:masterClrMapping/>
+  </p:clrMapOvr>
+</p:sld>
+</file>
+
+<file path=ppt/slides/slide28.xml><?xml version="1.0" encoding="utf-8"?>
+<p:sld xmlns:a="http://schemas.openxmlformats.org/drawingml/2006/main" xmlns:r="http://schemas.openxmlformats.org/officeDocument/2006/relationships" xmlns:p="http://schemas.openxmlformats.org/presentationml/2006/main">
+  <p:cSld name="Slide 28">
+    <p:bg>
+      <p:bgPr>
+        <a:solidFill>
+          <a:srgbClr val="FFFFFF"/>
+        </a:solidFill>
+      </p:bgPr>
+    </p:bg>
+    <p:spTree>
+      <p:nvGrpSpPr>
+        <p:cNvPr id="1" name=""/>
+        <p:cNvGrpSpPr/>
+        <p:nvPr/>
+      </p:nvGrpSpPr>
+      <p:grpSpPr>
+        <a:xfrm>
+          <a:off x="0" y="0"/>
+          <a:ext cx="0" cy="0"/>
+          <a:chOff x="0" y="0"/>
+          <a:chExt cx="0" cy="0"/>
+        </a:xfrm>
+      </p:grpSpPr>
+      <p:sp>
+        <p:nvSpPr>
+          <p:cNvPr id="2" name="Text 0"/>
+          <p:cNvSpPr/>
+          <p:nvPr/>
+        </p:nvSpPr>
+        <p:spPr>
+          <a:xfrm>
+            <a:off x="502920" y="256032"/>
+            <a:ext cx="8229600" cy="274320"/>
+          </a:xfrm>
+          <a:prstGeom prst="rect">
+            <a:avLst/>
+          </a:prstGeom>
+          <a:noFill/>
+          <a:ln/>
+        </p:spPr>
+        <p:txBody>
+          <a:bodyPr wrap="square" lIns="0" tIns="0" rIns="0" bIns="0" rtlCol="0" anchor="ctr"/>
+          <a:lstStyle/>
+          <a:p>
+            <a:pPr indent="0" marL="0">
+              <a:buNone/>
+            </a:pPr>
+            <a:r>
+              <a:rPr lang="en-US" sz="1100" b="1" spc="200" kern="0" dirty="0">
+                <a:solidFill>
+                  <a:srgbClr val="1A9E8F"/>
+                </a:solidFill>
+                <a:latin typeface="Arial" pitchFamily="34" charset="0"/>
+                <a:ea typeface="Arial" pitchFamily="34" charset="-122"/>
+                <a:cs typeface="Arial" pitchFamily="34" charset="-120"/>
+              </a:rPr>
+              <a:t>RECOMMENDED BUILDOUT — STEP 2 OF 2</a:t>
+            </a:r>
+            <a:endParaRPr lang="en-US" sz="1100" dirty="0"/>
+          </a:p>
+        </p:txBody>
+      </p:sp>
+      <p:sp>
+        <p:nvSpPr>
+          <p:cNvPr id="3" name="Text 1"/>
+          <p:cNvSpPr/>
+          <p:nvPr/>
+        </p:nvSpPr>
+        <p:spPr>
+          <a:xfrm>
+            <a:off x="502920" y="512064"/>
+            <a:ext cx="8138160" cy="566928"/>
+          </a:xfrm>
+          <a:prstGeom prst="rect">
+            <a:avLst/>
+          </a:prstGeom>
+          <a:noFill/>
+          <a:ln/>
+        </p:spPr>
+        <p:txBody>
+          <a:bodyPr wrap="square" lIns="0" tIns="0" rIns="0" bIns="0" rtlCol="0" anchor="ctr"/>
+          <a:lstStyle/>
+          <a:p>
+            <a:pPr indent="0" marL="0">
+              <a:buNone/>
+            </a:pPr>
+            <a:r>
+              <a:rPr lang="en-US" sz="2600" b="1" dirty="0">
+                <a:solidFill>
+                  <a:srgbClr val="1F3A5F"/>
+                </a:solidFill>
+                <a:latin typeface="Arial" pitchFamily="34" charset="0"/>
+                <a:ea typeface="Arial" pitchFamily="34" charset="-122"/>
+                <a:cs typeface="Arial" pitchFamily="34" charset="-120"/>
+              </a:rPr>
+              <a:t>Extend to AWS, OCI, and continuous monitoring (months 5–12)</a:t>
+            </a:r>
+            <a:endParaRPr lang="en-US" sz="2600" dirty="0"/>
+          </a:p>
+        </p:txBody>
+      </p:sp>
+      <p:sp>
+        <p:nvSpPr>
+          <p:cNvPr id="4" name="Shape 2"/>
+          <p:cNvSpPr/>
+          <p:nvPr/>
+        </p:nvSpPr>
+        <p:spPr>
+          <a:xfrm>
+            <a:off x="237744" y="1234440"/>
             <a:ext cx="2084832" cy="1207008"/>
           </a:xfrm>
           <a:prstGeom prst="roundRect">
@@ -21557,33 +21422,33 @@
       </p:sp>
       <p:sp>
         <p:nvSpPr>
-          <p:cNvPr id="39" name="Shape 37"/>
-          <p:cNvSpPr/>
-          <p:nvPr/>
-        </p:nvSpPr>
-        <p:spPr>
-          <a:xfrm>
-            <a:off x="3639312" y="3008376"/>
+          <p:cNvPr id="5" name="Shape 3"/>
+          <p:cNvSpPr/>
+          <p:nvPr/>
+        </p:nvSpPr>
+        <p:spPr>
+          <a:xfrm>
+            <a:off x="347472" y="1344168"/>
             <a:ext cx="329184" cy="329184"/>
           </a:xfrm>
           <a:prstGeom prst="ellipse">
             <a:avLst/>
           </a:prstGeom>
           <a:solidFill>
-            <a:srgbClr val="C0392B"/>
+            <a:srgbClr val="5B6B7C"/>
           </a:solidFill>
           <a:ln/>
         </p:spPr>
       </p:sp>
       <p:sp>
         <p:nvSpPr>
-          <p:cNvPr id="40" name="Text 38"/>
-          <p:cNvSpPr/>
-          <p:nvPr/>
-        </p:nvSpPr>
-        <p:spPr>
-          <a:xfrm>
-            <a:off x="3639312" y="2994660"/>
+          <p:cNvPr id="6" name="Text 4"/>
+          <p:cNvSpPr/>
+          <p:nvPr/>
+        </p:nvSpPr>
+        <p:spPr>
+          <a:xfrm>
+            <a:off x="347472" y="1330452"/>
             <a:ext cx="329184" cy="329184"/>
           </a:xfrm>
           <a:prstGeom prst="rect">
@@ -21608,7 +21473,7 @@
                 <a:ea typeface="Arial" pitchFamily="34" charset="-122"/>
                 <a:cs typeface="Arial" pitchFamily="34" charset="-120"/>
               </a:rPr>
-              <a:t>5</a:t>
+              <a:t>0</a:t>
             </a:r>
             <a:endParaRPr lang="en-US" sz="1300" dirty="0"/>
           </a:p>
@@ -21616,13 +21481,13 @@
       </p:sp>
       <p:sp>
         <p:nvSpPr>
-          <p:cNvPr id="41" name="Text 39"/>
-          <p:cNvSpPr/>
-          <p:nvPr/>
-        </p:nvSpPr>
-        <p:spPr>
-          <a:xfrm>
-            <a:off x="4041648" y="2990088"/>
+          <p:cNvPr id="7" name="Text 5"/>
+          <p:cNvSpPr/>
+          <p:nvPr/>
+        </p:nvSpPr>
+        <p:spPr>
+          <a:xfrm>
+            <a:off x="749808" y="1325880"/>
             <a:ext cx="1490472" cy="237744"/>
           </a:xfrm>
           <a:prstGeom prst="rect">
@@ -21647,7 +21512,7 @@
                 <a:ea typeface="Arial" pitchFamily="34" charset="-122"/>
                 <a:cs typeface="Arial" pitchFamily="34" charset="-120"/>
               </a:rPr>
-              <a:t>OCI / OPM HRIT</a:t>
+              <a:t>Procure &amp; architect</a:t>
             </a:r>
             <a:endParaRPr lang="en-US" sz="1100" dirty="0"/>
           </a:p>
@@ -21655,13 +21520,13 @@
       </p:sp>
       <p:sp>
         <p:nvSpPr>
-          <p:cNvPr id="42" name="Text 40"/>
-          <p:cNvSpPr/>
-          <p:nvPr/>
-        </p:nvSpPr>
-        <p:spPr>
-          <a:xfrm>
-            <a:off x="4041648" y="3218688"/>
+          <p:cNvPr id="8" name="Text 6"/>
+          <p:cNvSpPr/>
+          <p:nvPr/>
+        </p:nvSpPr>
+        <p:spPr>
+          <a:xfrm>
+            <a:off x="749808" y="1554480"/>
             <a:ext cx="1490472" cy="182880"/>
           </a:xfrm>
           <a:prstGeom prst="rect">
@@ -21680,13 +21545,13 @@
             <a:r>
               <a:rPr lang="en-US" sz="850" b="1" dirty="0">
                 <a:solidFill>
-                  <a:srgbClr val="C0392B"/>
-                </a:solidFill>
-                <a:latin typeface="Arial" pitchFamily="34" charset="0"/>
-                <a:ea typeface="Arial" pitchFamily="34" charset="-122"/>
-                <a:cs typeface="Arial" pitchFamily="34" charset="-120"/>
-              </a:rPr>
-              <a:t>Months 7–9</a:t>
+                  <a:srgbClr val="5B6B7C"/>
+                </a:solidFill>
+                <a:latin typeface="Arial" pitchFamily="34" charset="0"/>
+                <a:ea typeface="Arial" pitchFamily="34" charset="-122"/>
+                <a:cs typeface="Arial" pitchFamily="34" charset="-120"/>
+              </a:rPr>
+              <a:t>Month 1</a:t>
             </a:r>
             <a:endParaRPr lang="en-US" sz="850" dirty="0"/>
           </a:p>
@@ -21694,13 +21559,13 @@
       </p:sp>
       <p:sp>
         <p:nvSpPr>
-          <p:cNvPr id="43" name="Text 41"/>
-          <p:cNvSpPr/>
-          <p:nvPr/>
-        </p:nvSpPr>
-        <p:spPr>
-          <a:xfrm>
-            <a:off x="3639312" y="3429000"/>
+          <p:cNvPr id="9" name="Text 7"/>
+          <p:cNvSpPr/>
+          <p:nvPr/>
+        </p:nvSpPr>
+        <p:spPr>
+          <a:xfrm>
+            <a:off x="347472" y="1764792"/>
             <a:ext cx="1865376" cy="603504"/>
           </a:xfrm>
           <a:prstGeom prst="rect">
@@ -21725,7 +21590,7 @@
                 <a:ea typeface="Arial" pitchFamily="34" charset="-122"/>
                 <a:cs typeface="Arial" pitchFamily="34" charset="-120"/>
               </a:rPr>
-              <a:t>External host records; FastConnect forwarders; OPM cert expiry monitoring; SA-9 table</a:t>
+              <a:t>Marketplace procurement; CIDR overlap audit across all four environments</a:t>
             </a:r>
             <a:endParaRPr lang="en-US" sz="850" dirty="0"/>
           </a:p>
@@ -21733,13 +21598,13 @@
       </p:sp>
       <p:sp>
         <p:nvSpPr>
-          <p:cNvPr id="44" name="Shape 42"/>
-          <p:cNvSpPr/>
-          <p:nvPr/>
-        </p:nvSpPr>
-        <p:spPr>
-          <a:xfrm>
-            <a:off x="5632704" y="3502152"/>
+          <p:cNvPr id="10" name="Shape 8"/>
+          <p:cNvSpPr/>
+          <p:nvPr/>
+        </p:nvSpPr>
+        <p:spPr>
+          <a:xfrm>
+            <a:off x="2340864" y="1837944"/>
             <a:ext cx="73152" cy="0"/>
           </a:xfrm>
           <a:prstGeom prst="line">
@@ -21757,13 +21622,13 @@
       </p:sp>
       <p:sp>
         <p:nvSpPr>
-          <p:cNvPr id="45" name="Shape 43"/>
-          <p:cNvSpPr/>
-          <p:nvPr/>
-        </p:nvSpPr>
-        <p:spPr>
-          <a:xfrm>
-            <a:off x="5724144" y="2898648"/>
+          <p:cNvPr id="11" name="Shape 9"/>
+          <p:cNvSpPr/>
+          <p:nvPr/>
+        </p:nvSpPr>
+        <p:spPr>
+          <a:xfrm>
+            <a:off x="2432304" y="1234440"/>
             <a:ext cx="2084832" cy="1207008"/>
           </a:xfrm>
           <a:prstGeom prst="roundRect">
@@ -21791,6 +21656,1152 @@
       </p:sp>
       <p:sp>
         <p:nvSpPr>
+          <p:cNvPr id="12" name="Shape 10"/>
+          <p:cNvSpPr/>
+          <p:nvPr/>
+        </p:nvSpPr>
+        <p:spPr>
+          <a:xfrm>
+            <a:off x="2542032" y="1344168"/>
+            <a:ext cx="329184" cy="329184"/>
+          </a:xfrm>
+          <a:prstGeom prst="ellipse">
+            <a:avLst/>
+          </a:prstGeom>
+          <a:solidFill>
+            <a:srgbClr val="1F3A5F"/>
+          </a:solidFill>
+          <a:ln/>
+        </p:spPr>
+      </p:sp>
+      <p:sp>
+        <p:nvSpPr>
+          <p:cNvPr id="13" name="Text 11"/>
+          <p:cNvSpPr/>
+          <p:nvPr/>
+        </p:nvSpPr>
+        <p:spPr>
+          <a:xfrm>
+            <a:off x="2542032" y="1330452"/>
+            <a:ext cx="329184" cy="329184"/>
+          </a:xfrm>
+          <a:prstGeom prst="rect">
+            <a:avLst/>
+          </a:prstGeom>
+          <a:noFill/>
+          <a:ln/>
+        </p:spPr>
+        <p:txBody>
+          <a:bodyPr wrap="square" lIns="0" tIns="0" rIns="0" bIns="0" rtlCol="0" anchor="ctr"/>
+          <a:lstStyle/>
+          <a:p>
+            <a:pPr algn="ctr" indent="0" marL="0">
+              <a:buNone/>
+            </a:pPr>
+            <a:r>
+              <a:rPr lang="en-US" sz="1300" b="1" dirty="0">
+                <a:solidFill>
+                  <a:srgbClr val="FFFFFF"/>
+                </a:solidFill>
+                <a:latin typeface="Arial" pitchFamily="34" charset="0"/>
+                <a:ea typeface="Arial" pitchFamily="34" charset="-122"/>
+                <a:cs typeface="Arial" pitchFamily="34" charset="-120"/>
+              </a:rPr>
+              <a:t>1</a:t>
+            </a:r>
+            <a:endParaRPr lang="en-US" sz="1300" dirty="0"/>
+          </a:p>
+        </p:txBody>
+      </p:sp>
+      <p:sp>
+        <p:nvSpPr>
+          <p:cNvPr id="14" name="Text 12"/>
+          <p:cNvSpPr/>
+          <p:nvPr/>
+        </p:nvSpPr>
+        <p:spPr>
+          <a:xfrm>
+            <a:off x="2944368" y="1325880"/>
+            <a:ext cx="1490472" cy="237744"/>
+          </a:xfrm>
+          <a:prstGeom prst="rect">
+            <a:avLst/>
+          </a:prstGeom>
+          <a:noFill/>
+          <a:ln/>
+        </p:spPr>
+        <p:txBody>
+          <a:bodyPr wrap="square" lIns="0" tIns="0" rIns="0" bIns="0" rtlCol="0" anchor="ctr"/>
+          <a:lstStyle/>
+          <a:p>
+            <a:pPr indent="0" marL="0">
+              <a:buNone/>
+            </a:pPr>
+            <a:r>
+              <a:rPr lang="en-US" sz="1100" b="1" dirty="0">
+                <a:solidFill>
+                  <a:srgbClr val="1E293B"/>
+                </a:solidFill>
+                <a:latin typeface="Arial" pitchFamily="34" charset="0"/>
+                <a:ea typeface="Arial" pitchFamily="34" charset="-122"/>
+                <a:cs typeface="Arial" pitchFamily="34" charset="-120"/>
+              </a:rPr>
+              <a:t>On-prem foundation</a:t>
+            </a:r>
+            <a:endParaRPr lang="en-US" sz="1100" dirty="0"/>
+          </a:p>
+        </p:txBody>
+      </p:sp>
+      <p:sp>
+        <p:nvSpPr>
+          <p:cNvPr id="15" name="Text 13"/>
+          <p:cNvSpPr/>
+          <p:nvPr/>
+        </p:nvSpPr>
+        <p:spPr>
+          <a:xfrm>
+            <a:off x="2944368" y="1554480"/>
+            <a:ext cx="1490472" cy="182880"/>
+          </a:xfrm>
+          <a:prstGeom prst="rect">
+            <a:avLst/>
+          </a:prstGeom>
+          <a:noFill/>
+          <a:ln/>
+        </p:spPr>
+        <p:txBody>
+          <a:bodyPr wrap="square" lIns="0" tIns="0" rIns="0" bIns="0" rtlCol="0" anchor="ctr"/>
+          <a:lstStyle/>
+          <a:p>
+            <a:pPr indent="0" marL="0">
+              <a:buNone/>
+            </a:pPr>
+            <a:r>
+              <a:rPr lang="en-US" sz="850" b="1" dirty="0">
+                <a:solidFill>
+                  <a:srgbClr val="1F3A5F"/>
+                </a:solidFill>
+                <a:latin typeface="Arial" pitchFamily="34" charset="0"/>
+                <a:ea typeface="Arial" pitchFamily="34" charset="-122"/>
+                <a:cs typeface="Arial" pitchFamily="34" charset="-120"/>
+              </a:rPr>
+              <a:t>Months 1–3</a:t>
+            </a:r>
+            <a:endParaRPr lang="en-US" sz="850" dirty="0"/>
+          </a:p>
+        </p:txBody>
+      </p:sp>
+      <p:sp>
+        <p:nvSpPr>
+          <p:cNvPr id="16" name="Text 14"/>
+          <p:cNvSpPr/>
+          <p:nvPr/>
+        </p:nvSpPr>
+        <p:spPr>
+          <a:xfrm>
+            <a:off x="2542032" y="1764792"/>
+            <a:ext cx="1865376" cy="603504"/>
+          </a:xfrm>
+          <a:prstGeom prst="rect">
+            <a:avLst/>
+          </a:prstGeom>
+          <a:noFill/>
+          <a:ln/>
+        </p:spPr>
+        <p:txBody>
+          <a:bodyPr wrap="square" lIns="0" tIns="0" rIns="0" bIns="0" rtlCol="0" anchor="ctr"/>
+          <a:lstStyle/>
+          <a:p>
+            <a:pPr indent="0" marL="0">
+              <a:buNone/>
+            </a:pPr>
+            <a:r>
+              <a:rPr lang="en-US" sz="850" dirty="0">
+                <a:solidFill>
+                  <a:srgbClr val="5B6B7C"/>
+                </a:solidFill>
+                <a:latin typeface="Arial" pitchFamily="34" charset="0"/>
+                <a:ea typeface="Arial" pitchFamily="34" charset="-122"/>
+                <a:cs typeface="Arial" pitchFamily="34" charset="-120"/>
+              </a:rPr>
+              <a:t>Grid Master HA; AD zones in; DNSSEC + DS record; DHCP migration; SIEM syslog; CM-8 export</a:t>
+            </a:r>
+            <a:endParaRPr lang="en-US" sz="850" dirty="0"/>
+          </a:p>
+        </p:txBody>
+      </p:sp>
+      <p:sp>
+        <p:nvSpPr>
+          <p:cNvPr id="17" name="Shape 15"/>
+          <p:cNvSpPr/>
+          <p:nvPr/>
+        </p:nvSpPr>
+        <p:spPr>
+          <a:xfrm>
+            <a:off x="4535424" y="1837944"/>
+            <a:ext cx="73152" cy="0"/>
+          </a:xfrm>
+          <a:prstGeom prst="line">
+            <a:avLst/>
+          </a:prstGeom>
+          <a:noFill/>
+          <a:ln w="25400">
+            <a:solidFill>
+              <a:srgbClr val="C9D4E0"/>
+            </a:solidFill>
+            <a:prstDash val="solid"/>
+            <a:tailEnd type="triangle"/>
+          </a:ln>
+        </p:spPr>
+      </p:sp>
+      <p:sp>
+        <p:nvSpPr>
+          <p:cNvPr id="18" name="Shape 16"/>
+          <p:cNvSpPr/>
+          <p:nvPr/>
+        </p:nvSpPr>
+        <p:spPr>
+          <a:xfrm>
+            <a:off x="4626864" y="1234440"/>
+            <a:ext cx="2084832" cy="1207008"/>
+          </a:xfrm>
+          <a:prstGeom prst="roundRect">
+            <a:avLst>
+              <a:gd name="adj" fmla="val 5303"/>
+            </a:avLst>
+          </a:prstGeom>
+          <a:solidFill>
+            <a:srgbClr val="FFFFFF"/>
+          </a:solidFill>
+          <a:ln w="9525">
+            <a:solidFill>
+              <a:srgbClr val="C9D4E0"/>
+            </a:solidFill>
+            <a:prstDash val="solid"/>
+          </a:ln>
+          <a:effectLst>
+            <a:outerShdw sx="100000" sy="100000" kx="0" ky="0" algn="bl" rotWithShape="0" blurRad="88900" dist="25400" dir="2700000">
+              <a:srgbClr val="000000">
+                <a:alpha val="14000"/>
+              </a:srgbClr>
+            </a:outerShdw>
+          </a:effectLst>
+        </p:spPr>
+      </p:sp>
+      <p:sp>
+        <p:nvSpPr>
+          <p:cNvPr id="19" name="Shape 17"/>
+          <p:cNvSpPr/>
+          <p:nvPr/>
+        </p:nvSpPr>
+        <p:spPr>
+          <a:xfrm>
+            <a:off x="4736592" y="1344168"/>
+            <a:ext cx="329184" cy="329184"/>
+          </a:xfrm>
+          <a:prstGeom prst="ellipse">
+            <a:avLst/>
+          </a:prstGeom>
+          <a:solidFill>
+            <a:srgbClr val="1F3A5F"/>
+          </a:solidFill>
+          <a:ln/>
+        </p:spPr>
+      </p:sp>
+      <p:sp>
+        <p:nvSpPr>
+          <p:cNvPr id="20" name="Text 18"/>
+          <p:cNvSpPr/>
+          <p:nvPr/>
+        </p:nvSpPr>
+        <p:spPr>
+          <a:xfrm>
+            <a:off x="4736592" y="1330452"/>
+            <a:ext cx="329184" cy="329184"/>
+          </a:xfrm>
+          <a:prstGeom prst="rect">
+            <a:avLst/>
+          </a:prstGeom>
+          <a:noFill/>
+          <a:ln/>
+        </p:spPr>
+        <p:txBody>
+          <a:bodyPr wrap="square" lIns="0" tIns="0" rIns="0" bIns="0" rtlCol="0" anchor="ctr"/>
+          <a:lstStyle/>
+          <a:p>
+            <a:pPr algn="ctr" indent="0" marL="0">
+              <a:buNone/>
+            </a:pPr>
+            <a:r>
+              <a:rPr lang="en-US" sz="1300" b="1" dirty="0">
+                <a:solidFill>
+                  <a:srgbClr val="FFFFFF"/>
+                </a:solidFill>
+                <a:latin typeface="Arial" pitchFamily="34" charset="0"/>
+                <a:ea typeface="Arial" pitchFamily="34" charset="-122"/>
+                <a:cs typeface="Arial" pitchFamily="34" charset="-120"/>
+              </a:rPr>
+              <a:t>2</a:t>
+            </a:r>
+            <a:endParaRPr lang="en-US" sz="1300" dirty="0"/>
+          </a:p>
+        </p:txBody>
+      </p:sp>
+      <p:sp>
+        <p:nvSpPr>
+          <p:cNvPr id="21" name="Text 19"/>
+          <p:cNvSpPr/>
+          <p:nvPr/>
+        </p:nvSpPr>
+        <p:spPr>
+          <a:xfrm>
+            <a:off x="5138928" y="1325880"/>
+            <a:ext cx="1490472" cy="237744"/>
+          </a:xfrm>
+          <a:prstGeom prst="rect">
+            <a:avLst/>
+          </a:prstGeom>
+          <a:noFill/>
+          <a:ln/>
+        </p:spPr>
+        <p:txBody>
+          <a:bodyPr wrap="square" lIns="0" tIns="0" rIns="0" bIns="0" rtlCol="0" anchor="ctr"/>
+          <a:lstStyle/>
+          <a:p>
+            <a:pPr indent="0" marL="0">
+              <a:buNone/>
+            </a:pPr>
+            <a:r>
+              <a:rPr lang="en-US" sz="1100" b="1" dirty="0">
+                <a:solidFill>
+                  <a:srgbClr val="1E293B"/>
+                </a:solidFill>
+                <a:latin typeface="Arial" pitchFamily="34" charset="0"/>
+                <a:ea typeface="Arial" pitchFamily="34" charset="-122"/>
+                <a:cs typeface="Arial" pitchFamily="34" charset="-120"/>
+              </a:rPr>
+              <a:t>VMware VCF 9.1</a:t>
+            </a:r>
+            <a:endParaRPr lang="en-US" sz="1100" dirty="0"/>
+          </a:p>
+        </p:txBody>
+      </p:sp>
+      <p:sp>
+        <p:nvSpPr>
+          <p:cNvPr id="22" name="Text 20"/>
+          <p:cNvSpPr/>
+          <p:nvPr/>
+        </p:nvSpPr>
+        <p:spPr>
+          <a:xfrm>
+            <a:off x="5138928" y="1554480"/>
+            <a:ext cx="1490472" cy="182880"/>
+          </a:xfrm>
+          <a:prstGeom prst="rect">
+            <a:avLst/>
+          </a:prstGeom>
+          <a:noFill/>
+          <a:ln/>
+        </p:spPr>
+        <p:txBody>
+          <a:bodyPr wrap="square" lIns="0" tIns="0" rIns="0" bIns="0" rtlCol="0" anchor="ctr"/>
+          <a:lstStyle/>
+          <a:p>
+            <a:pPr indent="0" marL="0">
+              <a:buNone/>
+            </a:pPr>
+            <a:r>
+              <a:rPr lang="en-US" sz="850" b="1" dirty="0">
+                <a:solidFill>
+                  <a:srgbClr val="1F3A5F"/>
+                </a:solidFill>
+                <a:latin typeface="Arial" pitchFamily="34" charset="0"/>
+                <a:ea typeface="Arial" pitchFamily="34" charset="-122"/>
+                <a:cs typeface="Arial" pitchFamily="34" charset="-120"/>
+              </a:rPr>
+              <a:t>Months 2–4</a:t>
+            </a:r>
+            <a:endParaRPr lang="en-US" sz="850" dirty="0"/>
+          </a:p>
+        </p:txBody>
+      </p:sp>
+      <p:sp>
+        <p:nvSpPr>
+          <p:cNvPr id="23" name="Text 21"/>
+          <p:cNvSpPr/>
+          <p:nvPr/>
+        </p:nvSpPr>
+        <p:spPr>
+          <a:xfrm>
+            <a:off x="4736592" y="1764792"/>
+            <a:ext cx="1865376" cy="603504"/>
+          </a:xfrm>
+          <a:prstGeom prst="rect">
+            <a:avLst/>
+          </a:prstGeom>
+          <a:noFill/>
+          <a:ln/>
+        </p:spPr>
+        <p:txBody>
+          <a:bodyPr wrap="square" lIns="0" tIns="0" rIns="0" bIns="0" rtlCol="0" anchor="ctr"/>
+          <a:lstStyle/>
+          <a:p>
+            <a:pPr indent="0" marL="0">
+              <a:buNone/>
+            </a:pPr>
+            <a:r>
+              <a:rPr lang="en-US" sz="850" dirty="0">
+                <a:solidFill>
+                  <a:srgbClr val="5B6B7C"/>
+                </a:solidFill>
+                <a:latin typeface="Arial" pitchFamily="34" charset="0"/>
+                <a:ea typeface="Arial" pitchFamily="34" charset="-122"/>
+                <a:cs typeface="Arial" pitchFamily="34" charset="-120"/>
+              </a:rPr>
+              <a:t>InfoBlox as native VCF IPAM backend; NSX-T DNS to Grid Members</a:t>
+            </a:r>
+            <a:endParaRPr lang="en-US" sz="850" dirty="0"/>
+          </a:p>
+        </p:txBody>
+      </p:sp>
+      <p:sp>
+        <p:nvSpPr>
+          <p:cNvPr id="24" name="Shape 22"/>
+          <p:cNvSpPr/>
+          <p:nvPr/>
+        </p:nvSpPr>
+        <p:spPr>
+          <a:xfrm>
+            <a:off x="6729984" y="1837944"/>
+            <a:ext cx="73152" cy="0"/>
+          </a:xfrm>
+          <a:prstGeom prst="line">
+            <a:avLst/>
+          </a:prstGeom>
+          <a:noFill/>
+          <a:ln w="25400">
+            <a:solidFill>
+              <a:srgbClr val="C9D4E0"/>
+            </a:solidFill>
+            <a:prstDash val="solid"/>
+            <a:tailEnd type="triangle"/>
+          </a:ln>
+        </p:spPr>
+      </p:sp>
+      <p:sp>
+        <p:nvSpPr>
+          <p:cNvPr id="25" name="Shape 23"/>
+          <p:cNvSpPr/>
+          <p:nvPr/>
+        </p:nvSpPr>
+        <p:spPr>
+          <a:xfrm>
+            <a:off x="6821424" y="1234440"/>
+            <a:ext cx="2084832" cy="1207008"/>
+          </a:xfrm>
+          <a:prstGeom prst="roundRect">
+            <a:avLst>
+              <a:gd name="adj" fmla="val 5303"/>
+            </a:avLst>
+          </a:prstGeom>
+          <a:solidFill>
+            <a:srgbClr val="FFFFFF"/>
+          </a:solidFill>
+          <a:ln w="9525">
+            <a:solidFill>
+              <a:srgbClr val="C9D4E0"/>
+            </a:solidFill>
+            <a:prstDash val="solid"/>
+          </a:ln>
+          <a:effectLst>
+            <a:outerShdw sx="100000" sy="100000" kx="0" ky="0" algn="bl" rotWithShape="0" blurRad="88900" dist="25400" dir="2700000">
+              <a:srgbClr val="000000">
+                <a:alpha val="14000"/>
+              </a:srgbClr>
+            </a:outerShdw>
+          </a:effectLst>
+        </p:spPr>
+      </p:sp>
+      <p:sp>
+        <p:nvSpPr>
+          <p:cNvPr id="26" name="Shape 24"/>
+          <p:cNvSpPr/>
+          <p:nvPr/>
+        </p:nvSpPr>
+        <p:spPr>
+          <a:xfrm>
+            <a:off x="6931152" y="1344168"/>
+            <a:ext cx="329184" cy="329184"/>
+          </a:xfrm>
+          <a:prstGeom prst="ellipse">
+            <a:avLst/>
+          </a:prstGeom>
+          <a:solidFill>
+            <a:srgbClr val="1A9E8F"/>
+          </a:solidFill>
+          <a:ln/>
+        </p:spPr>
+      </p:sp>
+      <p:sp>
+        <p:nvSpPr>
+          <p:cNvPr id="27" name="Text 25"/>
+          <p:cNvSpPr/>
+          <p:nvPr/>
+        </p:nvSpPr>
+        <p:spPr>
+          <a:xfrm>
+            <a:off x="6931152" y="1330452"/>
+            <a:ext cx="329184" cy="329184"/>
+          </a:xfrm>
+          <a:prstGeom prst="rect">
+            <a:avLst/>
+          </a:prstGeom>
+          <a:noFill/>
+          <a:ln/>
+        </p:spPr>
+        <p:txBody>
+          <a:bodyPr wrap="square" lIns="0" tIns="0" rIns="0" bIns="0" rtlCol="0" anchor="ctr"/>
+          <a:lstStyle/>
+          <a:p>
+            <a:pPr algn="ctr" indent="0" marL="0">
+              <a:buNone/>
+            </a:pPr>
+            <a:r>
+              <a:rPr lang="en-US" sz="1300" b="1" dirty="0">
+                <a:solidFill>
+                  <a:srgbClr val="FFFFFF"/>
+                </a:solidFill>
+                <a:latin typeface="Arial" pitchFamily="34" charset="0"/>
+                <a:ea typeface="Arial" pitchFamily="34" charset="-122"/>
+                <a:cs typeface="Arial" pitchFamily="34" charset="-120"/>
+              </a:rPr>
+              <a:t>3</a:t>
+            </a:r>
+            <a:endParaRPr lang="en-US" sz="1300" dirty="0"/>
+          </a:p>
+        </p:txBody>
+      </p:sp>
+      <p:sp>
+        <p:nvSpPr>
+          <p:cNvPr id="28" name="Text 26"/>
+          <p:cNvSpPr/>
+          <p:nvPr/>
+        </p:nvSpPr>
+        <p:spPr>
+          <a:xfrm>
+            <a:off x="7333488" y="1325880"/>
+            <a:ext cx="1490472" cy="237744"/>
+          </a:xfrm>
+          <a:prstGeom prst="rect">
+            <a:avLst/>
+          </a:prstGeom>
+          <a:noFill/>
+          <a:ln/>
+        </p:spPr>
+        <p:txBody>
+          <a:bodyPr wrap="square" lIns="0" tIns="0" rIns="0" bIns="0" rtlCol="0" anchor="ctr"/>
+          <a:lstStyle/>
+          <a:p>
+            <a:pPr indent="0" marL="0">
+              <a:buNone/>
+            </a:pPr>
+            <a:r>
+              <a:rPr lang="en-US" sz="1100" b="1" dirty="0">
+                <a:solidFill>
+                  <a:srgbClr val="1E293B"/>
+                </a:solidFill>
+                <a:latin typeface="Arial" pitchFamily="34" charset="0"/>
+                <a:ea typeface="Arial" pitchFamily="34" charset="-122"/>
+                <a:cs typeface="Arial" pitchFamily="34" charset="-120"/>
+              </a:rPr>
+              <a:t>Azure Government</a:t>
+            </a:r>
+            <a:endParaRPr lang="en-US" sz="1100" dirty="0"/>
+          </a:p>
+        </p:txBody>
+      </p:sp>
+      <p:sp>
+        <p:nvSpPr>
+          <p:cNvPr id="29" name="Text 27"/>
+          <p:cNvSpPr/>
+          <p:nvPr/>
+        </p:nvSpPr>
+        <p:spPr>
+          <a:xfrm>
+            <a:off x="7333488" y="1554480"/>
+            <a:ext cx="1490472" cy="182880"/>
+          </a:xfrm>
+          <a:prstGeom prst="rect">
+            <a:avLst/>
+          </a:prstGeom>
+          <a:noFill/>
+          <a:ln/>
+        </p:spPr>
+        <p:txBody>
+          <a:bodyPr wrap="square" lIns="0" tIns="0" rIns="0" bIns="0" rtlCol="0" anchor="ctr"/>
+          <a:lstStyle/>
+          <a:p>
+            <a:pPr indent="0" marL="0">
+              <a:buNone/>
+            </a:pPr>
+            <a:r>
+              <a:rPr lang="en-US" sz="850" b="1" dirty="0">
+                <a:solidFill>
+                  <a:srgbClr val="1A9E8F"/>
+                </a:solidFill>
+                <a:latin typeface="Arial" pitchFamily="34" charset="0"/>
+                <a:ea typeface="Arial" pitchFamily="34" charset="-122"/>
+                <a:cs typeface="Arial" pitchFamily="34" charset="-120"/>
+              </a:rPr>
+              <a:t>Months 3–5</a:t>
+            </a:r>
+            <a:endParaRPr lang="en-US" sz="850" dirty="0"/>
+          </a:p>
+        </p:txBody>
+      </p:sp>
+      <p:sp>
+        <p:nvSpPr>
+          <p:cNvPr id="30" name="Text 28"/>
+          <p:cNvSpPr/>
+          <p:nvPr/>
+        </p:nvSpPr>
+        <p:spPr>
+          <a:xfrm>
+            <a:off x="6931152" y="1764792"/>
+            <a:ext cx="1865376" cy="603504"/>
+          </a:xfrm>
+          <a:prstGeom prst="rect">
+            <a:avLst/>
+          </a:prstGeom>
+          <a:noFill/>
+          <a:ln/>
+        </p:spPr>
+        <p:txBody>
+          <a:bodyPr wrap="square" lIns="0" tIns="0" rIns="0" bIns="0" rtlCol="0" anchor="ctr"/>
+          <a:lstStyle/>
+          <a:p>
+            <a:pPr indent="0" marL="0">
+              <a:buNone/>
+            </a:pPr>
+            <a:r>
+              <a:rPr lang="en-US" sz="850" dirty="0">
+                <a:solidFill>
+                  <a:srgbClr val="5B6B7C"/>
+                </a:solidFill>
+                <a:latin typeface="Arial" pitchFamily="34" charset="0"/>
+                <a:ea typeface="Arial" pitchFamily="34" charset="-122"/>
+                <a:cs typeface="Arial" pitchFamily="34" charset="-120"/>
+              </a:rPr>
+              <a:t>Grid Member in Hub VNet; Azure connector; Key Vault cert polling; M365 GCC polling live</a:t>
+            </a:r>
+            <a:endParaRPr lang="en-US" sz="850" dirty="0"/>
+          </a:p>
+        </p:txBody>
+      </p:sp>
+      <p:sp>
+        <p:nvSpPr>
+          <p:cNvPr id="31" name="Shape 29"/>
+          <p:cNvSpPr/>
+          <p:nvPr/>
+        </p:nvSpPr>
+        <p:spPr>
+          <a:xfrm>
+            <a:off x="1335024" y="2898648"/>
+            <a:ext cx="2084832" cy="1207008"/>
+          </a:xfrm>
+          <a:prstGeom prst="roundRect">
+            <a:avLst>
+              <a:gd name="adj" fmla="val 5303"/>
+            </a:avLst>
+          </a:prstGeom>
+          <a:solidFill>
+            <a:srgbClr val="FFFFFF"/>
+          </a:solidFill>
+          <a:ln w="9525">
+            <a:solidFill>
+              <a:srgbClr val="C9D4E0"/>
+            </a:solidFill>
+            <a:prstDash val="solid"/>
+          </a:ln>
+          <a:effectLst>
+            <a:outerShdw sx="100000" sy="100000" kx="0" ky="0" algn="bl" rotWithShape="0" blurRad="88900" dist="25400" dir="2700000">
+              <a:srgbClr val="000000">
+                <a:alpha val="14000"/>
+              </a:srgbClr>
+            </a:outerShdw>
+          </a:effectLst>
+        </p:spPr>
+      </p:sp>
+      <p:sp>
+        <p:nvSpPr>
+          <p:cNvPr id="32" name="Shape 30"/>
+          <p:cNvSpPr/>
+          <p:nvPr/>
+        </p:nvSpPr>
+        <p:spPr>
+          <a:xfrm>
+            <a:off x="1444752" y="3008376"/>
+            <a:ext cx="329184" cy="329184"/>
+          </a:xfrm>
+          <a:prstGeom prst="ellipse">
+            <a:avLst/>
+          </a:prstGeom>
+          <a:solidFill>
+            <a:srgbClr val="D4860B"/>
+          </a:solidFill>
+          <a:ln/>
+        </p:spPr>
+      </p:sp>
+      <p:sp>
+        <p:nvSpPr>
+          <p:cNvPr id="33" name="Text 31"/>
+          <p:cNvSpPr/>
+          <p:nvPr/>
+        </p:nvSpPr>
+        <p:spPr>
+          <a:xfrm>
+            <a:off x="1444752" y="2994660"/>
+            <a:ext cx="329184" cy="329184"/>
+          </a:xfrm>
+          <a:prstGeom prst="rect">
+            <a:avLst/>
+          </a:prstGeom>
+          <a:noFill/>
+          <a:ln/>
+        </p:spPr>
+        <p:txBody>
+          <a:bodyPr wrap="square" lIns="0" tIns="0" rIns="0" bIns="0" rtlCol="0" anchor="ctr"/>
+          <a:lstStyle/>
+          <a:p>
+            <a:pPr algn="ctr" indent="0" marL="0">
+              <a:buNone/>
+            </a:pPr>
+            <a:r>
+              <a:rPr lang="en-US" sz="1300" b="1" dirty="0">
+                <a:solidFill>
+                  <a:srgbClr val="FFFFFF"/>
+                </a:solidFill>
+                <a:latin typeface="Arial" pitchFamily="34" charset="0"/>
+                <a:ea typeface="Arial" pitchFamily="34" charset="-122"/>
+                <a:cs typeface="Arial" pitchFamily="34" charset="-120"/>
+              </a:rPr>
+              <a:t>4</a:t>
+            </a:r>
+            <a:endParaRPr lang="en-US" sz="1300" dirty="0"/>
+          </a:p>
+        </p:txBody>
+      </p:sp>
+      <p:sp>
+        <p:nvSpPr>
+          <p:cNvPr id="34" name="Text 32"/>
+          <p:cNvSpPr/>
+          <p:nvPr/>
+        </p:nvSpPr>
+        <p:spPr>
+          <a:xfrm>
+            <a:off x="1847088" y="2990088"/>
+            <a:ext cx="1490472" cy="237744"/>
+          </a:xfrm>
+          <a:prstGeom prst="rect">
+            <a:avLst/>
+          </a:prstGeom>
+          <a:noFill/>
+          <a:ln/>
+        </p:spPr>
+        <p:txBody>
+          <a:bodyPr wrap="square" lIns="0" tIns="0" rIns="0" bIns="0" rtlCol="0" anchor="ctr"/>
+          <a:lstStyle/>
+          <a:p>
+            <a:pPr indent="0" marL="0">
+              <a:buNone/>
+            </a:pPr>
+            <a:r>
+              <a:rPr lang="en-US" sz="1100" b="1" dirty="0">
+                <a:solidFill>
+                  <a:srgbClr val="1E293B"/>
+                </a:solidFill>
+                <a:latin typeface="Arial" pitchFamily="34" charset="0"/>
+                <a:ea typeface="Arial" pitchFamily="34" charset="-122"/>
+                <a:cs typeface="Arial" pitchFamily="34" charset="-120"/>
+              </a:rPr>
+              <a:t>AWS GovCloud</a:t>
+            </a:r>
+            <a:endParaRPr lang="en-US" sz="1100" dirty="0"/>
+          </a:p>
+        </p:txBody>
+      </p:sp>
+      <p:sp>
+        <p:nvSpPr>
+          <p:cNvPr id="35" name="Text 33"/>
+          <p:cNvSpPr/>
+          <p:nvPr/>
+        </p:nvSpPr>
+        <p:spPr>
+          <a:xfrm>
+            <a:off x="1847088" y="3218688"/>
+            <a:ext cx="1490472" cy="182880"/>
+          </a:xfrm>
+          <a:prstGeom prst="rect">
+            <a:avLst/>
+          </a:prstGeom>
+          <a:noFill/>
+          <a:ln/>
+        </p:spPr>
+        <p:txBody>
+          <a:bodyPr wrap="square" lIns="0" tIns="0" rIns="0" bIns="0" rtlCol="0" anchor="ctr"/>
+          <a:lstStyle/>
+          <a:p>
+            <a:pPr indent="0" marL="0">
+              <a:buNone/>
+            </a:pPr>
+            <a:r>
+              <a:rPr lang="en-US" sz="850" b="1" dirty="0">
+                <a:solidFill>
+                  <a:srgbClr val="D4860B"/>
+                </a:solidFill>
+                <a:latin typeface="Arial" pitchFamily="34" charset="0"/>
+                <a:ea typeface="Arial" pitchFamily="34" charset="-122"/>
+                <a:cs typeface="Arial" pitchFamily="34" charset="-120"/>
+              </a:rPr>
+              <a:t>Months 5–7</a:t>
+            </a:r>
+            <a:endParaRPr lang="en-US" sz="850" dirty="0"/>
+          </a:p>
+        </p:txBody>
+      </p:sp>
+      <p:sp>
+        <p:nvSpPr>
+          <p:cNvPr id="36" name="Text 34"/>
+          <p:cNvSpPr/>
+          <p:nvPr/>
+        </p:nvSpPr>
+        <p:spPr>
+          <a:xfrm>
+            <a:off x="1444752" y="3429000"/>
+            <a:ext cx="1865376" cy="603504"/>
+          </a:xfrm>
+          <a:prstGeom prst="rect">
+            <a:avLst/>
+          </a:prstGeom>
+          <a:noFill/>
+          <a:ln/>
+        </p:spPr>
+        <p:txBody>
+          <a:bodyPr wrap="square" lIns="0" tIns="0" rIns="0" bIns="0" rtlCol="0" anchor="ctr"/>
+          <a:lstStyle/>
+          <a:p>
+            <a:pPr indent="0" marL="0">
+              <a:buNone/>
+            </a:pPr>
+            <a:r>
+              <a:rPr lang="en-US" sz="850" dirty="0">
+                <a:solidFill>
+                  <a:srgbClr val="5B6B7C"/>
+                </a:solidFill>
+                <a:latin typeface="Arial" pitchFamily="34" charset="0"/>
+                <a:ea typeface="Arial" pitchFamily="34" charset="-122"/>
+                <a:cs typeface="Arial" pitchFamily="34" charset="-120"/>
+              </a:rPr>
+              <a:t>Grid Member in Transit VPC; DHCP Options Sets; ACM CNAME automation; Security Hub</a:t>
+            </a:r>
+            <a:endParaRPr lang="en-US" sz="850" dirty="0"/>
+          </a:p>
+        </p:txBody>
+      </p:sp>
+      <p:sp>
+        <p:nvSpPr>
+          <p:cNvPr id="37" name="Shape 35"/>
+          <p:cNvSpPr/>
+          <p:nvPr/>
+        </p:nvSpPr>
+        <p:spPr>
+          <a:xfrm>
+            <a:off x="3438144" y="3502152"/>
+            <a:ext cx="73152" cy="0"/>
+          </a:xfrm>
+          <a:prstGeom prst="line">
+            <a:avLst/>
+          </a:prstGeom>
+          <a:noFill/>
+          <a:ln w="25400">
+            <a:solidFill>
+              <a:srgbClr val="C9D4E0"/>
+            </a:solidFill>
+            <a:prstDash val="solid"/>
+            <a:tailEnd type="triangle"/>
+          </a:ln>
+        </p:spPr>
+      </p:sp>
+      <p:sp>
+        <p:nvSpPr>
+          <p:cNvPr id="38" name="Shape 36"/>
+          <p:cNvSpPr/>
+          <p:nvPr/>
+        </p:nvSpPr>
+        <p:spPr>
+          <a:xfrm>
+            <a:off x="3529584" y="2898648"/>
+            <a:ext cx="2084832" cy="1207008"/>
+          </a:xfrm>
+          <a:prstGeom prst="roundRect">
+            <a:avLst>
+              <a:gd name="adj" fmla="val 5303"/>
+            </a:avLst>
+          </a:prstGeom>
+          <a:solidFill>
+            <a:srgbClr val="FFFFFF"/>
+          </a:solidFill>
+          <a:ln w="9525">
+            <a:solidFill>
+              <a:srgbClr val="C9D4E0"/>
+            </a:solidFill>
+            <a:prstDash val="solid"/>
+          </a:ln>
+          <a:effectLst>
+            <a:outerShdw sx="100000" sy="100000" kx="0" ky="0" algn="bl" rotWithShape="0" blurRad="88900" dist="25400" dir="2700000">
+              <a:srgbClr val="000000">
+                <a:alpha val="14000"/>
+              </a:srgbClr>
+            </a:outerShdw>
+          </a:effectLst>
+        </p:spPr>
+      </p:sp>
+      <p:sp>
+        <p:nvSpPr>
+          <p:cNvPr id="39" name="Shape 37"/>
+          <p:cNvSpPr/>
+          <p:nvPr/>
+        </p:nvSpPr>
+        <p:spPr>
+          <a:xfrm>
+            <a:off x="3639312" y="3008376"/>
+            <a:ext cx="329184" cy="329184"/>
+          </a:xfrm>
+          <a:prstGeom prst="ellipse">
+            <a:avLst/>
+          </a:prstGeom>
+          <a:solidFill>
+            <a:srgbClr val="C0392B"/>
+          </a:solidFill>
+          <a:ln/>
+        </p:spPr>
+      </p:sp>
+      <p:sp>
+        <p:nvSpPr>
+          <p:cNvPr id="40" name="Text 38"/>
+          <p:cNvSpPr/>
+          <p:nvPr/>
+        </p:nvSpPr>
+        <p:spPr>
+          <a:xfrm>
+            <a:off x="3639312" y="2994660"/>
+            <a:ext cx="329184" cy="329184"/>
+          </a:xfrm>
+          <a:prstGeom prst="rect">
+            <a:avLst/>
+          </a:prstGeom>
+          <a:noFill/>
+          <a:ln/>
+        </p:spPr>
+        <p:txBody>
+          <a:bodyPr wrap="square" lIns="0" tIns="0" rIns="0" bIns="0" rtlCol="0" anchor="ctr"/>
+          <a:lstStyle/>
+          <a:p>
+            <a:pPr algn="ctr" indent="0" marL="0">
+              <a:buNone/>
+            </a:pPr>
+            <a:r>
+              <a:rPr lang="en-US" sz="1300" b="1" dirty="0">
+                <a:solidFill>
+                  <a:srgbClr val="FFFFFF"/>
+                </a:solidFill>
+                <a:latin typeface="Arial" pitchFamily="34" charset="0"/>
+                <a:ea typeface="Arial" pitchFamily="34" charset="-122"/>
+                <a:cs typeface="Arial" pitchFamily="34" charset="-120"/>
+              </a:rPr>
+              <a:t>5</a:t>
+            </a:r>
+            <a:endParaRPr lang="en-US" sz="1300" dirty="0"/>
+          </a:p>
+        </p:txBody>
+      </p:sp>
+      <p:sp>
+        <p:nvSpPr>
+          <p:cNvPr id="41" name="Text 39"/>
+          <p:cNvSpPr/>
+          <p:nvPr/>
+        </p:nvSpPr>
+        <p:spPr>
+          <a:xfrm>
+            <a:off x="4041648" y="2990088"/>
+            <a:ext cx="1490472" cy="237744"/>
+          </a:xfrm>
+          <a:prstGeom prst="rect">
+            <a:avLst/>
+          </a:prstGeom>
+          <a:noFill/>
+          <a:ln/>
+        </p:spPr>
+        <p:txBody>
+          <a:bodyPr wrap="square" lIns="0" tIns="0" rIns="0" bIns="0" rtlCol="0" anchor="ctr"/>
+          <a:lstStyle/>
+          <a:p>
+            <a:pPr indent="0" marL="0">
+              <a:buNone/>
+            </a:pPr>
+            <a:r>
+              <a:rPr lang="en-US" sz="1100" b="1" dirty="0">
+                <a:solidFill>
+                  <a:srgbClr val="1E293B"/>
+                </a:solidFill>
+                <a:latin typeface="Arial" pitchFamily="34" charset="0"/>
+                <a:ea typeface="Arial" pitchFamily="34" charset="-122"/>
+                <a:cs typeface="Arial" pitchFamily="34" charset="-120"/>
+              </a:rPr>
+              <a:t>OCI / OPM HRIT</a:t>
+            </a:r>
+            <a:endParaRPr lang="en-US" sz="1100" dirty="0"/>
+          </a:p>
+        </p:txBody>
+      </p:sp>
+      <p:sp>
+        <p:nvSpPr>
+          <p:cNvPr id="42" name="Text 40"/>
+          <p:cNvSpPr/>
+          <p:nvPr/>
+        </p:nvSpPr>
+        <p:spPr>
+          <a:xfrm>
+            <a:off x="4041648" y="3218688"/>
+            <a:ext cx="1490472" cy="182880"/>
+          </a:xfrm>
+          <a:prstGeom prst="rect">
+            <a:avLst/>
+          </a:prstGeom>
+          <a:noFill/>
+          <a:ln/>
+        </p:spPr>
+        <p:txBody>
+          <a:bodyPr wrap="square" lIns="0" tIns="0" rIns="0" bIns="0" rtlCol="0" anchor="ctr"/>
+          <a:lstStyle/>
+          <a:p>
+            <a:pPr indent="0" marL="0">
+              <a:buNone/>
+            </a:pPr>
+            <a:r>
+              <a:rPr lang="en-US" sz="850" b="1" dirty="0">
+                <a:solidFill>
+                  <a:srgbClr val="C0392B"/>
+                </a:solidFill>
+                <a:latin typeface="Arial" pitchFamily="34" charset="0"/>
+                <a:ea typeface="Arial" pitchFamily="34" charset="-122"/>
+                <a:cs typeface="Arial" pitchFamily="34" charset="-120"/>
+              </a:rPr>
+              <a:t>Months 7–9</a:t>
+            </a:r>
+            <a:endParaRPr lang="en-US" sz="850" dirty="0"/>
+          </a:p>
+        </p:txBody>
+      </p:sp>
+      <p:sp>
+        <p:nvSpPr>
+          <p:cNvPr id="43" name="Text 41"/>
+          <p:cNvSpPr/>
+          <p:nvPr/>
+        </p:nvSpPr>
+        <p:spPr>
+          <a:xfrm>
+            <a:off x="3639312" y="3429000"/>
+            <a:ext cx="1865376" cy="603504"/>
+          </a:xfrm>
+          <a:prstGeom prst="rect">
+            <a:avLst/>
+          </a:prstGeom>
+          <a:noFill/>
+          <a:ln/>
+        </p:spPr>
+        <p:txBody>
+          <a:bodyPr wrap="square" lIns="0" tIns="0" rIns="0" bIns="0" rtlCol="0" anchor="ctr"/>
+          <a:lstStyle/>
+          <a:p>
+            <a:pPr indent="0" marL="0">
+              <a:buNone/>
+            </a:pPr>
+            <a:r>
+              <a:rPr lang="en-US" sz="850" dirty="0">
+                <a:solidFill>
+                  <a:srgbClr val="5B6B7C"/>
+                </a:solidFill>
+                <a:latin typeface="Arial" pitchFamily="34" charset="0"/>
+                <a:ea typeface="Arial" pitchFamily="34" charset="-122"/>
+                <a:cs typeface="Arial" pitchFamily="34" charset="-120"/>
+              </a:rPr>
+              <a:t>External host records; FastConnect forwarders; OPM cert expiry monitoring; SA-9 table</a:t>
+            </a:r>
+            <a:endParaRPr lang="en-US" sz="850" dirty="0"/>
+          </a:p>
+        </p:txBody>
+      </p:sp>
+      <p:sp>
+        <p:nvSpPr>
+          <p:cNvPr id="44" name="Shape 42"/>
+          <p:cNvSpPr/>
+          <p:nvPr/>
+        </p:nvSpPr>
+        <p:spPr>
+          <a:xfrm>
+            <a:off x="5632704" y="3502152"/>
+            <a:ext cx="73152" cy="0"/>
+          </a:xfrm>
+          <a:prstGeom prst="line">
+            <a:avLst/>
+          </a:prstGeom>
+          <a:noFill/>
+          <a:ln w="25400">
+            <a:solidFill>
+              <a:srgbClr val="C9D4E0"/>
+            </a:solidFill>
+            <a:prstDash val="solid"/>
+            <a:tailEnd type="triangle"/>
+          </a:ln>
+        </p:spPr>
+      </p:sp>
+      <p:sp>
+        <p:nvSpPr>
+          <p:cNvPr id="45" name="Shape 43"/>
+          <p:cNvSpPr/>
+          <p:nvPr/>
+        </p:nvSpPr>
+        <p:spPr>
+          <a:xfrm>
+            <a:off x="5724144" y="2898648"/>
+            <a:ext cx="2084832" cy="1207008"/>
+          </a:xfrm>
+          <a:prstGeom prst="roundRect">
+            <a:avLst>
+              <a:gd name="adj" fmla="val 5303"/>
+            </a:avLst>
+          </a:prstGeom>
+          <a:solidFill>
+            <a:srgbClr val="FFFFFF"/>
+          </a:solidFill>
+          <a:ln w="9525">
+            <a:solidFill>
+              <a:srgbClr val="C9D4E0"/>
+            </a:solidFill>
+            <a:prstDash val="solid"/>
+          </a:ln>
+          <a:effectLst>
+            <a:outerShdw sx="100000" sy="100000" kx="0" ky="0" algn="bl" rotWithShape="0" blurRad="88900" dist="25400" dir="2700000">
+              <a:srgbClr val="000000">
+                <a:alpha val="14000"/>
+              </a:srgbClr>
+            </a:outerShdw>
+          </a:effectLst>
+        </p:spPr>
+      </p:sp>
+      <p:sp>
+        <p:nvSpPr>
           <p:cNvPr id="46" name="Shape 44"/>
           <p:cNvSpPr/>
           <p:nvPr/>
@@ -22012,9 +23023,9 @@
 </p:sld>
 </file>
 
-<file path=ppt/slides/slide28.xml><?xml version="1.0" encoding="utf-8"?>
+<file path=ppt/slides/slide29.xml><?xml version="1.0" encoding="utf-8"?>
 <p:sld xmlns:a="http://schemas.openxmlformats.org/drawingml/2006/main" xmlns:r="http://schemas.openxmlformats.org/officeDocument/2006/relationships" xmlns:p="http://schemas.openxmlformats.org/presentationml/2006/main">
-  <p:cSld name="Slide 28">
+  <p:cSld name="Slide 29">
     <p:bg>
       <p:bgPr>
         <a:solidFill>
